--- a/docs/SolarFit_화면설명서.pptx
+++ b/docs/SolarFit_화면설명서.pptx
@@ -4,6 +4,9 @@
   <p:sldMasterIdLst>
     <p:sldMasterId id="2147483648" r:id="rId1"/>
   </p:sldMasterIdLst>
+  <p:notesMasterIdLst>
+    <p:notesMasterId r:id="rId15"/>
+  </p:notesMasterIdLst>
   <p:sldIdLst>
     <p:sldId id="256" r:id="rId2"/>
     <p:sldId id="257" r:id="rId3"/>
@@ -18,13 +21,9 @@
     <p:sldId id="266" r:id="rId12"/>
     <p:sldId id="267" r:id="rId13"/>
     <p:sldId id="268" r:id="rId14"/>
-    <p:sldId id="269" r:id="rId15"/>
   </p:sldIdLst>
-  <p:notesMasterIdLst>
-    <p:notesMasterId r:id="rId16"/>
-  </p:notesMasterIdLst>
-  <p:sldSz cx="12161520" cy="6858000"/>
-  <p:notesSz cx="6858000" cy="12161520"/>
+  <p:sldSz cx="12161838" cy="6858000"/>
+  <p:notesSz cx="6858000" cy="12161838"/>
   <p:defaultTextStyle>
     <a:lvl1pPr marL="0" algn="l" defTabSz="914400" rtl="0" eaLnBrk="1" latinLnBrk="0" hangingPunct="1">
       <a:defRPr sz="1800" kern="1200">
@@ -117,6 +116,11 @@
       </a:defRPr>
     </a:lvl9pPr>
   </p:defaultTextStyle>
+  <p:extLst>
+    <p:ext uri="{EFAFB233-063F-42B5-8137-9DF3F51BA10A}">
+      <p15:sldGuideLst xmlns:p15="http://schemas.microsoft.com/office/powerpoint/2012/main"/>
+    </p:ext>
+  </p:extLst>
 </p:presentation>
 </file>
 
@@ -142,240 +146,16 @@
           <a:chExt cx="0" cy="0"/>
         </a:xfrm>
       </p:grpSpPr>
-      <p:sp>
-        <p:nvSpPr>
-          <p:cNvPr id="2" name="Header Placeholder 1"/>
-          <p:cNvSpPr>
-            <a:spLocks noGrp="1"/>
-          </p:cNvSpPr>
-          <p:nvPr>
-            <p:ph type="hdr" sz="quarter"/>
-          </p:nvPr>
-        </p:nvSpPr>
-        <p:spPr>
-          <a:xfrm>
-            <a:off x="0" y="0"/>
-            <a:ext cx="2971800" cy="458788"/>
-          </a:xfrm>
-          <a:prstGeom prst="rect">
-            <a:avLst/>
-          </a:prstGeom>
-        </p:spPr>
-        <p:txBody>
-          <a:bodyPr vert="horz" lIns="91440" tIns="45720" rIns="91440" bIns="45720" rtlCol="0"/>
-          <a:lstStyle>
-            <a:lvl1pPr algn="l">
-              <a:defRPr sz="1200"/>
-            </a:lvl1pPr>
-          </a:lstStyle>
-          <a:p>
-            <a:endParaRPr lang="en-US"/>
-          </a:p>
-        </p:txBody>
-      </p:sp>
-      <p:sp>
-        <p:nvSpPr>
-          <p:cNvPr id="3" name="Date Placeholder 2"/>
-          <p:cNvSpPr>
-            <a:spLocks noGrp="1"/>
-          </p:cNvSpPr>
-          <p:nvPr>
-            <p:ph type="dt" idx="1"/>
-          </p:nvPr>
-        </p:nvSpPr>
-        <p:spPr>
-          <a:xfrm>
-            <a:off x="3884613" y="0"/>
-            <a:ext cx="2971800" cy="458788"/>
-          </a:xfrm>
-          <a:prstGeom prst="rect">
-            <a:avLst/>
-          </a:prstGeom>
-        </p:spPr>
-        <p:txBody>
-          <a:bodyPr vert="horz" lIns="91440" tIns="45720" rIns="91440" bIns="45720" rtlCol="0"/>
-          <a:lstStyle>
-            <a:lvl1pPr algn="r">
-              <a:defRPr sz="1200"/>
-            </a:lvl1pPr>
-          </a:lstStyle>
-          <a:p>
-            <a:fld id="{5282F153-3F37-0F45-9E97-73ACFA13230C}" type="datetimeFigureOut">
-              <a:rPr lang="en-US"/>
-              <a:t>7/23/19</a:t>
-            </a:fld>
-            <a:endParaRPr lang="en-US"/>
-          </a:p>
-        </p:txBody>
-      </p:sp>
-      <p:sp>
-        <p:nvSpPr>
-          <p:cNvPr id="4" name="Slide Image Placeholder 3"/>
-          <p:cNvSpPr>
-            <a:spLocks noGrp="1" noRot="1" noChangeAspect="1"/>
-          </p:cNvSpPr>
-          <p:nvPr>
-            <p:ph type="sldImg" idx="2"/>
-          </p:nvPr>
-        </p:nvSpPr>
-        <p:spPr>
-          <a:xfrm>
-            <a:off x="685800" y="1143000"/>
-            <a:ext cx="5486400" cy="3086100"/>
-          </a:xfrm>
-          <a:prstGeom prst="rect">
-            <a:avLst/>
-          </a:prstGeom>
-          <a:noFill/>
-          <a:ln w="12700">
-            <a:solidFill>
-              <a:prstClr val="black"/>
-            </a:solidFill>
-          </a:ln>
-        </p:spPr>
-        <p:txBody>
-          <a:bodyPr vert="horz" lIns="91440" tIns="45720" rIns="91440" bIns="45720" rtlCol="0" anchor="ctr"/>
-          <a:lstStyle/>
-          <a:p>
-            <a:endParaRPr lang="en-US"/>
-          </a:p>
-        </p:txBody>
-      </p:sp>
-      <p:sp>
-        <p:nvSpPr>
-          <p:cNvPr id="5" name="Notes Placeholder 4"/>
-          <p:cNvSpPr>
-            <a:spLocks noGrp="1"/>
-          </p:cNvSpPr>
-          <p:nvPr>
-            <p:ph type="body" sz="quarter" idx="3"/>
-          </p:nvPr>
-        </p:nvSpPr>
-        <p:spPr>
-          <a:xfrm>
-            <a:off x="685800" y="4400550"/>
-            <a:ext cx="5486400" cy="3600450"/>
-          </a:xfrm>
-          <a:prstGeom prst="rect">
-            <a:avLst/>
-          </a:prstGeom>
-        </p:spPr>
-        <p:txBody>
-          <a:bodyPr vert="horz" lIns="91440" tIns="45720" rIns="91440" bIns="45720" rtlCol="0"/>
-          <a:lstStyle/>
-          <a:p>
-            <a:pPr lvl="0"/>
-            <a:r>
-              <a:rPr lang="en-US"/>
-              <a:t>Click to edit Master text styles</a:t>
-            </a:r>
-          </a:p>
-          <a:p>
-            <a:pPr lvl="1"/>
-            <a:r>
-              <a:rPr lang="en-US"/>
-              <a:t>Second level</a:t>
-            </a:r>
-          </a:p>
-          <a:p>
-            <a:pPr lvl="2"/>
-            <a:r>
-              <a:rPr lang="en-US"/>
-              <a:t>Third level</a:t>
-            </a:r>
-          </a:p>
-          <a:p>
-            <a:pPr lvl="3"/>
-            <a:r>
-              <a:rPr lang="en-US"/>
-              <a:t>Fourth level</a:t>
-            </a:r>
-          </a:p>
-          <a:p>
-            <a:pPr lvl="4"/>
-            <a:r>
-              <a:rPr lang="en-US"/>
-              <a:t>Fifth level</a:t>
-            </a:r>
-          </a:p>
-        </p:txBody>
-      </p:sp>
-      <p:sp>
-        <p:nvSpPr>
-          <p:cNvPr id="6" name="Footer Placeholder 5"/>
-          <p:cNvSpPr>
-            <a:spLocks noGrp="1"/>
-          </p:cNvSpPr>
-          <p:nvPr>
-            <p:ph type="ftr" sz="quarter" idx="4"/>
-          </p:nvPr>
-        </p:nvSpPr>
-        <p:spPr>
-          <a:xfrm>
-            <a:off x="0" y="8685213"/>
-            <a:ext cx="2971800" cy="458787"/>
-          </a:xfrm>
-          <a:prstGeom prst="rect">
-            <a:avLst/>
-          </a:prstGeom>
-        </p:spPr>
-        <p:txBody>
-          <a:bodyPr vert="horz" lIns="91440" tIns="45720" rIns="91440" bIns="45720" rtlCol="0" anchor="b"/>
-          <a:lstStyle>
-            <a:lvl1pPr algn="l">
-              <a:defRPr sz="1200"/>
-            </a:lvl1pPr>
-          </a:lstStyle>
-          <a:p>
-            <a:endParaRPr lang="en-US"/>
-          </a:p>
-        </p:txBody>
-      </p:sp>
-      <p:sp>
-        <p:nvSpPr>
-          <p:cNvPr id="7" name="Slide Number Placeholder 6"/>
-          <p:cNvSpPr>
-            <a:spLocks noGrp="1"/>
-          </p:cNvSpPr>
-          <p:nvPr>
-            <p:ph type="sldNum" sz="quarter" idx="5"/>
-          </p:nvPr>
-        </p:nvSpPr>
-        <p:spPr>
-          <a:xfrm>
-            <a:off x="3884613" y="8685213"/>
-            <a:ext cx="2971800" cy="458787"/>
-          </a:xfrm>
-          <a:prstGeom prst="rect">
-            <a:avLst/>
-          </a:prstGeom>
-        </p:spPr>
-        <p:txBody>
-          <a:bodyPr vert="horz" lIns="91440" tIns="45720" rIns="91440" bIns="45720" rtlCol="0" anchor="b"/>
-          <a:lstStyle>
-            <a:lvl1pPr algn="r">
-              <a:defRPr sz="1200"/>
-            </a:lvl1pPr>
-          </a:lstStyle>
-          <a:p>
-            <a:fld id="{CE5E9CC1-C706-0F49-92D6-E571CC5EEA8F}" type="slidenum">
-              <a:rPr lang="en-US"/>
-              <a:t>‹#›</a:t>
-            </a:fld>
-            <a:endParaRPr lang="en-US"/>
-          </a:p>
-        </p:txBody>
-      </p:sp>
     </p:spTree>
     <p:extLst>
       <p:ext uri="{BB962C8B-B14F-4D97-AF65-F5344CB8AC3E}">
-        <p14:creationId xmlns:p14="http://schemas.microsoft.com/office/powerpoint/2010/main" val="1024086991"/>
+        <p14:creationId xmlns:p14="http://schemas.microsoft.com/office/powerpoint/2010/main" val="1263615965"/>
       </p:ext>
     </p:extLst>
   </p:cSld>
   <p:clrMap bg1="lt1" tx1="dk1" bg2="lt2" tx2="dk2" accent1="accent1" accent2="accent2" accent3="accent3" accent4="accent4" accent5="accent5" accent6="accent6" hlink="hlink" folHlink="folHlink"/>
   <p:notesStyle>
-    <a:lvl1pPr marL="0" algn="l" defTabSz="914400" rtl="0" eaLnBrk="1" latinLnBrk="0" hangingPunct="1">
+    <a:lvl1pPr marL="0" algn="l" defTabSz="914400" rtl="0" eaLnBrk="1" latinLnBrk="1" hangingPunct="1">
       <a:defRPr sz="1200" kern="1200">
         <a:solidFill>
           <a:schemeClr val="tx1"/>
@@ -385,7 +165,7 @@
         <a:cs typeface="+mn-cs"/>
       </a:defRPr>
     </a:lvl1pPr>
-    <a:lvl2pPr marL="457200" algn="l" defTabSz="914400" rtl="0" eaLnBrk="1" latinLnBrk="0" hangingPunct="1">
+    <a:lvl2pPr marL="457200" algn="l" defTabSz="914400" rtl="0" eaLnBrk="1" latinLnBrk="1" hangingPunct="1">
       <a:defRPr sz="1200" kern="1200">
         <a:solidFill>
           <a:schemeClr val="tx1"/>
@@ -395,7 +175,7 @@
         <a:cs typeface="+mn-cs"/>
       </a:defRPr>
     </a:lvl2pPr>
-    <a:lvl3pPr marL="914400" algn="l" defTabSz="914400" rtl="0" eaLnBrk="1" latinLnBrk="0" hangingPunct="1">
+    <a:lvl3pPr marL="914400" algn="l" defTabSz="914400" rtl="0" eaLnBrk="1" latinLnBrk="1" hangingPunct="1">
       <a:defRPr sz="1200" kern="1200">
         <a:solidFill>
           <a:schemeClr val="tx1"/>
@@ -405,7 +185,7 @@
         <a:cs typeface="+mn-cs"/>
       </a:defRPr>
     </a:lvl3pPr>
-    <a:lvl4pPr marL="1371600" algn="l" defTabSz="914400" rtl="0" eaLnBrk="1" latinLnBrk="0" hangingPunct="1">
+    <a:lvl4pPr marL="1371600" algn="l" defTabSz="914400" rtl="0" eaLnBrk="1" latinLnBrk="1" hangingPunct="1">
       <a:defRPr sz="1200" kern="1200">
         <a:solidFill>
           <a:schemeClr val="tx1"/>
@@ -415,7 +195,7 @@
         <a:cs typeface="+mn-cs"/>
       </a:defRPr>
     </a:lvl4pPr>
-    <a:lvl5pPr marL="1828800" algn="l" defTabSz="914400" rtl="0" eaLnBrk="1" latinLnBrk="0" hangingPunct="1">
+    <a:lvl5pPr marL="1828800" algn="l" defTabSz="914400" rtl="0" eaLnBrk="1" latinLnBrk="1" hangingPunct="1">
       <a:defRPr sz="1200" kern="1200">
         <a:solidFill>
           <a:schemeClr val="tx1"/>
@@ -425,7 +205,7 @@
         <a:cs typeface="+mn-cs"/>
       </a:defRPr>
     </a:lvl5pPr>
-    <a:lvl6pPr marL="2286000" algn="l" defTabSz="914400" rtl="0" eaLnBrk="1" latinLnBrk="0" hangingPunct="1">
+    <a:lvl6pPr marL="2286000" algn="l" defTabSz="914400" rtl="0" eaLnBrk="1" latinLnBrk="1" hangingPunct="1">
       <a:defRPr sz="1200" kern="1200">
         <a:solidFill>
           <a:schemeClr val="tx1"/>
@@ -435,7 +215,7 @@
         <a:cs typeface="+mn-cs"/>
       </a:defRPr>
     </a:lvl6pPr>
-    <a:lvl7pPr marL="2743200" algn="l" defTabSz="914400" rtl="0" eaLnBrk="1" latinLnBrk="0" hangingPunct="1">
+    <a:lvl7pPr marL="2743200" algn="l" defTabSz="914400" rtl="0" eaLnBrk="1" latinLnBrk="1" hangingPunct="1">
       <a:defRPr sz="1200" kern="1200">
         <a:solidFill>
           <a:schemeClr val="tx1"/>
@@ -445,7 +225,7 @@
         <a:cs typeface="+mn-cs"/>
       </a:defRPr>
     </a:lvl7pPr>
-    <a:lvl8pPr marL="3200400" algn="l" defTabSz="914400" rtl="0" eaLnBrk="1" latinLnBrk="0" hangingPunct="1">
+    <a:lvl8pPr marL="3200400" algn="l" defTabSz="914400" rtl="0" eaLnBrk="1" latinLnBrk="1" hangingPunct="1">
       <a:defRPr sz="1200" kern="1200">
         <a:solidFill>
           <a:schemeClr val="tx1"/>
@@ -455,7 +235,7 @@
         <a:cs typeface="+mn-cs"/>
       </a:defRPr>
     </a:lvl8pPr>
-    <a:lvl9pPr marL="3657600" algn="l" defTabSz="914400" rtl="0" eaLnBrk="1" latinLnBrk="0" hangingPunct="1">
+    <a:lvl9pPr marL="3657600" algn="l" defTabSz="914400" rtl="0" eaLnBrk="1" latinLnBrk="1" hangingPunct="1">
       <a:defRPr sz="1200" kern="1200">
         <a:solidFill>
           <a:schemeClr val="tx1"/>
@@ -517,7 +297,6 @@
               <a:rPr lang="en-US" dirty="0"/>
               <a:t>이 자료는 SolarFit 화면에 보이는 모든 항목의 데이터 출처와 계산 방식을 정리한 발표 첨부 설명서입니다. 핵심 메시지: 모든 숫자는 공공데이터에서 계산하고, AI(RAG)는 '말로 된 조례'를 검색·요약·판정하는 데만 씁니다. 도메인을 모르는 분도 이해할 수 있도록 구성했습니다.</a:t>
             </a:r>
-            <a:endParaRPr lang="en-US" dirty="0"/>
           </a:p>
         </p:txBody>
       </p:sp>
@@ -605,7 +384,6 @@
               <a:rPr lang="en-US" dirty="0"/>
               <a:t>종합점수 = 0.40×일조 + 0.35×계통 + 0.25×규제. 일조·계통은 충남 15개 시군구 안에서 (값−최저)/(최고−최저)×100으로 정규화한 상대점수, 규제는 난이도 등급(낮음 100/보통 60/높음 25). 화면의 작은 '일조 40·계통 35·규제 25'는 각 항목 기여분이며 그 합이 종합점수입니다. 전국 절대평가가 아니라 충남 내 상대 줄세우기입니다.</a:t>
             </a:r>
-            <a:endParaRPr lang="en-US" dirty="0"/>
           </a:p>
         </p:txBody>
       </p:sp>
@@ -693,7 +471,6 @@
               <a:rPr lang="en-US" dirty="0"/>
               <a:t>질문에 '규제/계통/일조' 같은 의도 키워드가 있으면 그 기준으로 정렬합니다. 규제가 모두 같으면(예: 다 '낮음') 종합점수(일조+계통)로 동점을 가립니다 — 그래서 천안이 1위. 일조량 옆 ±%는 충남 평균 대비 편차로 +는 초록·−는 노랑. (전국 경사면 데이터라 시군구마다 일조가 달라 색이 갈림 — 예: 아산·천안 높음(+), 보령·서천 낮음(−)) 카드 우하단 ↗는 그 시군구 지역 진단으로 이동(내부적으로 URL 파라미터 라우팅)합니다.</a:t>
             </a:r>
-            <a:endParaRPr lang="en-US" dirty="0"/>
           </a:p>
         </p:txBody>
       </p:sp>
@@ -781,7 +558,6 @@
               <a:rPr lang="en-US" dirty="0"/>
               <a:t>설계 원칙: AI(RAG)는 '말로 된 조례'를 읽어 지자체 지원·이격 기준 해석·종합 판정문을 만드는 데만 쓰고, 일조·계통·용도지역·수익 같은 숫자는 전부 공공데이터로 계산합니다. 이렇게 역할을 나눠 AI가 없는 수치를 지어내는 '환각'을 막습니다. 임베딩은 text-embedding-3-small, 생성은 gpt-4o-mini를 씁니다.</a:t>
             </a:r>
-            <a:endParaRPr lang="en-US" dirty="0"/>
           </a:p>
         </p:txBody>
       </p:sp>
@@ -869,7 +645,6 @@
               <a:rPr lang="en-US" dirty="0"/>
               <a:t>한계를 명확히 합니다. ① 이격 실거리·진입로·인근 변전소 매칭은 GIS가 없어 미제공('확인 필요'로 표시). ② 일조량은 전국 시군구 경사면 일사량(KMAPP 5년 평균) — 시군구 평균이라 부지 미시지형·차폐는 미반영. ③ 투자비·PR은 가정치(일사량 보정은 이중계산 소지로 제거). ④ 현재 충남 15개 시군구 대상(전국 확장 가능 구조). 의사결정 보조도구로서 한계를 숨기지 않는 것이 신뢰의 핵심입니다.</a:t>
             </a:r>
-            <a:endParaRPr lang="en-US" dirty="0"/>
           </a:p>
         </p:txBody>
       </p:sp>
@@ -891,94 +666,6 @@
             <a:fld id="{F7021451-1387-4CA6-816F-3879F97B5CBC}" type="slidenum">
               <a:rPr lang="en-US"/>
               <a:t>13</a:t>
-            </a:fld>
-            <a:endParaRPr lang="en-US"/>
-          </a:p>
-        </p:txBody>
-      </p:sp>
-    </p:spTree>
-    <p:extLst>
-      <p:ext uri="{BB962C8B-B14F-4D97-AF65-F5344CB8AC3E}">
-        <p14:creationId xmlns:p14="http://schemas.microsoft.com/office/powerpoint/2010/main" val="1024086991"/>
-      </p:ext>
-    </p:extLst>
-  </p:cSld>
-  <p:clrMapOvr>
-    <a:masterClrMapping/>
-  </p:clrMapOvr>
-</p:notes>
-</file>
-
-<file path=ppt/notesSlides/notesSlide14.xml><?xml version="1.0" encoding="utf-8"?>
-<p:notes xmlns:a="http://schemas.openxmlformats.org/drawingml/2006/main" xmlns:r="http://schemas.openxmlformats.org/officeDocument/2006/relationships" xmlns:p="http://schemas.openxmlformats.org/presentationml/2006/main">
-  <p:cSld>
-    <p:spTree>
-      <p:nvGrpSpPr>
-        <p:cNvPr id="1" name=""/>
-        <p:cNvGrpSpPr/>
-        <p:nvPr/>
-      </p:nvGrpSpPr>
-      <p:grpSpPr>
-        <a:xfrm>
-          <a:off x="0" y="0"/>
-          <a:ext cx="0" cy="0"/>
-          <a:chOff x="0" y="0"/>
-          <a:chExt cx="0" cy="0"/>
-        </a:xfrm>
-      </p:grpSpPr>
-      <p:sp>
-        <p:nvSpPr>
-          <p:cNvPr id="2" name="Slide Image Placeholder 1"/>
-          <p:cNvSpPr>
-            <a:spLocks noGrp="1" noRot="1" noChangeAspect="1"/>
-          </p:cNvSpPr>
-          <p:nvPr>
-            <p:ph type="sldImg"/>
-          </p:nvPr>
-        </p:nvSpPr>
-        <p:spPr/>
-      </p:sp>
-      <p:sp>
-        <p:nvSpPr>
-          <p:cNvPr id="3" name="Notes Placeholder 2"/>
-          <p:cNvSpPr>
-            <a:spLocks noGrp="1"/>
-          </p:cNvSpPr>
-          <p:nvPr>
-            <p:ph type="body" idx="1"/>
-          </p:nvPr>
-        </p:nvSpPr>
-        <p:spPr/>
-        <p:txBody>
-          <a:bodyPr/>
-          <a:lstStyle/>
-          <a:p>
-            <a:r>
-              <a:rPr lang="en-US" dirty="0"/>
-              <a:t>마무리: 공공 API 7종 + 로컬 ChromaDB + OpenAI로 로컬 PC와 인터넷만으로 동작하고, 1주 운영비는 약 200원입니다. 확장 방향은 전국 시군구, 발전소 허가·보급현황 데이터, GIS 연계(이격 실측 거리)입니다.</a:t>
-            </a:r>
-            <a:endParaRPr lang="en-US" dirty="0"/>
-          </a:p>
-        </p:txBody>
-      </p:sp>
-      <p:sp>
-        <p:nvSpPr>
-          <p:cNvPr id="4" name="Slide Number Placeholder 3"/>
-          <p:cNvSpPr>
-            <a:spLocks noGrp="1"/>
-          </p:cNvSpPr>
-          <p:nvPr>
-            <p:ph type="sldNum" sz="quarter" idx="10"/>
-          </p:nvPr>
-        </p:nvSpPr>
-        <p:spPr/>
-        <p:txBody>
-          <a:bodyPr/>
-          <a:lstStyle/>
-          <a:p>
-            <a:fld id="{F7021451-1387-4CA6-816F-3879F97B5CBC}" type="slidenum">
-              <a:rPr lang="en-US"/>
-              <a:t>14</a:t>
             </a:fld>
             <a:endParaRPr lang="en-US"/>
           </a:p>
@@ -1045,7 +732,6 @@
               <a:rPr lang="en-US" dirty="0"/>
               <a:t>입력 한 줄로 자동 분기합니다. (1) 끝에 번지 숫자가 있으면 '지번'으로 보고 부지 단일 진단, (2) 질문에 충남 시군구명(당진·천안 등)이 있으면 그 지역 단위 진단, (3) 그 외 일반 질문은 충남 추천 랭킹. 화면이 하나라 사용자는 검색창에 자연어로 묻기만 하면 됩니다. 추천 리스트에서 일조/발전 관련 질문은 수익성 화면으로 연결됩니다.</a:t>
             </a:r>
-            <a:endParaRPr lang="en-US" dirty="0"/>
           </a:p>
         </p:txBody>
       </p:sp>
@@ -1133,7 +819,6 @@
               <a:rPr lang="en-US" dirty="0"/>
               <a:t>7종 출처 상세 — ① KMAPP 경사면 일사량(.nc, SWDN_topo, 2016~2021 5년 평균·전국 시군구 격자). ② 한국전력 KEPCO 빅데이터 분산전원 API(변전소·변압기·배전선로 여유용량). ③ 국가법령정보 자치법규 본문검색(search=2)으로 수집해 4,251개 조항을 벡터DB(ChromaDB)에 적재. ④ 이격 수치는 조례 '별표'가 HWP 첨부라 olefile로 직접 추출. ⑤ VWorld(국토부) 토지이용계획 API는 필지 PNU로 조회(domain 파라미터 필수). ⑥ 전력거래소 KPX SMP/REC 2025 단가. ⑦ 행정안전부 코드로 시군구키(229건)·지번→PNU 변환. AI 비용은 질문당 약 0.9원.</a:t>
             </a:r>
-            <a:endParaRPr lang="en-US" dirty="0"/>
           </a:p>
         </p:txBody>
       </p:sp>
@@ -1221,7 +906,6 @@
               <a:rPr lang="en-US" dirty="0"/>
               <a:t>화면은 diagnose(주소)를 한 번 호출하고 결과 dict를 카드에 매핑만 합니다. 내부에서 주소→지역코드 변환, 이격(별표 데이터 조회), 지자체 지원(RAG 검색), 용도지역(VWorld), 종합판정(LLM)을 모두 처리합니다. 즉 흩어진 5개 출처를 모아 AI가 마지막에 2~3문장으로 종합합니다. 용도지역/농지는 실존 필지(PNU)가 있어야 나오므로, 시군구 단위 진단에서는 '지번 입력 시'로 안내합니다.</a:t>
             </a:r>
-            <a:endParaRPr lang="en-US" dirty="0"/>
           </a:p>
         </p:txBody>
       </p:sp>
@@ -1309,7 +993,6 @@
               <a:rPr lang="en-US" dirty="0"/>
               <a:t>이격 기준은 data/byeolpyo/setback.json(충남 15개 시군구)에서 옵니다. 난이도는 주거밀집 최대 이격 기준으로 분류(500m↑=높음 / 300m=보통 / 200m↓·없음=낮음). 조문에 있는 곳도 있고, 당진·보령·홍성·태안처럼 조문엔 없고 별표(HWP 첨부)에만 있어 olefile로 직접 추출한 곳도 있습니다. 용도지역·농지는 VWorld 토지이용계획에서 가져와 계획관리=가능/농림·농업진흥=불가로 매핑. 핵심: 기준거리는 제공하지만 실제 이격거리는 GIS가 있어야 재므로 '실측 필요'로 정직하게 표기합니다.</a:t>
             </a:r>
-            <a:endParaRPr lang="en-US" dirty="0"/>
           </a:p>
         </p:txBody>
       </p:sp>
@@ -1397,7 +1080,6 @@
               <a:rPr lang="en-US" dirty="0"/>
               <a:t>같은 엔진이 부지에 따라 다르게 판정함을 보여줍니다. 왼쪽 충곡리 200은 계획관리지역·농지 없음이라 '가능' 쪽. 오른쪽 서산 부장리 100은 '농림지역'(태양광 원칙 불가)·농지 해당이라 제약이 큰 부지입니다. 둘 다 실제 VWorld·조례 데이터로 나온 결과입니다. 참고: 현재 LLM 종합판정이 농림지역도 '조건부 가능'으로 다소 약하게 보는 경향이 있어, 발표 전 '농림/농업진흥=원칙 불가' 규칙 보강을 검토 중입니다.</a:t>
             </a:r>
-            <a:endParaRPr lang="en-US" dirty="0"/>
           </a:p>
         </p:txBody>
       </p:sp>
@@ -1485,7 +1167,6 @@
               <a:rPr lang="en-US" dirty="0"/>
               <a:t>지자체 지원은 하이브리드 검색(의미 임베딩 + 키워드)을 RRF로 합쳐 정답 조항을 회수하고, 시군구 60% + 광역 40% 쿼터로 그 지역 자체 조례를 반드시 포함합니다. 답변 끝 [N] 번호로 실제 인용한 조항만 출처로 표기해 환각을 줄입니다. 계통은 KEPCO 응답에서 각 지점의 연계가능량 = min(변전소·변압기·배전선로) 여유로 보고, 그 시군구 최댓값을 단일 연계 최대량으로 씁니다. 99kW 기준 약 9,000kW 이상이면 '충분'.</a:t>
             </a:r>
-            <a:endParaRPr lang="en-US" dirty="0"/>
           </a:p>
         </p:txBody>
       </p:sp>
@@ -1573,7 +1254,6 @@
               <a:rPr lang="en-US" dirty="0"/>
               <a:t>발전량 공식: 연 일사량(MJ/㎡) ÷ 3.6 = 표준 발전시간(h), × PR 0.85(시스템효율 보정), × 99kW = 연간 발전량(kWh). 예) 충곡리 200(논산)은 약 1,428h, 약 141,300kWh, 이용률 약 16%. 일조량은 KMAPP 경사면 일사량(전국 시군구·5년 평균)이라 시군구마다 고유값이며, 과거 ASOS 방식의 '인근 관측소 보강'이 불필요해졌습니다.</a:t>
             </a:r>
-            <a:endParaRPr lang="en-US" dirty="0"/>
           </a:p>
         </p:txBody>
       </p:sp>
@@ -1661,7 +1341,6 @@
               <a:rPr lang="en-US" dirty="0"/>
               <a:t>SMP 수익 = 발전량 × SMP 단가(KPX 2025 연평균 약 112.68원/kWh). REC 수익 = (발전량/1000) × 가중치 1.2 × REC 단가. 연 예상수익에서 손익분기(투자비÷연수익)·20년 총수익·예금(3%) 대비를 계산합니다. 투자비 2.2억·PR 0.85는 가정치이며 팀 협의 대기. 과거 '일사량 보정(+1,014만)'은 발전량에 일조가 이미 반영돼 이중계산 소지가 있어 제거했습니다 — '가정은 가정이라고 밝힌다'가 신뢰 포인트입니다.</a:t>
             </a:r>
-            <a:endParaRPr lang="en-US" dirty="0"/>
           </a:p>
         </p:txBody>
       </p:sp>
@@ -1734,6 +1413,11 @@
 <file path=ppt/slideMasters/slideMaster1.xml><?xml version="1.0" encoding="utf-8"?>
 <p:sldMaster xmlns:a="http://schemas.openxmlformats.org/drawingml/2006/main" xmlns:r="http://schemas.openxmlformats.org/officeDocument/2006/relationships" xmlns:p="http://schemas.openxmlformats.org/presentationml/2006/main">
   <p:cSld>
+    <p:bg>
+      <p:bgRef idx="1001">
+        <a:schemeClr val="bg1"/>
+      </p:bgRef>
+    </p:bg>
     <p:spTree>
       <p:nvGrpSpPr>
         <p:cNvPr id="1" name=""/>
@@ -2016,6 +1700,7 @@
         <a:solidFill>
           <a:srgbClr val="FFFFFF"/>
         </a:solidFill>
+        <a:effectLst/>
       </p:bgPr>
     </p:bg>
     <p:spTree>
@@ -2056,6 +1741,13 @@
             <a:prstDash val="solid"/>
           </a:ln>
         </p:spPr>
+        <p:txBody>
+          <a:bodyPr/>
+          <a:lstStyle/>
+          <a:p>
+            <a:endParaRPr lang="ko-KR" altLang="en-US"/>
+          </a:p>
+        </p:txBody>
       </p:sp>
       <p:sp>
         <p:nvSpPr>
@@ -2078,7 +1770,7 @@
           <a:bodyPr wrap="square" lIns="0" tIns="0" rIns="0" bIns="0" rtlCol="0" anchor="ctr"/>
           <a:lstStyle/>
           <a:p>
-            <a:pPr indent="0" marL="0">
+            <a:pPr marL="0" indent="0">
               <a:buNone/>
             </a:pPr>
             <a:r>
@@ -2117,7 +1809,7 @@
           <a:bodyPr wrap="square" lIns="0" tIns="0" rIns="0" bIns="0" rtlCol="0" anchor="ctr"/>
           <a:lstStyle/>
           <a:p>
-            <a:pPr indent="0" marL="0">
+            <a:pPr marL="0" indent="0">
               <a:buNone/>
             </a:pPr>
             <a:r>
@@ -2156,7 +1848,7 @@
           <a:bodyPr wrap="square" lIns="0" tIns="0" rIns="0" bIns="0" rtlCol="0" anchor="ctr"/>
           <a:lstStyle/>
           <a:p>
-            <a:pPr indent="0" marL="0">
+            <a:pPr marL="0" indent="0">
               <a:buNone/>
             </a:pPr>
             <a:r>
@@ -2195,7 +1887,7 @@
           <a:bodyPr wrap="square" lIns="0" tIns="0" rIns="0" bIns="0" rtlCol="0" anchor="ctr"/>
           <a:lstStyle/>
           <a:p>
-            <a:pPr indent="0" marL="0">
+            <a:pPr marL="0" indent="0">
               <a:buNone/>
             </a:pPr>
             <a:r>
@@ -2229,6 +1921,7 @@
         <a:solidFill>
           <a:srgbClr val="FFFFFF"/>
         </a:solidFill>
+        <a:effectLst/>
       </p:bgPr>
     </p:bg>
     <p:spTree>
@@ -2266,11 +1959,11 @@
           <a:bodyPr wrap="square" lIns="0" tIns="0" rIns="0" bIns="0" rtlCol="0" anchor="ctr"/>
           <a:lstStyle/>
           <a:p>
-            <a:pPr indent="0" marL="0">
-              <a:buNone/>
-            </a:pPr>
-            <a:r>
-              <a:rPr lang="en-US" sz="1200" b="1" spc="200" kern="0" dirty="0">
+            <a:pPr marL="0" indent="0">
+              <a:buNone/>
+            </a:pPr>
+            <a:r>
+              <a:rPr lang="en-US" sz="1200" b="1" kern="0" spc="200" dirty="0">
                 <a:solidFill>
                   <a:srgbClr val="0E7C86"/>
                 </a:solidFill>
@@ -2305,7 +1998,7 @@
           <a:bodyPr wrap="square" lIns="0" tIns="0" rIns="0" bIns="0" rtlCol="0" anchor="ctr"/>
           <a:lstStyle/>
           <a:p>
-            <a:pPr indent="0" marL="0">
+            <a:pPr marL="0" indent="0">
               <a:buNone/>
             </a:pPr>
             <a:r>
@@ -2325,14 +2018,14 @@
       </p:sp>
       <p:pic>
         <p:nvPicPr>
-          <p:cNvPr id="4" name="Image 0" descr="C:\Projects\SolarFit\docs\shots\05_list_top.png">    </p:cNvPr>
+          <p:cNvPr id="4" name="Image 0" descr="C:\Projects\SolarFit\docs\shots\05_list_top.png"/>
           <p:cNvPicPr>
             <a:picLocks noChangeAspect="1"/>
           </p:cNvPicPr>
           <p:nvPr/>
         </p:nvPicPr>
         <p:blipFill>
-          <a:blip r:embed="rId1"/>
+          <a:blip r:embed="rId3"/>
           <a:stretch>
             <a:fillRect/>
           </a:stretch>
@@ -2368,6 +2061,13 @@
             <a:prstDash val="solid"/>
           </a:ln>
         </p:spPr>
+        <p:txBody>
+          <a:bodyPr/>
+          <a:lstStyle/>
+          <a:p>
+            <a:endParaRPr lang="ko-KR" altLang="en-US"/>
+          </a:p>
+        </p:txBody>
       </p:sp>
       <p:sp>
         <p:nvSpPr>
@@ -2395,6 +2095,13 @@
             <a:prstDash val="solid"/>
           </a:ln>
         </p:spPr>
+        <p:txBody>
+          <a:bodyPr/>
+          <a:lstStyle/>
+          <a:p>
+            <a:endParaRPr lang="ko-KR" altLang="en-US"/>
+          </a:p>
+        </p:txBody>
       </p:sp>
       <p:sp>
         <p:nvSpPr>
@@ -2420,6 +2127,13 @@
             <a:prstDash val="solid"/>
           </a:ln>
         </p:spPr>
+        <p:txBody>
+          <a:bodyPr/>
+          <a:lstStyle/>
+          <a:p>
+            <a:endParaRPr lang="ko-KR" altLang="en-US"/>
+          </a:p>
+        </p:txBody>
       </p:sp>
       <p:sp>
         <p:nvSpPr>
@@ -2442,7 +2156,7 @@
           <a:bodyPr wrap="square" lIns="0" tIns="0" rIns="0" bIns="0" rtlCol="0" anchor="t"/>
           <a:lstStyle/>
           <a:p>
-            <a:pPr indent="0" marL="0">
+            <a:pPr marL="0" indent="0">
               <a:buNone/>
             </a:pPr>
             <a:r>
@@ -2481,7 +2195,7 @@
           <a:bodyPr wrap="square" lIns="0" tIns="0" rIns="0" bIns="0" rtlCol="0" anchor="t"/>
           <a:lstStyle/>
           <a:p>
-            <a:pPr indent="0" marL="0">
+            <a:pPr marL="0" indent="0">
               <a:lnSpc>
                 <a:spcPct val="103000"/>
               </a:lnSpc>
@@ -2531,6 +2245,13 @@
             <a:prstDash val="solid"/>
           </a:ln>
         </p:spPr>
+        <p:txBody>
+          <a:bodyPr/>
+          <a:lstStyle/>
+          <a:p>
+            <a:endParaRPr lang="ko-KR" altLang="en-US"/>
+          </a:p>
+        </p:txBody>
       </p:sp>
       <p:sp>
         <p:nvSpPr>
@@ -2556,6 +2277,13 @@
             <a:prstDash val="solid"/>
           </a:ln>
         </p:spPr>
+        <p:txBody>
+          <a:bodyPr/>
+          <a:lstStyle/>
+          <a:p>
+            <a:endParaRPr lang="ko-KR" altLang="en-US"/>
+          </a:p>
+        </p:txBody>
       </p:sp>
       <p:sp>
         <p:nvSpPr>
@@ -2578,7 +2306,7 @@
           <a:bodyPr wrap="square" lIns="0" tIns="0" rIns="0" bIns="0" rtlCol="0" anchor="t"/>
           <a:lstStyle/>
           <a:p>
-            <a:pPr indent="0" marL="0">
+            <a:pPr marL="0" indent="0">
               <a:buNone/>
             </a:pPr>
             <a:r>
@@ -2617,7 +2345,7 @@
           <a:bodyPr wrap="square" lIns="0" tIns="0" rIns="0" bIns="0" rtlCol="0" anchor="t"/>
           <a:lstStyle/>
           <a:p>
-            <a:pPr indent="0" marL="0">
+            <a:pPr marL="0" indent="0">
               <a:lnSpc>
                 <a:spcPct val="103000"/>
               </a:lnSpc>
@@ -2640,7 +2368,7 @@
             <a:endParaRPr lang="en-US" sz="1100" dirty="0"/>
           </a:p>
           <a:p>
-            <a:pPr indent="0" marL="0">
+            <a:pPr marL="0" indent="0">
               <a:lnSpc>
                 <a:spcPct val="103000"/>
               </a:lnSpc>
@@ -2690,6 +2418,13 @@
             <a:prstDash val="solid"/>
           </a:ln>
         </p:spPr>
+        <p:txBody>
+          <a:bodyPr/>
+          <a:lstStyle/>
+          <a:p>
+            <a:endParaRPr lang="ko-KR" altLang="en-US"/>
+          </a:p>
+        </p:txBody>
       </p:sp>
       <p:sp>
         <p:nvSpPr>
@@ -2715,6 +2450,13 @@
             <a:prstDash val="solid"/>
           </a:ln>
         </p:spPr>
+        <p:txBody>
+          <a:bodyPr/>
+          <a:lstStyle/>
+          <a:p>
+            <a:endParaRPr lang="ko-KR" altLang="en-US"/>
+          </a:p>
+        </p:txBody>
       </p:sp>
       <p:sp>
         <p:nvSpPr>
@@ -2737,7 +2479,7 @@
           <a:bodyPr wrap="square" lIns="0" tIns="0" rIns="0" bIns="0" rtlCol="0" anchor="t"/>
           <a:lstStyle/>
           <a:p>
-            <a:pPr indent="0" marL="0">
+            <a:pPr marL="0" indent="0">
               <a:buNone/>
             </a:pPr>
             <a:r>
@@ -2776,7 +2518,7 @@
           <a:bodyPr wrap="square" lIns="0" tIns="0" rIns="0" bIns="0" rtlCol="0" anchor="t"/>
           <a:lstStyle/>
           <a:p>
-            <a:pPr indent="0" marL="0">
+            <a:pPr marL="0" indent="0">
               <a:lnSpc>
                 <a:spcPct val="103000"/>
               </a:lnSpc>
@@ -2799,7 +2541,7 @@
             <a:endParaRPr lang="en-US" sz="1100" dirty="0"/>
           </a:p>
           <a:p>
-            <a:pPr indent="0" marL="0">
+            <a:pPr marL="0" indent="0">
               <a:lnSpc>
                 <a:spcPct val="103000"/>
               </a:lnSpc>
@@ -2849,6 +2591,13 @@
             <a:prstDash val="solid"/>
           </a:ln>
         </p:spPr>
+        <p:txBody>
+          <a:bodyPr/>
+          <a:lstStyle/>
+          <a:p>
+            <a:endParaRPr lang="ko-KR" altLang="en-US"/>
+          </a:p>
+        </p:txBody>
       </p:sp>
       <p:sp>
         <p:nvSpPr>
@@ -2874,6 +2623,13 @@
             <a:prstDash val="solid"/>
           </a:ln>
         </p:spPr>
+        <p:txBody>
+          <a:bodyPr/>
+          <a:lstStyle/>
+          <a:p>
+            <a:endParaRPr lang="ko-KR" altLang="en-US"/>
+          </a:p>
+        </p:txBody>
       </p:sp>
       <p:sp>
         <p:nvSpPr>
@@ -2896,7 +2652,7 @@
           <a:bodyPr wrap="square" lIns="0" tIns="0" rIns="0" bIns="0" rtlCol="0" anchor="t"/>
           <a:lstStyle/>
           <a:p>
-            <a:pPr indent="0" marL="0">
+            <a:pPr marL="0" indent="0">
               <a:buNone/>
             </a:pPr>
             <a:r>
@@ -2935,7 +2691,7 @@
           <a:bodyPr wrap="square" lIns="0" tIns="0" rIns="0" bIns="0" rtlCol="0" anchor="t"/>
           <a:lstStyle/>
           <a:p>
-            <a:pPr indent="0" marL="0">
+            <a:pPr marL="0" indent="0">
               <a:lnSpc>
                 <a:spcPct val="103000"/>
               </a:lnSpc>
@@ -2985,6 +2741,13 @@
             <a:prstDash val="solid"/>
           </a:ln>
         </p:spPr>
+        <p:txBody>
+          <a:bodyPr/>
+          <a:lstStyle/>
+          <a:p>
+            <a:endParaRPr lang="ko-KR" altLang="en-US"/>
+          </a:p>
+        </p:txBody>
       </p:sp>
       <p:sp>
         <p:nvSpPr>
@@ -3007,7 +2770,7 @@
           <a:bodyPr wrap="square" lIns="0" tIns="0" rIns="0" bIns="0" rtlCol="0" anchor="ctr"/>
           <a:lstStyle/>
           <a:p>
-            <a:pPr indent="0" marL="0">
+            <a:pPr marL="0" indent="0">
               <a:buNone/>
             </a:pPr>
             <a:r>
@@ -3021,9 +2784,6 @@
               </a:rPr>
               <a:t>출처  </a:t>
             </a:r>
-            <a:pPr indent="0" marL="0">
-              <a:buNone/>
-            </a:pPr>
             <a:r>
               <a:rPr lang="en-US" sz="950" dirty="0">
                 <a:solidFill>
@@ -3061,6 +2821,13 @@
             <a:prstDash val="solid"/>
           </a:ln>
         </p:spPr>
+        <p:txBody>
+          <a:bodyPr/>
+          <a:lstStyle/>
+          <a:p>
+            <a:endParaRPr lang="ko-KR" altLang="en-US"/>
+          </a:p>
+        </p:txBody>
       </p:sp>
       <p:sp>
         <p:nvSpPr>
@@ -3083,7 +2850,7 @@
           <a:bodyPr wrap="square" lIns="0" tIns="0" rIns="0" bIns="0" rtlCol="0" anchor="ctr"/>
           <a:lstStyle/>
           <a:p>
-            <a:pPr algn="l" indent="0" marL="0">
+            <a:pPr marL="0" indent="0" algn="l">
               <a:buNone/>
             </a:pPr>
             <a:r>
@@ -3122,7 +2889,7 @@
           <a:bodyPr wrap="square" lIns="0" tIns="0" rIns="0" bIns="0" rtlCol="0" anchor="ctr"/>
           <a:lstStyle/>
           <a:p>
-            <a:pPr algn="r" indent="0" marL="0">
+            <a:pPr marL="0" indent="0" algn="r">
               <a:buNone/>
             </a:pPr>
             <a:r>
@@ -3156,6 +2923,7 @@
         <a:solidFill>
           <a:srgbClr val="FFFFFF"/>
         </a:solidFill>
+        <a:effectLst/>
       </p:bgPr>
     </p:bg>
     <p:spTree>
@@ -3193,11 +2961,11 @@
           <a:bodyPr wrap="square" lIns="0" tIns="0" rIns="0" bIns="0" rtlCol="0" anchor="ctr"/>
           <a:lstStyle/>
           <a:p>
-            <a:pPr indent="0" marL="0">
-              <a:buNone/>
-            </a:pPr>
-            <a:r>
-              <a:rPr lang="en-US" sz="1200" b="1" spc="200" kern="0" dirty="0">
+            <a:pPr marL="0" indent="0">
+              <a:buNone/>
+            </a:pPr>
+            <a:r>
+              <a:rPr lang="en-US" sz="1200" b="1" kern="0" spc="200" dirty="0">
                 <a:solidFill>
                   <a:srgbClr val="0E7C86"/>
                 </a:solidFill>
@@ -3232,7 +3000,7 @@
           <a:bodyPr wrap="square" lIns="0" tIns="0" rIns="0" bIns="0" rtlCol="0" anchor="ctr"/>
           <a:lstStyle/>
           <a:p>
-            <a:pPr indent="0" marL="0">
+            <a:pPr marL="0" indent="0">
               <a:buNone/>
             </a:pPr>
             <a:r>
@@ -3252,14 +3020,14 @@
       </p:sp>
       <p:pic>
         <p:nvPicPr>
-          <p:cNvPr id="4" name="Image 0" descr="C:\Projects\SolarFit\docs\shots\06_list_rest.png">    </p:cNvPr>
+          <p:cNvPr id="4" name="Image 0" descr="C:\Projects\SolarFit\docs\shots\06_list_rest.png"/>
           <p:cNvPicPr>
             <a:picLocks noChangeAspect="1"/>
           </p:cNvPicPr>
           <p:nvPr/>
         </p:nvPicPr>
         <p:blipFill>
-          <a:blip r:embed="rId1"/>
+          <a:blip r:embed="rId3"/>
           <a:stretch>
             <a:fillRect/>
           </a:stretch>
@@ -3295,6 +3063,13 @@
             <a:prstDash val="solid"/>
           </a:ln>
         </p:spPr>
+        <p:txBody>
+          <a:bodyPr/>
+          <a:lstStyle/>
+          <a:p>
+            <a:endParaRPr lang="ko-KR" altLang="en-US"/>
+          </a:p>
+        </p:txBody>
       </p:sp>
       <p:sp>
         <p:nvSpPr>
@@ -3322,6 +3097,13 @@
             <a:prstDash val="solid"/>
           </a:ln>
         </p:spPr>
+        <p:txBody>
+          <a:bodyPr/>
+          <a:lstStyle/>
+          <a:p>
+            <a:endParaRPr lang="ko-KR" altLang="en-US"/>
+          </a:p>
+        </p:txBody>
       </p:sp>
       <p:sp>
         <p:nvSpPr>
@@ -3347,6 +3129,13 @@
             <a:prstDash val="solid"/>
           </a:ln>
         </p:spPr>
+        <p:txBody>
+          <a:bodyPr/>
+          <a:lstStyle/>
+          <a:p>
+            <a:endParaRPr lang="ko-KR" altLang="en-US"/>
+          </a:p>
+        </p:txBody>
       </p:sp>
       <p:sp>
         <p:nvSpPr>
@@ -3369,7 +3158,7 @@
           <a:bodyPr wrap="square" lIns="0" tIns="0" rIns="0" bIns="0" rtlCol="0" anchor="t"/>
           <a:lstStyle/>
           <a:p>
-            <a:pPr indent="0" marL="0">
+            <a:pPr marL="0" indent="0">
               <a:buNone/>
             </a:pPr>
             <a:r>
@@ -3408,7 +3197,7 @@
           <a:bodyPr wrap="square" lIns="0" tIns="0" rIns="0" bIns="0" rtlCol="0" anchor="t"/>
           <a:lstStyle/>
           <a:p>
-            <a:pPr indent="0" marL="0">
+            <a:pPr marL="0" indent="0">
               <a:lnSpc>
                 <a:spcPct val="103000"/>
               </a:lnSpc>
@@ -3458,6 +3247,13 @@
             <a:prstDash val="solid"/>
           </a:ln>
         </p:spPr>
+        <p:txBody>
+          <a:bodyPr/>
+          <a:lstStyle/>
+          <a:p>
+            <a:endParaRPr lang="ko-KR" altLang="en-US"/>
+          </a:p>
+        </p:txBody>
       </p:sp>
       <p:sp>
         <p:nvSpPr>
@@ -3483,6 +3279,13 @@
             <a:prstDash val="solid"/>
           </a:ln>
         </p:spPr>
+        <p:txBody>
+          <a:bodyPr/>
+          <a:lstStyle/>
+          <a:p>
+            <a:endParaRPr lang="ko-KR" altLang="en-US"/>
+          </a:p>
+        </p:txBody>
       </p:sp>
       <p:sp>
         <p:nvSpPr>
@@ -3505,7 +3308,7 @@
           <a:bodyPr wrap="square" lIns="0" tIns="0" rIns="0" bIns="0" rtlCol="0" anchor="t"/>
           <a:lstStyle/>
           <a:p>
-            <a:pPr indent="0" marL="0">
+            <a:pPr marL="0" indent="0">
               <a:buNone/>
             </a:pPr>
             <a:r>
@@ -3544,7 +3347,7 @@
           <a:bodyPr wrap="square" lIns="0" tIns="0" rIns="0" bIns="0" rtlCol="0" anchor="t"/>
           <a:lstStyle/>
           <a:p>
-            <a:pPr indent="0" marL="0">
+            <a:pPr marL="0" indent="0">
               <a:lnSpc>
                 <a:spcPct val="103000"/>
               </a:lnSpc>
@@ -3567,7 +3370,7 @@
             <a:endParaRPr lang="en-US" sz="1100" dirty="0"/>
           </a:p>
           <a:p>
-            <a:pPr indent="0" marL="0">
+            <a:pPr marL="0" indent="0">
               <a:lnSpc>
                 <a:spcPct val="103000"/>
               </a:lnSpc>
@@ -3617,6 +3420,13 @@
             <a:prstDash val="solid"/>
           </a:ln>
         </p:spPr>
+        <p:txBody>
+          <a:bodyPr/>
+          <a:lstStyle/>
+          <a:p>
+            <a:endParaRPr lang="ko-KR" altLang="en-US"/>
+          </a:p>
+        </p:txBody>
       </p:sp>
       <p:sp>
         <p:nvSpPr>
@@ -3642,6 +3452,13 @@
             <a:prstDash val="solid"/>
           </a:ln>
         </p:spPr>
+        <p:txBody>
+          <a:bodyPr/>
+          <a:lstStyle/>
+          <a:p>
+            <a:endParaRPr lang="ko-KR" altLang="en-US"/>
+          </a:p>
+        </p:txBody>
       </p:sp>
       <p:sp>
         <p:nvSpPr>
@@ -3664,7 +3481,7 @@
           <a:bodyPr wrap="square" lIns="0" tIns="0" rIns="0" bIns="0" rtlCol="0" anchor="t"/>
           <a:lstStyle/>
           <a:p>
-            <a:pPr indent="0" marL="0">
+            <a:pPr marL="0" indent="0">
               <a:buNone/>
             </a:pPr>
             <a:r>
@@ -3703,7 +3520,7 @@
           <a:bodyPr wrap="square" lIns="0" tIns="0" rIns="0" bIns="0" rtlCol="0" anchor="t"/>
           <a:lstStyle/>
           <a:p>
-            <a:pPr indent="0" marL="0">
+            <a:pPr marL="0" indent="0">
               <a:lnSpc>
                 <a:spcPct val="103000"/>
               </a:lnSpc>
@@ -3726,7 +3543,7 @@
             <a:endParaRPr lang="en-US" sz="1100" dirty="0"/>
           </a:p>
           <a:p>
-            <a:pPr indent="0" marL="0">
+            <a:pPr marL="0" indent="0">
               <a:lnSpc>
                 <a:spcPct val="103000"/>
               </a:lnSpc>
@@ -3776,6 +3593,13 @@
             <a:prstDash val="solid"/>
           </a:ln>
         </p:spPr>
+        <p:txBody>
+          <a:bodyPr/>
+          <a:lstStyle/>
+          <a:p>
+            <a:endParaRPr lang="ko-KR" altLang="en-US"/>
+          </a:p>
+        </p:txBody>
       </p:sp>
       <p:sp>
         <p:nvSpPr>
@@ -3801,6 +3625,13 @@
             <a:prstDash val="solid"/>
           </a:ln>
         </p:spPr>
+        <p:txBody>
+          <a:bodyPr/>
+          <a:lstStyle/>
+          <a:p>
+            <a:endParaRPr lang="ko-KR" altLang="en-US"/>
+          </a:p>
+        </p:txBody>
       </p:sp>
       <p:sp>
         <p:nvSpPr>
@@ -3823,7 +3654,7 @@
           <a:bodyPr wrap="square" lIns="0" tIns="0" rIns="0" bIns="0" rtlCol="0" anchor="t"/>
           <a:lstStyle/>
           <a:p>
-            <a:pPr indent="0" marL="0">
+            <a:pPr marL="0" indent="0">
               <a:buNone/>
             </a:pPr>
             <a:r>
@@ -3862,7 +3693,7 @@
           <a:bodyPr wrap="square" lIns="0" tIns="0" rIns="0" bIns="0" rtlCol="0" anchor="t"/>
           <a:lstStyle/>
           <a:p>
-            <a:pPr indent="0" marL="0">
+            <a:pPr marL="0" indent="0">
               <a:lnSpc>
                 <a:spcPct val="103000"/>
               </a:lnSpc>
@@ -3908,6 +3739,13 @@
             <a:prstDash val="solid"/>
           </a:ln>
         </p:spPr>
+        <p:txBody>
+          <a:bodyPr/>
+          <a:lstStyle/>
+          <a:p>
+            <a:endParaRPr lang="ko-KR" altLang="en-US"/>
+          </a:p>
+        </p:txBody>
       </p:sp>
       <p:sp>
         <p:nvSpPr>
@@ -3930,7 +3768,7 @@
           <a:bodyPr wrap="square" lIns="0" tIns="0" rIns="0" bIns="0" rtlCol="0" anchor="ctr"/>
           <a:lstStyle/>
           <a:p>
-            <a:pPr algn="l" indent="0" marL="0">
+            <a:pPr marL="0" indent="0" algn="l">
               <a:buNone/>
             </a:pPr>
             <a:r>
@@ -3969,7 +3807,7 @@
           <a:bodyPr wrap="square" lIns="0" tIns="0" rIns="0" bIns="0" rtlCol="0" anchor="ctr"/>
           <a:lstStyle/>
           <a:p>
-            <a:pPr algn="r" indent="0" marL="0">
+            <a:pPr marL="0" indent="0" algn="r">
               <a:buNone/>
             </a:pPr>
             <a:r>
@@ -4003,6 +3841,7 @@
         <a:solidFill>
           <a:srgbClr val="FFFFFF"/>
         </a:solidFill>
+        <a:effectLst/>
       </p:bgPr>
     </p:bg>
     <p:spTree>
@@ -4040,11 +3879,11 @@
           <a:bodyPr wrap="square" lIns="0" tIns="0" rIns="0" bIns="0" rtlCol="0" anchor="ctr"/>
           <a:lstStyle/>
           <a:p>
-            <a:pPr indent="0" marL="0">
-              <a:buNone/>
-            </a:pPr>
-            <a:r>
-              <a:rPr lang="en-US" sz="1200" b="1" spc="200" kern="0" dirty="0">
+            <a:pPr marL="0" indent="0">
+              <a:buNone/>
+            </a:pPr>
+            <a:r>
+              <a:rPr lang="en-US" sz="1200" b="1" kern="0" spc="200" dirty="0">
                 <a:solidFill>
                   <a:srgbClr val="0E7C86"/>
                 </a:solidFill>
@@ -4079,7 +3918,7 @@
           <a:bodyPr wrap="square" lIns="0" tIns="0" rIns="0" bIns="0" rtlCol="0" anchor="ctr"/>
           <a:lstStyle/>
           <a:p>
-            <a:pPr indent="0" marL="0">
+            <a:pPr marL="0" indent="0">
               <a:buNone/>
             </a:pPr>
             <a:r>
@@ -4123,6 +3962,13 @@
             <a:prstDash val="solid"/>
           </a:ln>
         </p:spPr>
+        <p:txBody>
+          <a:bodyPr/>
+          <a:lstStyle/>
+          <a:p>
+            <a:endParaRPr lang="ko-KR" altLang="en-US"/>
+          </a:p>
+        </p:txBody>
       </p:sp>
       <p:sp>
         <p:nvSpPr>
@@ -4145,7 +3991,7 @@
           <a:bodyPr wrap="square" lIns="0" tIns="0" rIns="0" bIns="0" rtlCol="0" anchor="ctr"/>
           <a:lstStyle/>
           <a:p>
-            <a:pPr indent="0" marL="0">
+            <a:pPr marL="0" indent="0">
               <a:buNone/>
             </a:pPr>
             <a:r>
@@ -4274,6 +4120,13 @@
             <a:prstDash val="solid"/>
           </a:ln>
         </p:spPr>
+        <p:txBody>
+          <a:bodyPr/>
+          <a:lstStyle/>
+          <a:p>
+            <a:endParaRPr lang="ko-KR" altLang="en-US"/>
+          </a:p>
+        </p:txBody>
       </p:sp>
       <p:sp>
         <p:nvSpPr>
@@ -4296,7 +4149,7 @@
           <a:bodyPr wrap="square" lIns="0" tIns="0" rIns="0" bIns="0" rtlCol="0" anchor="ctr"/>
           <a:lstStyle/>
           <a:p>
-            <a:pPr indent="0" marL="0">
+            <a:pPr marL="0" indent="0">
               <a:buNone/>
             </a:pPr>
             <a:r>
@@ -4441,7 +4294,7 @@
           <a:bodyPr wrap="square" lIns="0" tIns="0" rIns="0" bIns="0" rtlCol="0" anchor="ctr"/>
           <a:lstStyle/>
           <a:p>
-            <a:pPr algn="ctr" indent="0" marL="0">
+            <a:pPr marL="0" indent="0" algn="ctr">
               <a:buNone/>
             </a:pPr>
             <a:r>
@@ -4481,6 +4334,13 @@
             <a:prstDash val="solid"/>
           </a:ln>
         </p:spPr>
+        <p:txBody>
+          <a:bodyPr/>
+          <a:lstStyle/>
+          <a:p>
+            <a:endParaRPr lang="ko-KR" altLang="en-US"/>
+          </a:p>
+        </p:txBody>
       </p:sp>
       <p:sp>
         <p:nvSpPr>
@@ -4503,7 +4363,7 @@
           <a:bodyPr wrap="square" lIns="0" tIns="0" rIns="0" bIns="0" rtlCol="0" anchor="ctr"/>
           <a:lstStyle/>
           <a:p>
-            <a:pPr algn="l" indent="0" marL="0">
+            <a:pPr marL="0" indent="0" algn="l">
               <a:buNone/>
             </a:pPr>
             <a:r>
@@ -4542,7 +4402,7 @@
           <a:bodyPr wrap="square" lIns="0" tIns="0" rIns="0" bIns="0" rtlCol="0" anchor="ctr"/>
           <a:lstStyle/>
           <a:p>
-            <a:pPr algn="r" indent="0" marL="0">
+            <a:pPr marL="0" indent="0" algn="r">
               <a:buNone/>
             </a:pPr>
             <a:r>
@@ -4576,6 +4436,7 @@
         <a:solidFill>
           <a:srgbClr val="FFFFFF"/>
         </a:solidFill>
+        <a:effectLst/>
       </p:bgPr>
     </p:bg>
     <p:spTree>
@@ -4613,11 +4474,11 @@
           <a:bodyPr wrap="square" lIns="0" tIns="0" rIns="0" bIns="0" rtlCol="0" anchor="ctr"/>
           <a:lstStyle/>
           <a:p>
-            <a:pPr indent="0" marL="0">
-              <a:buNone/>
-            </a:pPr>
-            <a:r>
-              <a:rPr lang="en-US" sz="1200" b="1" spc="200" kern="0" dirty="0">
+            <a:pPr marL="0" indent="0">
+              <a:buNone/>
+            </a:pPr>
+            <a:r>
+              <a:rPr lang="en-US" sz="1200" b="1" kern="0" spc="200" dirty="0">
                 <a:solidFill>
                   <a:srgbClr val="0E7C86"/>
                 </a:solidFill>
@@ -4652,7 +4513,7 @@
           <a:bodyPr wrap="square" lIns="0" tIns="0" rIns="0" bIns="0" rtlCol="0" anchor="ctr"/>
           <a:lstStyle/>
           <a:p>
-            <a:pPr indent="0" marL="0">
+            <a:pPr marL="0" indent="0">
               <a:buNone/>
             </a:pPr>
             <a:r>
@@ -4696,6 +4557,13 @@
             <a:prstDash val="solid"/>
           </a:ln>
         </p:spPr>
+        <p:txBody>
+          <a:bodyPr/>
+          <a:lstStyle/>
+          <a:p>
+            <a:endParaRPr lang="ko-KR" altLang="en-US"/>
+          </a:p>
+        </p:txBody>
       </p:sp>
       <p:sp>
         <p:nvSpPr>
@@ -4721,6 +4589,13 @@
             <a:prstDash val="solid"/>
           </a:ln>
         </p:spPr>
+        <p:txBody>
+          <a:bodyPr/>
+          <a:lstStyle/>
+          <a:p>
+            <a:endParaRPr lang="ko-KR" altLang="en-US"/>
+          </a:p>
+        </p:txBody>
       </p:sp>
       <p:sp>
         <p:nvSpPr>
@@ -4743,7 +4618,7 @@
           <a:bodyPr wrap="square" lIns="0" tIns="0" rIns="0" bIns="0" rtlCol="0" anchor="ctr"/>
           <a:lstStyle/>
           <a:p>
-            <a:pPr indent="0" marL="0">
+            <a:pPr marL="0" indent="0">
               <a:buNone/>
             </a:pPr>
             <a:r>
@@ -4782,7 +4657,7 @@
           <a:bodyPr wrap="square" lIns="0" tIns="0" rIns="0" bIns="0" rtlCol="0" anchor="ctr"/>
           <a:lstStyle/>
           <a:p>
-            <a:pPr indent="0" marL="0">
+            <a:pPr marL="0" indent="0">
               <a:buNone/>
             </a:pPr>
             <a:r>
@@ -4794,7 +4669,40 @@
                 <a:ea typeface="Malgun Gothic" pitchFamily="34" charset="-122"/>
                 <a:cs typeface="Malgun Gothic" pitchFamily="34" charset="-120"/>
               </a:rPr>
-              <a:t>이격 실거리·진입로·변전소 매칭은 GIS 필요 → ‘확인 필요’로 표시(기준만 제공)</a:t>
+              <a:t>이격 실거리·진입로·변전소 매칭은 GIS 필요 </a:t>
+            </a:r>
+            <a:r>
+              <a:rPr lang="en-US" sz="1250">
+                <a:solidFill>
+                  <a:srgbClr val="3C4A54"/>
+                </a:solidFill>
+                <a:latin typeface="Malgun Gothic" pitchFamily="34" charset="0"/>
+                <a:ea typeface="Malgun Gothic" pitchFamily="34" charset="-122"/>
+                <a:cs typeface="Malgun Gothic" pitchFamily="34" charset="-120"/>
+              </a:rPr>
+              <a:t>→ 기준만 제공 (</a:t>
+            </a:r>
+            <a:r>
+              <a:rPr lang="ko-KR" altLang="en-US" sz="1250">
+                <a:solidFill>
+                  <a:srgbClr val="3C4A54"/>
+                </a:solidFill>
+                <a:latin typeface="Malgun Gothic" pitchFamily="34" charset="0"/>
+                <a:ea typeface="Malgun Gothic" pitchFamily="34" charset="-122"/>
+                <a:cs typeface="Malgun Gothic" pitchFamily="34" charset="-120"/>
+              </a:rPr>
+              <a:t>실측필요 표기</a:t>
+            </a:r>
+            <a:r>
+              <a:rPr lang="en-US" altLang="ko-KR" sz="1250">
+                <a:solidFill>
+                  <a:srgbClr val="3C4A54"/>
+                </a:solidFill>
+                <a:latin typeface="Malgun Gothic" pitchFamily="34" charset="0"/>
+                <a:ea typeface="Malgun Gothic" pitchFamily="34" charset="-122"/>
+                <a:cs typeface="Malgun Gothic" pitchFamily="34" charset="-120"/>
+              </a:rPr>
+              <a:t>)</a:t>
             </a:r>
             <a:endParaRPr lang="en-US" sz="1250" dirty="0"/>
           </a:p>
@@ -4826,6 +4734,13 @@
             <a:prstDash val="solid"/>
           </a:ln>
         </p:spPr>
+        <p:txBody>
+          <a:bodyPr/>
+          <a:lstStyle/>
+          <a:p>
+            <a:endParaRPr lang="ko-KR" altLang="en-US"/>
+          </a:p>
+        </p:txBody>
       </p:sp>
       <p:sp>
         <p:nvSpPr>
@@ -4851,6 +4766,13 @@
             <a:prstDash val="solid"/>
           </a:ln>
         </p:spPr>
+        <p:txBody>
+          <a:bodyPr/>
+          <a:lstStyle/>
+          <a:p>
+            <a:endParaRPr lang="ko-KR" altLang="en-US"/>
+          </a:p>
+        </p:txBody>
       </p:sp>
       <p:sp>
         <p:nvSpPr>
@@ -4873,7 +4795,7 @@
           <a:bodyPr wrap="square" lIns="0" tIns="0" rIns="0" bIns="0" rtlCol="0" anchor="ctr"/>
           <a:lstStyle/>
           <a:p>
-            <a:pPr indent="0" marL="0">
+            <a:pPr marL="0" indent="0">
               <a:buNone/>
             </a:pPr>
             <a:r>
@@ -4912,7 +4834,7 @@
           <a:bodyPr wrap="square" lIns="0" tIns="0" rIns="0" bIns="0" rtlCol="0" anchor="ctr"/>
           <a:lstStyle/>
           <a:p>
-            <a:pPr indent="0" marL="0">
+            <a:pPr marL="0" indent="0">
               <a:buNone/>
             </a:pPr>
             <a:r>
@@ -4924,7 +4846,29 @@
                 <a:ea typeface="Malgun Gothic" pitchFamily="34" charset="-122"/>
                 <a:cs typeface="Malgun Gothic" pitchFamily="34" charset="-120"/>
               </a:rPr>
-              <a:t>전국 경사면(KMAPP 5년)이라 시군구 고유값 — 단 부지 미시지형·차폐는 미반영</a:t>
+              <a:t>전국 경사면(KMAPP 5년)이라 시군구 </a:t>
+            </a:r>
+            <a:r>
+              <a:rPr lang="en-US" sz="1250">
+                <a:solidFill>
+                  <a:srgbClr val="3C4A54"/>
+                </a:solidFill>
+                <a:latin typeface="Malgun Gothic" pitchFamily="34" charset="0"/>
+                <a:ea typeface="Malgun Gothic" pitchFamily="34" charset="-122"/>
+                <a:cs typeface="Malgun Gothic" pitchFamily="34" charset="-120"/>
+              </a:rPr>
+              <a:t>고유값 — </a:t>
+            </a:r>
+            <a:r>
+              <a:rPr lang="ko-KR" altLang="en-US" sz="1250">
+                <a:solidFill>
+                  <a:srgbClr val="3C4A54"/>
+                </a:solidFill>
+                <a:latin typeface="Malgun Gothic" pitchFamily="34" charset="0"/>
+                <a:ea typeface="Malgun Gothic" pitchFamily="34" charset="-122"/>
+                <a:cs typeface="Malgun Gothic" pitchFamily="34" charset="-120"/>
+              </a:rPr>
+              <a:t>시군구 단위 내에서 동일 값</a:t>
             </a:r>
             <a:endParaRPr lang="en-US" sz="1250" dirty="0"/>
           </a:p>
@@ -4956,6 +4900,13 @@
             <a:prstDash val="solid"/>
           </a:ln>
         </p:spPr>
+        <p:txBody>
+          <a:bodyPr/>
+          <a:lstStyle/>
+          <a:p>
+            <a:endParaRPr lang="ko-KR" altLang="en-US"/>
+          </a:p>
+        </p:txBody>
       </p:sp>
       <p:sp>
         <p:nvSpPr>
@@ -4981,6 +4932,13 @@
             <a:prstDash val="solid"/>
           </a:ln>
         </p:spPr>
+        <p:txBody>
+          <a:bodyPr/>
+          <a:lstStyle/>
+          <a:p>
+            <a:endParaRPr lang="ko-KR" altLang="en-US"/>
+          </a:p>
+        </p:txBody>
       </p:sp>
       <p:sp>
         <p:nvSpPr>
@@ -5003,7 +4961,7 @@
           <a:bodyPr wrap="square" lIns="0" tIns="0" rIns="0" bIns="0" rtlCol="0" anchor="ctr"/>
           <a:lstStyle/>
           <a:p>
-            <a:pPr indent="0" marL="0">
+            <a:pPr marL="0" indent="0">
               <a:buNone/>
             </a:pPr>
             <a:r>
@@ -5042,7 +5000,7 @@
           <a:bodyPr wrap="square" lIns="0" tIns="0" rIns="0" bIns="0" rtlCol="0" anchor="ctr"/>
           <a:lstStyle/>
           <a:p>
-            <a:pPr indent="0" marL="0">
+            <a:pPr marL="0" indent="0">
               <a:buNone/>
             </a:pPr>
             <a:r>
@@ -5054,7 +5012,18 @@
                 <a:ea typeface="Malgun Gothic" pitchFamily="34" charset="-122"/>
                 <a:cs typeface="Malgun Gothic" pitchFamily="34" charset="-120"/>
               </a:rPr>
-              <a:t>투자비 2.2억·PR 0.85는 팀 협의 대기값 (일사량 보정은 이중계산 소지로 제거)</a:t>
+              <a:t>투자비 </a:t>
+            </a:r>
+            <a:r>
+              <a:rPr lang="en-US" sz="1250">
+                <a:solidFill>
+                  <a:srgbClr val="3C4A54"/>
+                </a:solidFill>
+                <a:latin typeface="Malgun Gothic" pitchFamily="34" charset="0"/>
+                <a:ea typeface="Malgun Gothic" pitchFamily="34" charset="-122"/>
+                <a:cs typeface="Malgun Gothic" pitchFamily="34" charset="-120"/>
+              </a:rPr>
+              <a:t>2.2억 · PR 0.85</a:t>
             </a:r>
             <a:endParaRPr lang="en-US" sz="1250" dirty="0"/>
           </a:p>
@@ -5086,6 +5055,13 @@
             <a:prstDash val="solid"/>
           </a:ln>
         </p:spPr>
+        <p:txBody>
+          <a:bodyPr/>
+          <a:lstStyle/>
+          <a:p>
+            <a:endParaRPr lang="ko-KR" altLang="en-US"/>
+          </a:p>
+        </p:txBody>
       </p:sp>
       <p:sp>
         <p:nvSpPr>
@@ -5111,6 +5087,13 @@
             <a:prstDash val="solid"/>
           </a:ln>
         </p:spPr>
+        <p:txBody>
+          <a:bodyPr/>
+          <a:lstStyle/>
+          <a:p>
+            <a:endParaRPr lang="ko-KR" altLang="en-US"/>
+          </a:p>
+        </p:txBody>
       </p:sp>
       <p:sp>
         <p:nvSpPr>
@@ -5133,7 +5116,7 @@
           <a:bodyPr wrap="square" lIns="0" tIns="0" rIns="0" bIns="0" rtlCol="0" anchor="ctr"/>
           <a:lstStyle/>
           <a:p>
-            <a:pPr indent="0" marL="0">
+            <a:pPr marL="0" indent="0">
               <a:buNone/>
             </a:pPr>
             <a:r>
@@ -5172,7 +5155,7 @@
           <a:bodyPr wrap="square" lIns="0" tIns="0" rIns="0" bIns="0" rtlCol="0" anchor="ctr"/>
           <a:lstStyle/>
           <a:p>
-            <a:pPr indent="0" marL="0">
+            <a:pPr marL="0" indent="0">
               <a:buNone/>
             </a:pPr>
             <a:r>
@@ -5212,6 +5195,13 @@
             <a:prstDash val="solid"/>
           </a:ln>
         </p:spPr>
+        <p:txBody>
+          <a:bodyPr/>
+          <a:lstStyle/>
+          <a:p>
+            <a:endParaRPr lang="ko-KR" altLang="en-US"/>
+          </a:p>
+        </p:txBody>
       </p:sp>
       <p:sp>
         <p:nvSpPr>
@@ -5234,7 +5224,7 @@
           <a:bodyPr wrap="square" lIns="0" tIns="0" rIns="0" bIns="0" rtlCol="0" anchor="ctr"/>
           <a:lstStyle/>
           <a:p>
-            <a:pPr algn="l" indent="0" marL="0">
+            <a:pPr marL="0" indent="0" algn="l">
               <a:buNone/>
             </a:pPr>
             <a:r>
@@ -5273,7 +5263,7 @@
           <a:bodyPr wrap="square" lIns="0" tIns="0" rIns="0" bIns="0" rtlCol="0" anchor="ctr"/>
           <a:lstStyle/>
           <a:p>
-            <a:pPr algn="r" indent="0" marL="0">
+            <a:pPr marL="0" indent="0" algn="r">
               <a:buNone/>
             </a:pPr>
             <a:r>
@@ -5299,14 +5289,15 @@
 </p:sld>
 </file>
 
-<file path=ppt/slides/slide14.xml><?xml version="1.0" encoding="utf-8"?>
+<file path=ppt/slides/slide2.xml><?xml version="1.0" encoding="utf-8"?>
 <p:sld xmlns:a="http://schemas.openxmlformats.org/drawingml/2006/main" xmlns:r="http://schemas.openxmlformats.org/officeDocument/2006/relationships" xmlns:p="http://schemas.openxmlformats.org/presentationml/2006/main">
-  <p:cSld name="Slide 14">
+  <p:cSld name="Slide 2">
     <p:bg>
       <p:bgPr>
         <a:solidFill>
           <a:srgbClr val="FFFFFF"/>
         </a:solidFill>
+        <a:effectLst/>
       </p:bgPr>
     </p:bg>
     <p:spTree>
@@ -5325,14 +5316,133 @@
       </p:grpSpPr>
       <p:sp>
         <p:nvSpPr>
-          <p:cNvPr id="2" name="Shape 0"/>
-          <p:cNvSpPr/>
-          <p:nvPr/>
-        </p:nvSpPr>
-        <p:spPr>
-          <a:xfrm>
-            <a:off x="0" y="0"/>
-            <a:ext cx="201168" cy="6858000"/>
+          <p:cNvPr id="2" name="Text 0"/>
+          <p:cNvSpPr/>
+          <p:nvPr/>
+        </p:nvSpPr>
+        <p:spPr>
+          <a:xfrm>
+            <a:off x="566928" y="384048"/>
+            <a:ext cx="11027664" cy="274320"/>
+          </a:xfrm>
+          <a:prstGeom prst="rect">
+            <a:avLst/>
+          </a:prstGeom>
+          <a:noFill/>
+          <a:ln/>
+        </p:spPr>
+        <p:txBody>
+          <a:bodyPr wrap="square" lIns="0" tIns="0" rIns="0" bIns="0" rtlCol="0" anchor="ctr"/>
+          <a:lstStyle/>
+          <a:p>
+            <a:pPr marL="0" indent="0">
+              <a:buNone/>
+            </a:pPr>
+            <a:r>
+              <a:rPr lang="en-US" sz="1200" b="1" kern="0" spc="200" dirty="0">
+                <a:solidFill>
+                  <a:srgbClr val="0E7C86"/>
+                </a:solidFill>
+                <a:latin typeface="Malgun Gothic" pitchFamily="34" charset="0"/>
+                <a:ea typeface="Malgun Gothic" pitchFamily="34" charset="-122"/>
+                <a:cs typeface="Malgun Gothic" pitchFamily="34" charset="-120"/>
+              </a:rPr>
+              <a:t>한눈에</a:t>
+            </a:r>
+            <a:endParaRPr lang="en-US" sz="1200" dirty="0"/>
+          </a:p>
+        </p:txBody>
+      </p:sp>
+      <p:sp>
+        <p:nvSpPr>
+          <p:cNvPr id="3" name="Text 1"/>
+          <p:cNvSpPr/>
+          <p:nvPr/>
+        </p:nvSpPr>
+        <p:spPr>
+          <a:xfrm>
+            <a:off x="566928" y="658368"/>
+            <a:ext cx="11027664" cy="640080"/>
+          </a:xfrm>
+          <a:prstGeom prst="rect">
+            <a:avLst/>
+          </a:prstGeom>
+          <a:noFill/>
+          <a:ln/>
+        </p:spPr>
+        <p:txBody>
+          <a:bodyPr wrap="square" lIns="0" tIns="0" rIns="0" bIns="0" rtlCol="0" anchor="ctr"/>
+          <a:lstStyle/>
+          <a:p>
+            <a:pPr marL="0" indent="0">
+              <a:buNone/>
+            </a:pPr>
+            <a:r>
+              <a:rPr lang="en-US" sz="2700" b="1" dirty="0">
+                <a:solidFill>
+                  <a:srgbClr val="1B2733"/>
+                </a:solidFill>
+                <a:latin typeface="Malgun Gothic" pitchFamily="34" charset="0"/>
+                <a:ea typeface="Malgun Gothic" pitchFamily="34" charset="-122"/>
+                <a:cs typeface="Malgun Gothic" pitchFamily="34" charset="-120"/>
+              </a:rPr>
+              <a:t>입력 한 줄 → 세 화면으로 자동 분기</a:t>
+            </a:r>
+            <a:endParaRPr lang="en-US" sz="2700" dirty="0"/>
+          </a:p>
+        </p:txBody>
+      </p:sp>
+      <p:sp>
+        <p:nvSpPr>
+          <p:cNvPr id="4" name="Shape 2"/>
+          <p:cNvSpPr/>
+          <p:nvPr/>
+        </p:nvSpPr>
+        <p:spPr>
+          <a:xfrm>
+            <a:off x="566928" y="1600200"/>
+            <a:ext cx="3432048" cy="3200400"/>
+          </a:xfrm>
+          <a:prstGeom prst="roundRect">
+            <a:avLst>
+              <a:gd name="adj" fmla="val 2286"/>
+            </a:avLst>
+          </a:prstGeom>
+          <a:solidFill>
+            <a:srgbClr val="FFFFFF"/>
+          </a:solidFill>
+          <a:ln w="15240">
+            <a:solidFill>
+              <a:srgbClr val="E4E9ED"/>
+            </a:solidFill>
+            <a:prstDash val="solid"/>
+          </a:ln>
+          <a:effectLst>
+            <a:outerShdw blurRad="88900" dist="38100" dir="5400000" algn="bl" rotWithShape="0">
+              <a:srgbClr val="9AA7B0">
+                <a:alpha val="18000"/>
+              </a:srgbClr>
+            </a:outerShdw>
+          </a:effectLst>
+        </p:spPr>
+        <p:txBody>
+          <a:bodyPr/>
+          <a:lstStyle/>
+          <a:p>
+            <a:endParaRPr lang="ko-KR" altLang="en-US"/>
+          </a:p>
+        </p:txBody>
+      </p:sp>
+      <p:sp>
+        <p:nvSpPr>
+          <p:cNvPr id="5" name="Shape 3"/>
+          <p:cNvSpPr/>
+          <p:nvPr/>
+        </p:nvSpPr>
+        <p:spPr>
+          <a:xfrm>
+            <a:off x="566928" y="1600200"/>
+            <a:ext cx="3432048" cy="109728"/>
           </a:xfrm>
           <a:prstGeom prst="rect">
             <a:avLst/>
@@ -5347,17 +5457,24 @@
             <a:prstDash val="solid"/>
           </a:ln>
         </p:spPr>
-      </p:sp>
-      <p:sp>
-        <p:nvSpPr>
-          <p:cNvPr id="3" name="Text 1"/>
-          <p:cNvSpPr/>
-          <p:nvPr/>
-        </p:nvSpPr>
-        <p:spPr>
-          <a:xfrm>
-            <a:off x="1005840" y="1554480"/>
-            <a:ext cx="10058400" cy="640080"/>
+        <p:txBody>
+          <a:bodyPr/>
+          <a:lstStyle/>
+          <a:p>
+            <a:endParaRPr lang="ko-KR" altLang="en-US"/>
+          </a:p>
+        </p:txBody>
+      </p:sp>
+      <p:sp>
+        <p:nvSpPr>
+          <p:cNvPr id="6" name="Text 4"/>
+          <p:cNvSpPr/>
+          <p:nvPr/>
+        </p:nvSpPr>
+        <p:spPr>
+          <a:xfrm>
+            <a:off x="822960" y="1920240"/>
+            <a:ext cx="2974848" cy="365760"/>
           </a:xfrm>
           <a:prstGeom prst="rect">
             <a:avLst/>
@@ -5369,11 +5486,128 @@
           <a:bodyPr wrap="square" lIns="0" tIns="0" rIns="0" bIns="0" rtlCol="0" anchor="ctr"/>
           <a:lstStyle/>
           <a:p>
-            <a:pPr indent="0" marL="0">
-              <a:buNone/>
-            </a:pPr>
-            <a:r>
-              <a:rPr lang="en-US" sz="2800" dirty="0">
+            <a:pPr marL="0" indent="0">
+              <a:buNone/>
+            </a:pPr>
+            <a:r>
+              <a:rPr lang="en-US" sz="1500" b="1" dirty="0">
+                <a:solidFill>
+                  <a:srgbClr val="0E7C86"/>
+                </a:solidFill>
+                <a:latin typeface="Malgun Gothic" pitchFamily="34" charset="0"/>
+                <a:ea typeface="Malgun Gothic" pitchFamily="34" charset="-122"/>
+                <a:cs typeface="Malgun Gothic" pitchFamily="34" charset="-120"/>
+              </a:rPr>
+              <a:t>지번 입력</a:t>
+            </a:r>
+            <a:endParaRPr lang="en-US" sz="1500" dirty="0"/>
+          </a:p>
+        </p:txBody>
+      </p:sp>
+      <p:sp>
+        <p:nvSpPr>
+          <p:cNvPr id="7" name="Text 5"/>
+          <p:cNvSpPr/>
+          <p:nvPr/>
+        </p:nvSpPr>
+        <p:spPr>
+          <a:xfrm>
+            <a:off x="822960" y="2377440"/>
+            <a:ext cx="2974848" cy="548640"/>
+          </a:xfrm>
+          <a:prstGeom prst="rect">
+            <a:avLst/>
+          </a:prstGeom>
+          <a:noFill/>
+          <a:ln/>
+        </p:spPr>
+        <p:txBody>
+          <a:bodyPr wrap="square" lIns="0" tIns="0" rIns="0" bIns="0" rtlCol="0" anchor="ctr"/>
+          <a:lstStyle/>
+          <a:p>
+            <a:pPr marL="0" indent="0">
+              <a:buNone/>
+            </a:pPr>
+            <a:r>
+              <a:rPr lang="en-US" sz="1200" i="1" dirty="0">
+                <a:solidFill>
+                  <a:srgbClr val="8B98A3"/>
+                </a:solidFill>
+                <a:latin typeface="Malgun Gothic" pitchFamily="34" charset="0"/>
+                <a:ea typeface="Malgun Gothic" pitchFamily="34" charset="-122"/>
+                <a:cs typeface="Malgun Gothic" pitchFamily="34" charset="-120"/>
+              </a:rPr>
+              <a:t>예) 충남 논산시 … 충곡리 200</a:t>
+            </a:r>
+            <a:endParaRPr lang="en-US" sz="1200" dirty="0"/>
+          </a:p>
+        </p:txBody>
+      </p:sp>
+      <p:sp>
+        <p:nvSpPr>
+          <p:cNvPr id="8" name="Text 6"/>
+          <p:cNvSpPr/>
+          <p:nvPr/>
+        </p:nvSpPr>
+        <p:spPr>
+          <a:xfrm>
+            <a:off x="822960" y="3063240"/>
+            <a:ext cx="2974848" cy="457200"/>
+          </a:xfrm>
+          <a:prstGeom prst="rect">
+            <a:avLst/>
+          </a:prstGeom>
+          <a:noFill/>
+          <a:ln/>
+        </p:spPr>
+        <p:txBody>
+          <a:bodyPr wrap="square" lIns="0" tIns="0" rIns="0" bIns="0" rtlCol="0" anchor="ctr"/>
+          <a:lstStyle/>
+          <a:p>
+            <a:pPr marL="0" indent="0">
+              <a:buNone/>
+            </a:pPr>
+            <a:r>
+              <a:rPr lang="en-US" sz="1800" b="1" dirty="0">
+                <a:solidFill>
+                  <a:srgbClr val="1B2733"/>
+                </a:solidFill>
+                <a:latin typeface="Malgun Gothic" pitchFamily="34" charset="0"/>
+                <a:ea typeface="Malgun Gothic" pitchFamily="34" charset="-122"/>
+                <a:cs typeface="Malgun Gothic" pitchFamily="34" charset="-120"/>
+              </a:rPr>
+              <a:t>부지 단일 진단</a:t>
+            </a:r>
+            <a:endParaRPr lang="en-US" sz="1800" dirty="0"/>
+          </a:p>
+        </p:txBody>
+      </p:sp>
+      <p:sp>
+        <p:nvSpPr>
+          <p:cNvPr id="9" name="Text 7"/>
+          <p:cNvSpPr/>
+          <p:nvPr/>
+        </p:nvSpPr>
+        <p:spPr>
+          <a:xfrm>
+            <a:off x="822960" y="3611880"/>
+            <a:ext cx="2974848" cy="822960"/>
+          </a:xfrm>
+          <a:prstGeom prst="rect">
+            <a:avLst/>
+          </a:prstGeom>
+          <a:noFill/>
+          <a:ln/>
+        </p:spPr>
+        <p:txBody>
+          <a:bodyPr wrap="square" lIns="0" tIns="0" rIns="0" bIns="0" rtlCol="0" anchor="ctr"/>
+          <a:lstStyle/>
+          <a:p>
+            <a:pPr marL="0" indent="0">
+              <a:buNone/>
+            </a:pPr>
+            <a:r>
+              <a:rPr lang="en-US" sz="1250" dirty="0">
                 <a:solidFill>
                   <a:srgbClr val="3C4A54"/>
                 </a:solidFill>
@@ -5381,70 +5615,524 @@
                 <a:ea typeface="Malgun Gothic" pitchFamily="34" charset="-122"/>
                 <a:cs typeface="Malgun Gothic" pitchFamily="34" charset="-120"/>
               </a:rPr>
-              <a:t>주소 한 줄로 시작하는</a:t>
-            </a:r>
-            <a:endParaRPr lang="en-US" sz="2800" dirty="0"/>
-          </a:p>
-        </p:txBody>
-      </p:sp>
-      <p:sp>
-        <p:nvSpPr>
-          <p:cNvPr id="4" name="Text 2"/>
-          <p:cNvSpPr/>
-          <p:nvPr/>
-        </p:nvSpPr>
-        <p:spPr>
-          <a:xfrm>
-            <a:off x="960120" y="2148840"/>
-            <a:ext cx="10515600" cy="914400"/>
-          </a:xfrm>
-          <a:prstGeom prst="rect">
-            <a:avLst/>
-          </a:prstGeom>
-          <a:noFill/>
-          <a:ln/>
-        </p:spPr>
-        <p:txBody>
-          <a:bodyPr wrap="square" lIns="0" tIns="0" rIns="0" bIns="0" rtlCol="0" anchor="ctr"/>
-          <a:lstStyle/>
-          <a:p>
-            <a:pPr indent="0" marL="0">
-              <a:buNone/>
-            </a:pPr>
-            <a:r>
-              <a:rPr lang="en-US" sz="4600" b="1" dirty="0">
-                <a:solidFill>
-                  <a:srgbClr val="1B2733"/>
-                </a:solidFill>
-                <a:latin typeface="Malgun Gothic" pitchFamily="34" charset="0"/>
-                <a:ea typeface="Malgun Gothic" pitchFamily="34" charset="-122"/>
-                <a:cs typeface="Malgun Gothic" pitchFamily="34" charset="-120"/>
-              </a:rPr>
-              <a:t>태양광 사업성 진단</a:t>
-            </a:r>
-            <a:endParaRPr lang="en-US" sz="4600" dirty="0"/>
-          </a:p>
-        </p:txBody>
-      </p:sp>
-      <p:sp>
-        <p:nvSpPr>
-          <p:cNvPr id="5" name="Shape 3"/>
-          <p:cNvSpPr/>
-          <p:nvPr/>
-        </p:nvSpPr>
-        <p:spPr>
-          <a:xfrm>
-            <a:off x="1005840" y="3657600"/>
-            <a:ext cx="3291840" cy="1371600"/>
+              <a:t>이 땅, 태양광 돼? 뭐가 걸려?</a:t>
+            </a:r>
+            <a:endParaRPr lang="en-US" sz="1250" dirty="0"/>
+          </a:p>
+        </p:txBody>
+      </p:sp>
+      <p:sp>
+        <p:nvSpPr>
+          <p:cNvPr id="10" name="Shape 8"/>
+          <p:cNvSpPr/>
+          <p:nvPr/>
+        </p:nvSpPr>
+        <p:spPr>
+          <a:xfrm>
+            <a:off x="4364736" y="1600200"/>
+            <a:ext cx="3432048" cy="3200400"/>
           </a:xfrm>
           <a:prstGeom prst="roundRect">
             <a:avLst>
-              <a:gd name="adj" fmla="val 5333"/>
+              <a:gd name="adj" fmla="val 2286"/>
             </a:avLst>
           </a:prstGeom>
           <a:solidFill>
-            <a:srgbClr val="F5F7F9"/>
+            <a:srgbClr val="FFFFFF"/>
           </a:solidFill>
+          <a:ln w="15240">
+            <a:solidFill>
+              <a:srgbClr val="E4E9ED"/>
+            </a:solidFill>
+            <a:prstDash val="solid"/>
+          </a:ln>
+          <a:effectLst>
+            <a:outerShdw blurRad="88900" dist="38100" dir="5400000" algn="bl" rotWithShape="0">
+              <a:srgbClr val="9AA7B0">
+                <a:alpha val="18000"/>
+              </a:srgbClr>
+            </a:outerShdw>
+          </a:effectLst>
+        </p:spPr>
+        <p:txBody>
+          <a:bodyPr/>
+          <a:lstStyle/>
+          <a:p>
+            <a:endParaRPr lang="ko-KR" altLang="en-US"/>
+          </a:p>
+        </p:txBody>
+      </p:sp>
+      <p:sp>
+        <p:nvSpPr>
+          <p:cNvPr id="11" name="Shape 9"/>
+          <p:cNvSpPr/>
+          <p:nvPr/>
+        </p:nvSpPr>
+        <p:spPr>
+          <a:xfrm>
+            <a:off x="4364736" y="1600200"/>
+            <a:ext cx="3432048" cy="109728"/>
+          </a:xfrm>
+          <a:prstGeom prst="rect">
+            <a:avLst/>
+          </a:prstGeom>
+          <a:solidFill>
+            <a:srgbClr val="0E7C86"/>
+          </a:solidFill>
+          <a:ln w="12700">
+            <a:solidFill>
+              <a:srgbClr val="0E7C86"/>
+            </a:solidFill>
+            <a:prstDash val="solid"/>
+          </a:ln>
+        </p:spPr>
+        <p:txBody>
+          <a:bodyPr/>
+          <a:lstStyle/>
+          <a:p>
+            <a:endParaRPr lang="ko-KR" altLang="en-US"/>
+          </a:p>
+        </p:txBody>
+      </p:sp>
+      <p:sp>
+        <p:nvSpPr>
+          <p:cNvPr id="12" name="Text 10"/>
+          <p:cNvSpPr/>
+          <p:nvPr/>
+        </p:nvSpPr>
+        <p:spPr>
+          <a:xfrm>
+            <a:off x="4620768" y="1920240"/>
+            <a:ext cx="2974848" cy="365760"/>
+          </a:xfrm>
+          <a:prstGeom prst="rect">
+            <a:avLst/>
+          </a:prstGeom>
+          <a:noFill/>
+          <a:ln/>
+        </p:spPr>
+        <p:txBody>
+          <a:bodyPr wrap="square" lIns="0" tIns="0" rIns="0" bIns="0" rtlCol="0" anchor="ctr"/>
+          <a:lstStyle/>
+          <a:p>
+            <a:pPr marL="0" indent="0">
+              <a:buNone/>
+            </a:pPr>
+            <a:r>
+              <a:rPr lang="en-US" sz="1500" b="1" dirty="0">
+                <a:solidFill>
+                  <a:srgbClr val="0E7C86"/>
+                </a:solidFill>
+                <a:latin typeface="Malgun Gothic" pitchFamily="34" charset="0"/>
+                <a:ea typeface="Malgun Gothic" pitchFamily="34" charset="-122"/>
+                <a:cs typeface="Malgun Gothic" pitchFamily="34" charset="-120"/>
+              </a:rPr>
+              <a:t>시군구명 포함</a:t>
+            </a:r>
+            <a:endParaRPr lang="en-US" sz="1500" dirty="0"/>
+          </a:p>
+        </p:txBody>
+      </p:sp>
+      <p:sp>
+        <p:nvSpPr>
+          <p:cNvPr id="13" name="Text 11"/>
+          <p:cNvSpPr/>
+          <p:nvPr/>
+        </p:nvSpPr>
+        <p:spPr>
+          <a:xfrm>
+            <a:off x="4620768" y="2377440"/>
+            <a:ext cx="2974848" cy="548640"/>
+          </a:xfrm>
+          <a:prstGeom prst="rect">
+            <a:avLst/>
+          </a:prstGeom>
+          <a:noFill/>
+          <a:ln/>
+        </p:spPr>
+        <p:txBody>
+          <a:bodyPr wrap="square" lIns="0" tIns="0" rIns="0" bIns="0" rtlCol="0" anchor="ctr"/>
+          <a:lstStyle/>
+          <a:p>
+            <a:pPr marL="0" indent="0">
+              <a:buNone/>
+            </a:pPr>
+            <a:r>
+              <a:rPr lang="en-US" sz="1200" i="1" dirty="0">
+                <a:solidFill>
+                  <a:srgbClr val="8B98A3"/>
+                </a:solidFill>
+                <a:latin typeface="Malgun Gothic" pitchFamily="34" charset="0"/>
+                <a:ea typeface="Malgun Gothic" pitchFamily="34" charset="-122"/>
+                <a:cs typeface="Malgun Gothic" pitchFamily="34" charset="-120"/>
+              </a:rPr>
+              <a:t>예) 당진에 변전소 여유 있어?</a:t>
+            </a:r>
+            <a:endParaRPr lang="en-US" sz="1200" dirty="0"/>
+          </a:p>
+        </p:txBody>
+      </p:sp>
+      <p:sp>
+        <p:nvSpPr>
+          <p:cNvPr id="14" name="Text 12"/>
+          <p:cNvSpPr/>
+          <p:nvPr/>
+        </p:nvSpPr>
+        <p:spPr>
+          <a:xfrm>
+            <a:off x="4620768" y="3063240"/>
+            <a:ext cx="2974848" cy="457200"/>
+          </a:xfrm>
+          <a:prstGeom prst="rect">
+            <a:avLst/>
+          </a:prstGeom>
+          <a:noFill/>
+          <a:ln/>
+        </p:spPr>
+        <p:txBody>
+          <a:bodyPr wrap="square" lIns="0" tIns="0" rIns="0" bIns="0" rtlCol="0" anchor="ctr"/>
+          <a:lstStyle/>
+          <a:p>
+            <a:pPr marL="0" indent="0">
+              <a:buNone/>
+            </a:pPr>
+            <a:r>
+              <a:rPr lang="en-US" sz="1800" b="1" dirty="0">
+                <a:solidFill>
+                  <a:srgbClr val="1B2733"/>
+                </a:solidFill>
+                <a:latin typeface="Malgun Gothic" pitchFamily="34" charset="0"/>
+                <a:ea typeface="Malgun Gothic" pitchFamily="34" charset="-122"/>
+                <a:cs typeface="Malgun Gothic" pitchFamily="34" charset="-120"/>
+              </a:rPr>
+              <a:t>지역 단위 진단</a:t>
+            </a:r>
+            <a:endParaRPr lang="en-US" sz="1800" dirty="0"/>
+          </a:p>
+        </p:txBody>
+      </p:sp>
+      <p:sp>
+        <p:nvSpPr>
+          <p:cNvPr id="15" name="Text 13"/>
+          <p:cNvSpPr/>
+          <p:nvPr/>
+        </p:nvSpPr>
+        <p:spPr>
+          <a:xfrm>
+            <a:off x="4620768" y="3611880"/>
+            <a:ext cx="2974848" cy="822960"/>
+          </a:xfrm>
+          <a:prstGeom prst="rect">
+            <a:avLst/>
+          </a:prstGeom>
+          <a:noFill/>
+          <a:ln/>
+        </p:spPr>
+        <p:txBody>
+          <a:bodyPr wrap="square" lIns="0" tIns="0" rIns="0" bIns="0" rtlCol="0" anchor="ctr"/>
+          <a:lstStyle/>
+          <a:p>
+            <a:pPr marL="0" indent="0">
+              <a:buNone/>
+            </a:pPr>
+            <a:r>
+              <a:rPr lang="en-US" sz="1250" dirty="0">
+                <a:solidFill>
+                  <a:srgbClr val="3C4A54"/>
+                </a:solidFill>
+                <a:latin typeface="Malgun Gothic" pitchFamily="34" charset="0"/>
+                <a:ea typeface="Malgun Gothic" pitchFamily="34" charset="-122"/>
+                <a:cs typeface="Malgun Gothic" pitchFamily="34" charset="-120"/>
+              </a:rPr>
+              <a:t>이 지역 규제·계통·지원은?</a:t>
+            </a:r>
+            <a:endParaRPr lang="en-US" sz="1250" dirty="0"/>
+          </a:p>
+        </p:txBody>
+      </p:sp>
+      <p:sp>
+        <p:nvSpPr>
+          <p:cNvPr id="16" name="Shape 14"/>
+          <p:cNvSpPr/>
+          <p:nvPr/>
+        </p:nvSpPr>
+        <p:spPr>
+          <a:xfrm>
+            <a:off x="8162544" y="1600200"/>
+            <a:ext cx="3432048" cy="3200400"/>
+          </a:xfrm>
+          <a:prstGeom prst="roundRect">
+            <a:avLst>
+              <a:gd name="adj" fmla="val 2286"/>
+            </a:avLst>
+          </a:prstGeom>
+          <a:solidFill>
+            <a:srgbClr val="FFFFFF"/>
+          </a:solidFill>
+          <a:ln w="15240">
+            <a:solidFill>
+              <a:srgbClr val="E4E9ED"/>
+            </a:solidFill>
+            <a:prstDash val="solid"/>
+          </a:ln>
+          <a:effectLst>
+            <a:outerShdw blurRad="88900" dist="38100" dir="5400000" algn="bl" rotWithShape="0">
+              <a:srgbClr val="9AA7B0">
+                <a:alpha val="18000"/>
+              </a:srgbClr>
+            </a:outerShdw>
+          </a:effectLst>
+        </p:spPr>
+        <p:txBody>
+          <a:bodyPr/>
+          <a:lstStyle/>
+          <a:p>
+            <a:endParaRPr lang="ko-KR" altLang="en-US"/>
+          </a:p>
+        </p:txBody>
+      </p:sp>
+      <p:sp>
+        <p:nvSpPr>
+          <p:cNvPr id="17" name="Shape 15"/>
+          <p:cNvSpPr/>
+          <p:nvPr/>
+        </p:nvSpPr>
+        <p:spPr>
+          <a:xfrm>
+            <a:off x="8162544" y="1600200"/>
+            <a:ext cx="3432048" cy="109728"/>
+          </a:xfrm>
+          <a:prstGeom prst="rect">
+            <a:avLst/>
+          </a:prstGeom>
+          <a:solidFill>
+            <a:srgbClr val="0E7C86"/>
+          </a:solidFill>
+          <a:ln w="12700">
+            <a:solidFill>
+              <a:srgbClr val="0E7C86"/>
+            </a:solidFill>
+            <a:prstDash val="solid"/>
+          </a:ln>
+        </p:spPr>
+        <p:txBody>
+          <a:bodyPr/>
+          <a:lstStyle/>
+          <a:p>
+            <a:endParaRPr lang="ko-KR" altLang="en-US"/>
+          </a:p>
+        </p:txBody>
+      </p:sp>
+      <p:sp>
+        <p:nvSpPr>
+          <p:cNvPr id="18" name="Text 16"/>
+          <p:cNvSpPr/>
+          <p:nvPr/>
+        </p:nvSpPr>
+        <p:spPr>
+          <a:xfrm>
+            <a:off x="8418576" y="1920240"/>
+            <a:ext cx="2974848" cy="365760"/>
+          </a:xfrm>
+          <a:prstGeom prst="rect">
+            <a:avLst/>
+          </a:prstGeom>
+          <a:noFill/>
+          <a:ln/>
+        </p:spPr>
+        <p:txBody>
+          <a:bodyPr wrap="square" lIns="0" tIns="0" rIns="0" bIns="0" rtlCol="0" anchor="ctr"/>
+          <a:lstStyle/>
+          <a:p>
+            <a:pPr marL="0" indent="0">
+              <a:buNone/>
+            </a:pPr>
+            <a:r>
+              <a:rPr lang="en-US" sz="1500" b="1" dirty="0">
+                <a:solidFill>
+                  <a:srgbClr val="0E7C86"/>
+                </a:solidFill>
+                <a:latin typeface="Malgun Gothic" pitchFamily="34" charset="0"/>
+                <a:ea typeface="Malgun Gothic" pitchFamily="34" charset="-122"/>
+                <a:cs typeface="Malgun Gothic" pitchFamily="34" charset="-120"/>
+              </a:rPr>
+              <a:t>일반 질문</a:t>
+            </a:r>
+            <a:endParaRPr lang="en-US" sz="1500" dirty="0"/>
+          </a:p>
+        </p:txBody>
+      </p:sp>
+      <p:sp>
+        <p:nvSpPr>
+          <p:cNvPr id="19" name="Text 17"/>
+          <p:cNvSpPr/>
+          <p:nvPr/>
+        </p:nvSpPr>
+        <p:spPr>
+          <a:xfrm>
+            <a:off x="8418576" y="2377440"/>
+            <a:ext cx="2974848" cy="548640"/>
+          </a:xfrm>
+          <a:prstGeom prst="rect">
+            <a:avLst/>
+          </a:prstGeom>
+          <a:noFill/>
+          <a:ln/>
+        </p:spPr>
+        <p:txBody>
+          <a:bodyPr wrap="square" lIns="0" tIns="0" rIns="0" bIns="0" rtlCol="0" anchor="ctr"/>
+          <a:lstStyle/>
+          <a:p>
+            <a:pPr marL="0" indent="0">
+              <a:buNone/>
+            </a:pPr>
+            <a:r>
+              <a:rPr lang="en-US" sz="1200" i="1" dirty="0">
+                <a:solidFill>
+                  <a:srgbClr val="8B98A3"/>
+                </a:solidFill>
+                <a:latin typeface="Malgun Gothic" pitchFamily="34" charset="0"/>
+                <a:ea typeface="Malgun Gothic" pitchFamily="34" charset="-122"/>
+                <a:cs typeface="Malgun Gothic" pitchFamily="34" charset="-120"/>
+              </a:rPr>
+              <a:t>예) 충남에서 좋은 곳 추천해줘</a:t>
+            </a:r>
+            <a:endParaRPr lang="en-US" sz="1200" dirty="0"/>
+          </a:p>
+        </p:txBody>
+      </p:sp>
+      <p:sp>
+        <p:nvSpPr>
+          <p:cNvPr id="20" name="Text 18"/>
+          <p:cNvSpPr/>
+          <p:nvPr/>
+        </p:nvSpPr>
+        <p:spPr>
+          <a:xfrm>
+            <a:off x="8418576" y="3063240"/>
+            <a:ext cx="2974848" cy="457200"/>
+          </a:xfrm>
+          <a:prstGeom prst="rect">
+            <a:avLst/>
+          </a:prstGeom>
+          <a:noFill/>
+          <a:ln/>
+        </p:spPr>
+        <p:txBody>
+          <a:bodyPr wrap="square" lIns="0" tIns="0" rIns="0" bIns="0" rtlCol="0" anchor="ctr"/>
+          <a:lstStyle/>
+          <a:p>
+            <a:pPr marL="0" indent="0">
+              <a:buNone/>
+            </a:pPr>
+            <a:r>
+              <a:rPr lang="en-US" sz="1800" b="1" dirty="0">
+                <a:solidFill>
+                  <a:srgbClr val="1B2733"/>
+                </a:solidFill>
+                <a:latin typeface="Malgun Gothic" pitchFamily="34" charset="0"/>
+                <a:ea typeface="Malgun Gothic" pitchFamily="34" charset="-122"/>
+                <a:cs typeface="Malgun Gothic" pitchFamily="34" charset="-120"/>
+              </a:rPr>
+              <a:t>추천 리스트</a:t>
+            </a:r>
+            <a:endParaRPr lang="en-US" sz="1800" dirty="0"/>
+          </a:p>
+        </p:txBody>
+      </p:sp>
+      <p:sp>
+        <p:nvSpPr>
+          <p:cNvPr id="21" name="Text 19"/>
+          <p:cNvSpPr/>
+          <p:nvPr/>
+        </p:nvSpPr>
+        <p:spPr>
+          <a:xfrm>
+            <a:off x="8418576" y="3611880"/>
+            <a:ext cx="2974848" cy="822960"/>
+          </a:xfrm>
+          <a:prstGeom prst="rect">
+            <a:avLst/>
+          </a:prstGeom>
+          <a:noFill/>
+          <a:ln/>
+        </p:spPr>
+        <p:txBody>
+          <a:bodyPr wrap="square" lIns="0" tIns="0" rIns="0" bIns="0" rtlCol="0" anchor="ctr"/>
+          <a:lstStyle/>
+          <a:p>
+            <a:pPr marL="0" indent="0">
+              <a:buNone/>
+            </a:pPr>
+            <a:r>
+              <a:rPr lang="en-US" sz="1250" dirty="0">
+                <a:solidFill>
+                  <a:srgbClr val="3C4A54"/>
+                </a:solidFill>
+                <a:latin typeface="Malgun Gothic" pitchFamily="34" charset="0"/>
+                <a:ea typeface="Malgun Gothic" pitchFamily="34" charset="-122"/>
+                <a:cs typeface="Malgun Gothic" pitchFamily="34" charset="-120"/>
+              </a:rPr>
+              <a:t>충남 어디가 제일 좋아?</a:t>
+            </a:r>
+            <a:endParaRPr lang="en-US" sz="1250" dirty="0"/>
+          </a:p>
+        </p:txBody>
+      </p:sp>
+      <p:sp>
+        <p:nvSpPr>
+          <p:cNvPr id="22" name="Text 20"/>
+          <p:cNvSpPr/>
+          <p:nvPr/>
+        </p:nvSpPr>
+        <p:spPr>
+          <a:xfrm>
+            <a:off x="566928" y="5120640"/>
+            <a:ext cx="11027664" cy="457200"/>
+          </a:xfrm>
+          <a:prstGeom prst="rect">
+            <a:avLst/>
+          </a:prstGeom>
+          <a:noFill/>
+          <a:ln/>
+        </p:spPr>
+        <p:txBody>
+          <a:bodyPr wrap="square" lIns="0" tIns="0" rIns="0" bIns="0" rtlCol="0" anchor="ctr"/>
+          <a:lstStyle/>
+          <a:p>
+            <a:pPr marL="0" indent="0" algn="ctr">
+              <a:buNone/>
+            </a:pPr>
+            <a:r>
+              <a:rPr lang="en-US" sz="1400" b="1" dirty="0">
+                <a:solidFill>
+                  <a:srgbClr val="1B2733"/>
+                </a:solidFill>
+                <a:latin typeface="Malgun Gothic" pitchFamily="34" charset="0"/>
+                <a:ea typeface="Malgun Gothic" pitchFamily="34" charset="-122"/>
+                <a:cs typeface="Malgun Gothic" pitchFamily="34" charset="-120"/>
+              </a:rPr>
+              <a:t>흩어진 공공데이터를 한 부지 기준으로 모아 자동 종합합니다.</a:t>
+            </a:r>
+            <a:endParaRPr lang="en-US" sz="1400" dirty="0"/>
+          </a:p>
+        </p:txBody>
+      </p:sp>
+      <p:sp>
+        <p:nvSpPr>
+          <p:cNvPr id="24" name="Shape 21"/>
+          <p:cNvSpPr/>
+          <p:nvPr/>
+        </p:nvSpPr>
+        <p:spPr>
+          <a:xfrm>
+            <a:off x="566928" y="6455664"/>
+            <a:ext cx="11027664" cy="0"/>
+          </a:xfrm>
+          <a:prstGeom prst="line">
+            <a:avLst/>
+          </a:prstGeom>
+          <a:noFill/>
           <a:ln w="12700">
             <a:solidFill>
               <a:srgbClr val="E4E9ED"/>
@@ -5452,17 +6140,24 @@
             <a:prstDash val="solid"/>
           </a:ln>
         </p:spPr>
-      </p:sp>
-      <p:sp>
-        <p:nvSpPr>
-          <p:cNvPr id="6" name="Text 4"/>
-          <p:cNvSpPr/>
-          <p:nvPr/>
-        </p:nvSpPr>
-        <p:spPr>
-          <a:xfrm>
-            <a:off x="1188720" y="3886200"/>
-            <a:ext cx="2926080" cy="640080"/>
+        <p:txBody>
+          <a:bodyPr/>
+          <a:lstStyle/>
+          <a:p>
+            <a:endParaRPr lang="ko-KR" altLang="en-US"/>
+          </a:p>
+        </p:txBody>
+      </p:sp>
+      <p:sp>
+        <p:nvSpPr>
+          <p:cNvPr id="25" name="Text 22"/>
+          <p:cNvSpPr/>
+          <p:nvPr/>
+        </p:nvSpPr>
+        <p:spPr>
+          <a:xfrm>
+            <a:off x="566928" y="6492240"/>
+            <a:ext cx="5486400" cy="274320"/>
           </a:xfrm>
           <a:prstGeom prst="rect">
             <a:avLst/>
@@ -5474,34 +6169,34 @@
           <a:bodyPr wrap="square" lIns="0" tIns="0" rIns="0" bIns="0" rtlCol="0" anchor="ctr"/>
           <a:lstStyle/>
           <a:p>
-            <a:pPr indent="0" marL="0">
-              <a:buNone/>
-            </a:pPr>
-            <a:r>
-              <a:rPr lang="en-US" sz="2600" b="1" dirty="0">
-                <a:solidFill>
-                  <a:srgbClr val="0E7C86"/>
-                </a:solidFill>
-                <a:latin typeface="Malgun Gothic" pitchFamily="34" charset="0"/>
-                <a:ea typeface="Malgun Gothic" pitchFamily="34" charset="-122"/>
-                <a:cs typeface="Malgun Gothic" pitchFamily="34" charset="-120"/>
-              </a:rPr>
-              <a:t>7종</a:t>
-            </a:r>
-            <a:endParaRPr lang="en-US" sz="2600" dirty="0"/>
-          </a:p>
-        </p:txBody>
-      </p:sp>
-      <p:sp>
-        <p:nvSpPr>
-          <p:cNvPr id="7" name="Text 5"/>
-          <p:cNvSpPr/>
-          <p:nvPr/>
-        </p:nvSpPr>
-        <p:spPr>
-          <a:xfrm>
-            <a:off x="1188720" y="4572000"/>
-            <a:ext cx="2926080" cy="365760"/>
+            <a:pPr marL="0" indent="0" algn="l">
+              <a:buNone/>
+            </a:pPr>
+            <a:r>
+              <a:rPr lang="en-US" sz="900" dirty="0">
+                <a:solidFill>
+                  <a:srgbClr val="8B98A3"/>
+                </a:solidFill>
+                <a:latin typeface="Malgun Gothic" pitchFamily="34" charset="0"/>
+                <a:ea typeface="Malgun Gothic" pitchFamily="34" charset="-122"/>
+                <a:cs typeface="Malgun Gothic" pitchFamily="34" charset="-120"/>
+              </a:rPr>
+              <a:t>SolarFit · 화면 데이터 설명서</a:t>
+            </a:r>
+            <a:endParaRPr lang="en-US" sz="900" dirty="0"/>
+          </a:p>
+        </p:txBody>
+      </p:sp>
+      <p:sp>
+        <p:nvSpPr>
+          <p:cNvPr id="26" name="Text 23"/>
+          <p:cNvSpPr/>
+          <p:nvPr/>
+        </p:nvSpPr>
+        <p:spPr>
+          <a:xfrm>
+            <a:off x="11045952" y="6492240"/>
+            <a:ext cx="548640" cy="274320"/>
           </a:xfrm>
           <a:prstGeom prst="rect">
             <a:avLst/>
@@ -5513,11 +6208,11 @@
           <a:bodyPr wrap="square" lIns="0" tIns="0" rIns="0" bIns="0" rtlCol="0" anchor="ctr"/>
           <a:lstStyle/>
           <a:p>
-            <a:pPr indent="0" marL="0">
-              <a:buNone/>
-            </a:pPr>
-            <a:r>
-              <a:rPr lang="en-US" sz="1300" dirty="0">
+            <a:pPr marL="0" indent="0" algn="r">
+              <a:buNone/>
+            </a:pPr>
+            <a:r>
+              <a:rPr lang="en-US" sz="900" dirty="0">
                 <a:solidFill>
                   <a:srgbClr val="8B98A3"/>
                 </a:solidFill>
@@ -5525,258 +6220,9 @@
                 <a:ea typeface="Malgun Gothic" pitchFamily="34" charset="-122"/>
                 <a:cs typeface="Malgun Gothic" pitchFamily="34" charset="-120"/>
               </a:rPr>
-              <a:t>공공 API</a:t>
-            </a:r>
-            <a:endParaRPr lang="en-US" sz="1300" dirty="0"/>
-          </a:p>
-        </p:txBody>
-      </p:sp>
-      <p:sp>
-        <p:nvSpPr>
-          <p:cNvPr id="8" name="Shape 6"/>
-          <p:cNvSpPr/>
-          <p:nvPr/>
-        </p:nvSpPr>
-        <p:spPr>
-          <a:xfrm>
-            <a:off x="4754880" y="3657600"/>
-            <a:ext cx="3291840" cy="1371600"/>
-          </a:xfrm>
-          <a:prstGeom prst="roundRect">
-            <a:avLst>
-              <a:gd name="adj" fmla="val 5333"/>
-            </a:avLst>
-          </a:prstGeom>
-          <a:solidFill>
-            <a:srgbClr val="F5F7F9"/>
-          </a:solidFill>
-          <a:ln w="12700">
-            <a:solidFill>
-              <a:srgbClr val="E4E9ED"/>
-            </a:solidFill>
-            <a:prstDash val="solid"/>
-          </a:ln>
-        </p:spPr>
-      </p:sp>
-      <p:sp>
-        <p:nvSpPr>
-          <p:cNvPr id="9" name="Text 7"/>
-          <p:cNvSpPr/>
-          <p:nvPr/>
-        </p:nvSpPr>
-        <p:spPr>
-          <a:xfrm>
-            <a:off x="4937760" y="3886200"/>
-            <a:ext cx="2926080" cy="640080"/>
-          </a:xfrm>
-          <a:prstGeom prst="rect">
-            <a:avLst/>
-          </a:prstGeom>
-          <a:noFill/>
-          <a:ln/>
-        </p:spPr>
-        <p:txBody>
-          <a:bodyPr wrap="square" lIns="0" tIns="0" rIns="0" bIns="0" rtlCol="0" anchor="ctr"/>
-          <a:lstStyle/>
-          <a:p>
-            <a:pPr indent="0" marL="0">
-              <a:buNone/>
-            </a:pPr>
-            <a:r>
-              <a:rPr lang="en-US" sz="2600" b="1" dirty="0">
-                <a:solidFill>
-                  <a:srgbClr val="0E7C86"/>
-                </a:solidFill>
-                <a:latin typeface="Malgun Gothic" pitchFamily="34" charset="0"/>
-                <a:ea typeface="Malgun Gothic" pitchFamily="34" charset="-122"/>
-                <a:cs typeface="Malgun Gothic" pitchFamily="34" charset="-120"/>
-              </a:rPr>
-              <a:t>약 200원</a:t>
-            </a:r>
-            <a:endParaRPr lang="en-US" sz="2600" dirty="0"/>
-          </a:p>
-        </p:txBody>
-      </p:sp>
-      <p:sp>
-        <p:nvSpPr>
-          <p:cNvPr id="10" name="Text 8"/>
-          <p:cNvSpPr/>
-          <p:nvPr/>
-        </p:nvSpPr>
-        <p:spPr>
-          <a:xfrm>
-            <a:off x="4937760" y="4572000"/>
-            <a:ext cx="2926080" cy="365760"/>
-          </a:xfrm>
-          <a:prstGeom prst="rect">
-            <a:avLst/>
-          </a:prstGeom>
-          <a:noFill/>
-          <a:ln/>
-        </p:spPr>
-        <p:txBody>
-          <a:bodyPr wrap="square" lIns="0" tIns="0" rIns="0" bIns="0" rtlCol="0" anchor="ctr"/>
-          <a:lstStyle/>
-          <a:p>
-            <a:pPr indent="0" marL="0">
-              <a:buNone/>
-            </a:pPr>
-            <a:r>
-              <a:rPr lang="en-US" sz="1300" dirty="0">
-                <a:solidFill>
-                  <a:srgbClr val="8B98A3"/>
-                </a:solidFill>
-                <a:latin typeface="Malgun Gothic" pitchFamily="34" charset="0"/>
-                <a:ea typeface="Malgun Gothic" pitchFamily="34" charset="-122"/>
-                <a:cs typeface="Malgun Gothic" pitchFamily="34" charset="-120"/>
-              </a:rPr>
-              <a:t>1주 운영비</a:t>
-            </a:r>
-            <a:endParaRPr lang="en-US" sz="1300" dirty="0"/>
-          </a:p>
-        </p:txBody>
-      </p:sp>
-      <p:sp>
-        <p:nvSpPr>
-          <p:cNvPr id="11" name="Shape 9"/>
-          <p:cNvSpPr/>
-          <p:nvPr/>
-        </p:nvSpPr>
-        <p:spPr>
-          <a:xfrm>
-            <a:off x="8503920" y="3657600"/>
-            <a:ext cx="3291840" cy="1371600"/>
-          </a:xfrm>
-          <a:prstGeom prst="roundRect">
-            <a:avLst>
-              <a:gd name="adj" fmla="val 5333"/>
-            </a:avLst>
-          </a:prstGeom>
-          <a:solidFill>
-            <a:srgbClr val="F5F7F9"/>
-          </a:solidFill>
-          <a:ln w="12700">
-            <a:solidFill>
-              <a:srgbClr val="E4E9ED"/>
-            </a:solidFill>
-            <a:prstDash val="solid"/>
-          </a:ln>
-        </p:spPr>
-      </p:sp>
-      <p:sp>
-        <p:nvSpPr>
-          <p:cNvPr id="12" name="Text 10"/>
-          <p:cNvSpPr/>
-          <p:nvPr/>
-        </p:nvSpPr>
-        <p:spPr>
-          <a:xfrm>
-            <a:off x="8686800" y="3886200"/>
-            <a:ext cx="2926080" cy="640080"/>
-          </a:xfrm>
-          <a:prstGeom prst="rect">
-            <a:avLst/>
-          </a:prstGeom>
-          <a:noFill/>
-          <a:ln/>
-        </p:spPr>
-        <p:txBody>
-          <a:bodyPr wrap="square" lIns="0" tIns="0" rIns="0" bIns="0" rtlCol="0" anchor="ctr"/>
-          <a:lstStyle/>
-          <a:p>
-            <a:pPr indent="0" marL="0">
-              <a:buNone/>
-            </a:pPr>
-            <a:r>
-              <a:rPr lang="en-US" sz="2600" b="1" dirty="0">
-                <a:solidFill>
-                  <a:srgbClr val="0E7C86"/>
-                </a:solidFill>
-                <a:latin typeface="Malgun Gothic" pitchFamily="34" charset="0"/>
-                <a:ea typeface="Malgun Gothic" pitchFamily="34" charset="-122"/>
-                <a:cs typeface="Malgun Gothic" pitchFamily="34" charset="-120"/>
-              </a:rPr>
-              <a:t>로컬 PC + 인터넷</a:t>
-            </a:r>
-            <a:endParaRPr lang="en-US" sz="2600" dirty="0"/>
-          </a:p>
-        </p:txBody>
-      </p:sp>
-      <p:sp>
-        <p:nvSpPr>
-          <p:cNvPr id="13" name="Text 11"/>
-          <p:cNvSpPr/>
-          <p:nvPr/>
-        </p:nvSpPr>
-        <p:spPr>
-          <a:xfrm>
-            <a:off x="8686800" y="4572000"/>
-            <a:ext cx="2926080" cy="365760"/>
-          </a:xfrm>
-          <a:prstGeom prst="rect">
-            <a:avLst/>
-          </a:prstGeom>
-          <a:noFill/>
-          <a:ln/>
-        </p:spPr>
-        <p:txBody>
-          <a:bodyPr wrap="square" lIns="0" tIns="0" rIns="0" bIns="0" rtlCol="0" anchor="ctr"/>
-          <a:lstStyle/>
-          <a:p>
-            <a:pPr indent="0" marL="0">
-              <a:buNone/>
-            </a:pPr>
-            <a:r>
-              <a:rPr lang="en-US" sz="1300" dirty="0">
-                <a:solidFill>
-                  <a:srgbClr val="8B98A3"/>
-                </a:solidFill>
-                <a:latin typeface="Malgun Gothic" pitchFamily="34" charset="0"/>
-                <a:ea typeface="Malgun Gothic" pitchFamily="34" charset="-122"/>
-                <a:cs typeface="Malgun Gothic" pitchFamily="34" charset="-120"/>
-              </a:rPr>
-              <a:t>구동 환경</a:t>
-            </a:r>
-            <a:endParaRPr lang="en-US" sz="1300" dirty="0"/>
-          </a:p>
-        </p:txBody>
-      </p:sp>
-      <p:sp>
-        <p:nvSpPr>
-          <p:cNvPr id="14" name="Text 12"/>
-          <p:cNvSpPr/>
-          <p:nvPr/>
-        </p:nvSpPr>
-        <p:spPr>
-          <a:xfrm>
-            <a:off x="1005840" y="5669280"/>
-            <a:ext cx="5486400" cy="457200"/>
-          </a:xfrm>
-          <a:prstGeom prst="rect">
-            <a:avLst/>
-          </a:prstGeom>
-          <a:noFill/>
-          <a:ln/>
-        </p:spPr>
-        <p:txBody>
-          <a:bodyPr wrap="square" lIns="0" tIns="0" rIns="0" bIns="0" rtlCol="0" anchor="ctr"/>
-          <a:lstStyle/>
-          <a:p>
-            <a:pPr indent="0" marL="0">
-              <a:buNone/>
-            </a:pPr>
-            <a:r>
-              <a:rPr lang="en-US" sz="1600" b="1" dirty="0">
-                <a:solidFill>
-                  <a:srgbClr val="0E7C86"/>
-                </a:solidFill>
-                <a:latin typeface="Malgun Gothic" pitchFamily="34" charset="0"/>
-                <a:ea typeface="Malgun Gothic" pitchFamily="34" charset="-122"/>
-                <a:cs typeface="Malgun Gothic" pitchFamily="34" charset="-120"/>
-              </a:rPr>
-              <a:t>SolarFit</a:t>
-            </a:r>
-            <a:endParaRPr lang="en-US" sz="1600" dirty="0"/>
+              <a:t>2</a:t>
+            </a:r>
+            <a:endParaRPr lang="en-US" sz="900" dirty="0"/>
           </a:p>
         </p:txBody>
       </p:sp>
@@ -5788,14 +6234,15 @@
 </p:sld>
 </file>
 
-<file path=ppt/slides/slide2.xml><?xml version="1.0" encoding="utf-8"?>
+<file path=ppt/slides/slide3.xml><?xml version="1.0" encoding="utf-8"?>
 <p:sld xmlns:a="http://schemas.openxmlformats.org/drawingml/2006/main" xmlns:r="http://schemas.openxmlformats.org/officeDocument/2006/relationships" xmlns:p="http://schemas.openxmlformats.org/presentationml/2006/main">
-  <p:cSld name="Slide 2">
+  <p:cSld name="Slide 3">
     <p:bg>
       <p:bgPr>
         <a:solidFill>
           <a:srgbClr val="FFFFFF"/>
         </a:solidFill>
+        <a:effectLst/>
       </p:bgPr>
     </p:bg>
     <p:spTree>
@@ -5833,11 +6280,11 @@
           <a:bodyPr wrap="square" lIns="0" tIns="0" rIns="0" bIns="0" rtlCol="0" anchor="ctr"/>
           <a:lstStyle/>
           <a:p>
-            <a:pPr indent="0" marL="0">
-              <a:buNone/>
-            </a:pPr>
-            <a:r>
-              <a:rPr lang="en-US" sz="1200" b="1" spc="200" kern="0" dirty="0">
+            <a:pPr marL="0" indent="0">
+              <a:buNone/>
+            </a:pPr>
+            <a:r>
+              <a:rPr lang="en-US" sz="1200" b="1" kern="0" spc="200" dirty="0">
                 <a:solidFill>
                   <a:srgbClr val="0E7C86"/>
                 </a:solidFill>
@@ -5845,7 +6292,7 @@
                 <a:ea typeface="Malgun Gothic" pitchFamily="34" charset="-122"/>
                 <a:cs typeface="Malgun Gothic" pitchFamily="34" charset="-120"/>
               </a:rPr>
-              <a:t>한눈에</a:t>
+              <a:t>데이터 출처</a:t>
             </a:r>
             <a:endParaRPr lang="en-US" sz="1200" dirty="0"/>
           </a:p>
@@ -5872,902 +6319,7 @@
           <a:bodyPr wrap="square" lIns="0" tIns="0" rIns="0" bIns="0" rtlCol="0" anchor="ctr"/>
           <a:lstStyle/>
           <a:p>
-            <a:pPr indent="0" marL="0">
-              <a:buNone/>
-            </a:pPr>
-            <a:r>
-              <a:rPr lang="en-US" sz="2700" b="1" dirty="0">
-                <a:solidFill>
-                  <a:srgbClr val="1B2733"/>
-                </a:solidFill>
-                <a:latin typeface="Malgun Gothic" pitchFamily="34" charset="0"/>
-                <a:ea typeface="Malgun Gothic" pitchFamily="34" charset="-122"/>
-                <a:cs typeface="Malgun Gothic" pitchFamily="34" charset="-120"/>
-              </a:rPr>
-              <a:t>입력 한 줄 → 세 화면으로 자동 분기</a:t>
-            </a:r>
-            <a:endParaRPr lang="en-US" sz="2700" dirty="0"/>
-          </a:p>
-        </p:txBody>
-      </p:sp>
-      <p:sp>
-        <p:nvSpPr>
-          <p:cNvPr id="4" name="Shape 2"/>
-          <p:cNvSpPr/>
-          <p:nvPr/>
-        </p:nvSpPr>
-        <p:spPr>
-          <a:xfrm>
-            <a:off x="566928" y="1600200"/>
-            <a:ext cx="3432048" cy="3200400"/>
-          </a:xfrm>
-          <a:prstGeom prst="roundRect">
-            <a:avLst>
-              <a:gd name="adj" fmla="val 2286"/>
-            </a:avLst>
-          </a:prstGeom>
-          <a:solidFill>
-            <a:srgbClr val="FFFFFF"/>
-          </a:solidFill>
-          <a:ln w="15240">
-            <a:solidFill>
-              <a:srgbClr val="E4E9ED"/>
-            </a:solidFill>
-            <a:prstDash val="solid"/>
-          </a:ln>
-          <a:effectLst>
-            <a:outerShdw sx="100000" sy="100000" kx="0" ky="0" algn="bl" rotWithShape="0" blurRad="88900" dist="38100" dir="5400000">
-              <a:srgbClr val="9AA7B0">
-                <a:alpha val="18000"/>
-              </a:srgbClr>
-            </a:outerShdw>
-          </a:effectLst>
-        </p:spPr>
-      </p:sp>
-      <p:sp>
-        <p:nvSpPr>
-          <p:cNvPr id="5" name="Shape 3"/>
-          <p:cNvSpPr/>
-          <p:nvPr/>
-        </p:nvSpPr>
-        <p:spPr>
-          <a:xfrm>
-            <a:off x="566928" y="1600200"/>
-            <a:ext cx="3432048" cy="109728"/>
-          </a:xfrm>
-          <a:prstGeom prst="rect">
-            <a:avLst/>
-          </a:prstGeom>
-          <a:solidFill>
-            <a:srgbClr val="0E7C86"/>
-          </a:solidFill>
-          <a:ln w="12700">
-            <a:solidFill>
-              <a:srgbClr val="0E7C86"/>
-            </a:solidFill>
-            <a:prstDash val="solid"/>
-          </a:ln>
-        </p:spPr>
-      </p:sp>
-      <p:sp>
-        <p:nvSpPr>
-          <p:cNvPr id="6" name="Text 4"/>
-          <p:cNvSpPr/>
-          <p:nvPr/>
-        </p:nvSpPr>
-        <p:spPr>
-          <a:xfrm>
-            <a:off x="822960" y="1920240"/>
-            <a:ext cx="2974848" cy="365760"/>
-          </a:xfrm>
-          <a:prstGeom prst="rect">
-            <a:avLst/>
-          </a:prstGeom>
-          <a:noFill/>
-          <a:ln/>
-        </p:spPr>
-        <p:txBody>
-          <a:bodyPr wrap="square" lIns="0" tIns="0" rIns="0" bIns="0" rtlCol="0" anchor="ctr"/>
-          <a:lstStyle/>
-          <a:p>
-            <a:pPr indent="0" marL="0">
-              <a:buNone/>
-            </a:pPr>
-            <a:r>
-              <a:rPr lang="en-US" sz="1500" b="1" dirty="0">
-                <a:solidFill>
-                  <a:srgbClr val="0E7C86"/>
-                </a:solidFill>
-                <a:latin typeface="Malgun Gothic" pitchFamily="34" charset="0"/>
-                <a:ea typeface="Malgun Gothic" pitchFamily="34" charset="-122"/>
-                <a:cs typeface="Malgun Gothic" pitchFamily="34" charset="-120"/>
-              </a:rPr>
-              <a:t>지번 입력</a:t>
-            </a:r>
-            <a:endParaRPr lang="en-US" sz="1500" dirty="0"/>
-          </a:p>
-        </p:txBody>
-      </p:sp>
-      <p:sp>
-        <p:nvSpPr>
-          <p:cNvPr id="7" name="Text 5"/>
-          <p:cNvSpPr/>
-          <p:nvPr/>
-        </p:nvSpPr>
-        <p:spPr>
-          <a:xfrm>
-            <a:off x="822960" y="2377440"/>
-            <a:ext cx="2974848" cy="548640"/>
-          </a:xfrm>
-          <a:prstGeom prst="rect">
-            <a:avLst/>
-          </a:prstGeom>
-          <a:noFill/>
-          <a:ln/>
-        </p:spPr>
-        <p:txBody>
-          <a:bodyPr wrap="square" lIns="0" tIns="0" rIns="0" bIns="0" rtlCol="0" anchor="ctr"/>
-          <a:lstStyle/>
-          <a:p>
-            <a:pPr indent="0" marL="0">
-              <a:buNone/>
-            </a:pPr>
-            <a:r>
-              <a:rPr lang="en-US" sz="1200" i="1" dirty="0">
-                <a:solidFill>
-                  <a:srgbClr val="8B98A3"/>
-                </a:solidFill>
-                <a:latin typeface="Malgun Gothic" pitchFamily="34" charset="0"/>
-                <a:ea typeface="Malgun Gothic" pitchFamily="34" charset="-122"/>
-                <a:cs typeface="Malgun Gothic" pitchFamily="34" charset="-120"/>
-              </a:rPr>
-              <a:t>예) 충남 논산시 … 충곡리 200</a:t>
-            </a:r>
-            <a:endParaRPr lang="en-US" sz="1200" dirty="0"/>
-          </a:p>
-        </p:txBody>
-      </p:sp>
-      <p:sp>
-        <p:nvSpPr>
-          <p:cNvPr id="8" name="Text 6"/>
-          <p:cNvSpPr/>
-          <p:nvPr/>
-        </p:nvSpPr>
-        <p:spPr>
-          <a:xfrm>
-            <a:off x="822960" y="3063240"/>
-            <a:ext cx="2974848" cy="457200"/>
-          </a:xfrm>
-          <a:prstGeom prst="rect">
-            <a:avLst/>
-          </a:prstGeom>
-          <a:noFill/>
-          <a:ln/>
-        </p:spPr>
-        <p:txBody>
-          <a:bodyPr wrap="square" lIns="0" tIns="0" rIns="0" bIns="0" rtlCol="0" anchor="ctr"/>
-          <a:lstStyle/>
-          <a:p>
-            <a:pPr indent="0" marL="0">
-              <a:buNone/>
-            </a:pPr>
-            <a:r>
-              <a:rPr lang="en-US" sz="1800" b="1" dirty="0">
-                <a:solidFill>
-                  <a:srgbClr val="1B2733"/>
-                </a:solidFill>
-                <a:latin typeface="Malgun Gothic" pitchFamily="34" charset="0"/>
-                <a:ea typeface="Malgun Gothic" pitchFamily="34" charset="-122"/>
-                <a:cs typeface="Malgun Gothic" pitchFamily="34" charset="-120"/>
-              </a:rPr>
-              <a:t>부지 단일 진단</a:t>
-            </a:r>
-            <a:endParaRPr lang="en-US" sz="1800" dirty="0"/>
-          </a:p>
-        </p:txBody>
-      </p:sp>
-      <p:sp>
-        <p:nvSpPr>
-          <p:cNvPr id="9" name="Text 7"/>
-          <p:cNvSpPr/>
-          <p:nvPr/>
-        </p:nvSpPr>
-        <p:spPr>
-          <a:xfrm>
-            <a:off x="822960" y="3611880"/>
-            <a:ext cx="2974848" cy="822960"/>
-          </a:xfrm>
-          <a:prstGeom prst="rect">
-            <a:avLst/>
-          </a:prstGeom>
-          <a:noFill/>
-          <a:ln/>
-        </p:spPr>
-        <p:txBody>
-          <a:bodyPr wrap="square" lIns="0" tIns="0" rIns="0" bIns="0" rtlCol="0" anchor="ctr"/>
-          <a:lstStyle/>
-          <a:p>
-            <a:pPr indent="0" marL="0">
-              <a:buNone/>
-            </a:pPr>
-            <a:r>
-              <a:rPr lang="en-US" sz="1250" dirty="0">
-                <a:solidFill>
-                  <a:srgbClr val="3C4A54"/>
-                </a:solidFill>
-                <a:latin typeface="Malgun Gothic" pitchFamily="34" charset="0"/>
-                <a:ea typeface="Malgun Gothic" pitchFamily="34" charset="-122"/>
-                <a:cs typeface="Malgun Gothic" pitchFamily="34" charset="-120"/>
-              </a:rPr>
-              <a:t>이 땅, 태양광 돼? 뭐가 걸려?</a:t>
-            </a:r>
-            <a:endParaRPr lang="en-US" sz="1250" dirty="0"/>
-          </a:p>
-        </p:txBody>
-      </p:sp>
-      <p:sp>
-        <p:nvSpPr>
-          <p:cNvPr id="10" name="Shape 8"/>
-          <p:cNvSpPr/>
-          <p:nvPr/>
-        </p:nvSpPr>
-        <p:spPr>
-          <a:xfrm>
-            <a:off x="4364736" y="1600200"/>
-            <a:ext cx="3432048" cy="3200400"/>
-          </a:xfrm>
-          <a:prstGeom prst="roundRect">
-            <a:avLst>
-              <a:gd name="adj" fmla="val 2286"/>
-            </a:avLst>
-          </a:prstGeom>
-          <a:solidFill>
-            <a:srgbClr val="FFFFFF"/>
-          </a:solidFill>
-          <a:ln w="15240">
-            <a:solidFill>
-              <a:srgbClr val="E4E9ED"/>
-            </a:solidFill>
-            <a:prstDash val="solid"/>
-          </a:ln>
-          <a:effectLst>
-            <a:outerShdw sx="100000" sy="100000" kx="0" ky="0" algn="bl" rotWithShape="0" blurRad="88900" dist="38100" dir="5400000">
-              <a:srgbClr val="9AA7B0">
-                <a:alpha val="18000"/>
-              </a:srgbClr>
-            </a:outerShdw>
-          </a:effectLst>
-        </p:spPr>
-      </p:sp>
-      <p:sp>
-        <p:nvSpPr>
-          <p:cNvPr id="11" name="Shape 9"/>
-          <p:cNvSpPr/>
-          <p:nvPr/>
-        </p:nvSpPr>
-        <p:spPr>
-          <a:xfrm>
-            <a:off x="4364736" y="1600200"/>
-            <a:ext cx="3432048" cy="109728"/>
-          </a:xfrm>
-          <a:prstGeom prst="rect">
-            <a:avLst/>
-          </a:prstGeom>
-          <a:solidFill>
-            <a:srgbClr val="0E7C86"/>
-          </a:solidFill>
-          <a:ln w="12700">
-            <a:solidFill>
-              <a:srgbClr val="0E7C86"/>
-            </a:solidFill>
-            <a:prstDash val="solid"/>
-          </a:ln>
-        </p:spPr>
-      </p:sp>
-      <p:sp>
-        <p:nvSpPr>
-          <p:cNvPr id="12" name="Text 10"/>
-          <p:cNvSpPr/>
-          <p:nvPr/>
-        </p:nvSpPr>
-        <p:spPr>
-          <a:xfrm>
-            <a:off x="4620768" y="1920240"/>
-            <a:ext cx="2974848" cy="365760"/>
-          </a:xfrm>
-          <a:prstGeom prst="rect">
-            <a:avLst/>
-          </a:prstGeom>
-          <a:noFill/>
-          <a:ln/>
-        </p:spPr>
-        <p:txBody>
-          <a:bodyPr wrap="square" lIns="0" tIns="0" rIns="0" bIns="0" rtlCol="0" anchor="ctr"/>
-          <a:lstStyle/>
-          <a:p>
-            <a:pPr indent="0" marL="0">
-              <a:buNone/>
-            </a:pPr>
-            <a:r>
-              <a:rPr lang="en-US" sz="1500" b="1" dirty="0">
-                <a:solidFill>
-                  <a:srgbClr val="0E7C86"/>
-                </a:solidFill>
-                <a:latin typeface="Malgun Gothic" pitchFamily="34" charset="0"/>
-                <a:ea typeface="Malgun Gothic" pitchFamily="34" charset="-122"/>
-                <a:cs typeface="Malgun Gothic" pitchFamily="34" charset="-120"/>
-              </a:rPr>
-              <a:t>시군구명 포함</a:t>
-            </a:r>
-            <a:endParaRPr lang="en-US" sz="1500" dirty="0"/>
-          </a:p>
-        </p:txBody>
-      </p:sp>
-      <p:sp>
-        <p:nvSpPr>
-          <p:cNvPr id="13" name="Text 11"/>
-          <p:cNvSpPr/>
-          <p:nvPr/>
-        </p:nvSpPr>
-        <p:spPr>
-          <a:xfrm>
-            <a:off x="4620768" y="2377440"/>
-            <a:ext cx="2974848" cy="548640"/>
-          </a:xfrm>
-          <a:prstGeom prst="rect">
-            <a:avLst/>
-          </a:prstGeom>
-          <a:noFill/>
-          <a:ln/>
-        </p:spPr>
-        <p:txBody>
-          <a:bodyPr wrap="square" lIns="0" tIns="0" rIns="0" bIns="0" rtlCol="0" anchor="ctr"/>
-          <a:lstStyle/>
-          <a:p>
-            <a:pPr indent="0" marL="0">
-              <a:buNone/>
-            </a:pPr>
-            <a:r>
-              <a:rPr lang="en-US" sz="1200" i="1" dirty="0">
-                <a:solidFill>
-                  <a:srgbClr val="8B98A3"/>
-                </a:solidFill>
-                <a:latin typeface="Malgun Gothic" pitchFamily="34" charset="0"/>
-                <a:ea typeface="Malgun Gothic" pitchFamily="34" charset="-122"/>
-                <a:cs typeface="Malgun Gothic" pitchFamily="34" charset="-120"/>
-              </a:rPr>
-              <a:t>예) 당진에 변전소 여유 있어?</a:t>
-            </a:r>
-            <a:endParaRPr lang="en-US" sz="1200" dirty="0"/>
-          </a:p>
-        </p:txBody>
-      </p:sp>
-      <p:sp>
-        <p:nvSpPr>
-          <p:cNvPr id="14" name="Text 12"/>
-          <p:cNvSpPr/>
-          <p:nvPr/>
-        </p:nvSpPr>
-        <p:spPr>
-          <a:xfrm>
-            <a:off x="4620768" y="3063240"/>
-            <a:ext cx="2974848" cy="457200"/>
-          </a:xfrm>
-          <a:prstGeom prst="rect">
-            <a:avLst/>
-          </a:prstGeom>
-          <a:noFill/>
-          <a:ln/>
-        </p:spPr>
-        <p:txBody>
-          <a:bodyPr wrap="square" lIns="0" tIns="0" rIns="0" bIns="0" rtlCol="0" anchor="ctr"/>
-          <a:lstStyle/>
-          <a:p>
-            <a:pPr indent="0" marL="0">
-              <a:buNone/>
-            </a:pPr>
-            <a:r>
-              <a:rPr lang="en-US" sz="1800" b="1" dirty="0">
-                <a:solidFill>
-                  <a:srgbClr val="1B2733"/>
-                </a:solidFill>
-                <a:latin typeface="Malgun Gothic" pitchFamily="34" charset="0"/>
-                <a:ea typeface="Malgun Gothic" pitchFamily="34" charset="-122"/>
-                <a:cs typeface="Malgun Gothic" pitchFamily="34" charset="-120"/>
-              </a:rPr>
-              <a:t>지역 단위 진단</a:t>
-            </a:r>
-            <a:endParaRPr lang="en-US" sz="1800" dirty="0"/>
-          </a:p>
-        </p:txBody>
-      </p:sp>
-      <p:sp>
-        <p:nvSpPr>
-          <p:cNvPr id="15" name="Text 13"/>
-          <p:cNvSpPr/>
-          <p:nvPr/>
-        </p:nvSpPr>
-        <p:spPr>
-          <a:xfrm>
-            <a:off x="4620768" y="3611880"/>
-            <a:ext cx="2974848" cy="822960"/>
-          </a:xfrm>
-          <a:prstGeom prst="rect">
-            <a:avLst/>
-          </a:prstGeom>
-          <a:noFill/>
-          <a:ln/>
-        </p:spPr>
-        <p:txBody>
-          <a:bodyPr wrap="square" lIns="0" tIns="0" rIns="0" bIns="0" rtlCol="0" anchor="ctr"/>
-          <a:lstStyle/>
-          <a:p>
-            <a:pPr indent="0" marL="0">
-              <a:buNone/>
-            </a:pPr>
-            <a:r>
-              <a:rPr lang="en-US" sz="1250" dirty="0">
-                <a:solidFill>
-                  <a:srgbClr val="3C4A54"/>
-                </a:solidFill>
-                <a:latin typeface="Malgun Gothic" pitchFamily="34" charset="0"/>
-                <a:ea typeface="Malgun Gothic" pitchFamily="34" charset="-122"/>
-                <a:cs typeface="Malgun Gothic" pitchFamily="34" charset="-120"/>
-              </a:rPr>
-              <a:t>이 지역 규제·계통·지원은?</a:t>
-            </a:r>
-            <a:endParaRPr lang="en-US" sz="1250" dirty="0"/>
-          </a:p>
-        </p:txBody>
-      </p:sp>
-      <p:sp>
-        <p:nvSpPr>
-          <p:cNvPr id="16" name="Shape 14"/>
-          <p:cNvSpPr/>
-          <p:nvPr/>
-        </p:nvSpPr>
-        <p:spPr>
-          <a:xfrm>
-            <a:off x="8162544" y="1600200"/>
-            <a:ext cx="3432048" cy="3200400"/>
-          </a:xfrm>
-          <a:prstGeom prst="roundRect">
-            <a:avLst>
-              <a:gd name="adj" fmla="val 2286"/>
-            </a:avLst>
-          </a:prstGeom>
-          <a:solidFill>
-            <a:srgbClr val="FFFFFF"/>
-          </a:solidFill>
-          <a:ln w="15240">
-            <a:solidFill>
-              <a:srgbClr val="E4E9ED"/>
-            </a:solidFill>
-            <a:prstDash val="solid"/>
-          </a:ln>
-          <a:effectLst>
-            <a:outerShdw sx="100000" sy="100000" kx="0" ky="0" algn="bl" rotWithShape="0" blurRad="88900" dist="38100" dir="5400000">
-              <a:srgbClr val="9AA7B0">
-                <a:alpha val="18000"/>
-              </a:srgbClr>
-            </a:outerShdw>
-          </a:effectLst>
-        </p:spPr>
-      </p:sp>
-      <p:sp>
-        <p:nvSpPr>
-          <p:cNvPr id="17" name="Shape 15"/>
-          <p:cNvSpPr/>
-          <p:nvPr/>
-        </p:nvSpPr>
-        <p:spPr>
-          <a:xfrm>
-            <a:off x="8162544" y="1600200"/>
-            <a:ext cx="3432048" cy="109728"/>
-          </a:xfrm>
-          <a:prstGeom prst="rect">
-            <a:avLst/>
-          </a:prstGeom>
-          <a:solidFill>
-            <a:srgbClr val="0E7C86"/>
-          </a:solidFill>
-          <a:ln w="12700">
-            <a:solidFill>
-              <a:srgbClr val="0E7C86"/>
-            </a:solidFill>
-            <a:prstDash val="solid"/>
-          </a:ln>
-        </p:spPr>
-      </p:sp>
-      <p:sp>
-        <p:nvSpPr>
-          <p:cNvPr id="18" name="Text 16"/>
-          <p:cNvSpPr/>
-          <p:nvPr/>
-        </p:nvSpPr>
-        <p:spPr>
-          <a:xfrm>
-            <a:off x="8418576" y="1920240"/>
-            <a:ext cx="2974848" cy="365760"/>
-          </a:xfrm>
-          <a:prstGeom prst="rect">
-            <a:avLst/>
-          </a:prstGeom>
-          <a:noFill/>
-          <a:ln/>
-        </p:spPr>
-        <p:txBody>
-          <a:bodyPr wrap="square" lIns="0" tIns="0" rIns="0" bIns="0" rtlCol="0" anchor="ctr"/>
-          <a:lstStyle/>
-          <a:p>
-            <a:pPr indent="0" marL="0">
-              <a:buNone/>
-            </a:pPr>
-            <a:r>
-              <a:rPr lang="en-US" sz="1500" b="1" dirty="0">
-                <a:solidFill>
-                  <a:srgbClr val="0E7C86"/>
-                </a:solidFill>
-                <a:latin typeface="Malgun Gothic" pitchFamily="34" charset="0"/>
-                <a:ea typeface="Malgun Gothic" pitchFamily="34" charset="-122"/>
-                <a:cs typeface="Malgun Gothic" pitchFamily="34" charset="-120"/>
-              </a:rPr>
-              <a:t>일반 질문</a:t>
-            </a:r>
-            <a:endParaRPr lang="en-US" sz="1500" dirty="0"/>
-          </a:p>
-        </p:txBody>
-      </p:sp>
-      <p:sp>
-        <p:nvSpPr>
-          <p:cNvPr id="19" name="Text 17"/>
-          <p:cNvSpPr/>
-          <p:nvPr/>
-        </p:nvSpPr>
-        <p:spPr>
-          <a:xfrm>
-            <a:off x="8418576" y="2377440"/>
-            <a:ext cx="2974848" cy="548640"/>
-          </a:xfrm>
-          <a:prstGeom prst="rect">
-            <a:avLst/>
-          </a:prstGeom>
-          <a:noFill/>
-          <a:ln/>
-        </p:spPr>
-        <p:txBody>
-          <a:bodyPr wrap="square" lIns="0" tIns="0" rIns="0" bIns="0" rtlCol="0" anchor="ctr"/>
-          <a:lstStyle/>
-          <a:p>
-            <a:pPr indent="0" marL="0">
-              <a:buNone/>
-            </a:pPr>
-            <a:r>
-              <a:rPr lang="en-US" sz="1200" i="1" dirty="0">
-                <a:solidFill>
-                  <a:srgbClr val="8B98A3"/>
-                </a:solidFill>
-                <a:latin typeface="Malgun Gothic" pitchFamily="34" charset="0"/>
-                <a:ea typeface="Malgun Gothic" pitchFamily="34" charset="-122"/>
-                <a:cs typeface="Malgun Gothic" pitchFamily="34" charset="-120"/>
-              </a:rPr>
-              <a:t>예) 충남에서 좋은 곳 추천해줘</a:t>
-            </a:r>
-            <a:endParaRPr lang="en-US" sz="1200" dirty="0"/>
-          </a:p>
-        </p:txBody>
-      </p:sp>
-      <p:sp>
-        <p:nvSpPr>
-          <p:cNvPr id="20" name="Text 18"/>
-          <p:cNvSpPr/>
-          <p:nvPr/>
-        </p:nvSpPr>
-        <p:spPr>
-          <a:xfrm>
-            <a:off x="8418576" y="3063240"/>
-            <a:ext cx="2974848" cy="457200"/>
-          </a:xfrm>
-          <a:prstGeom prst="rect">
-            <a:avLst/>
-          </a:prstGeom>
-          <a:noFill/>
-          <a:ln/>
-        </p:spPr>
-        <p:txBody>
-          <a:bodyPr wrap="square" lIns="0" tIns="0" rIns="0" bIns="0" rtlCol="0" anchor="ctr"/>
-          <a:lstStyle/>
-          <a:p>
-            <a:pPr indent="0" marL="0">
-              <a:buNone/>
-            </a:pPr>
-            <a:r>
-              <a:rPr lang="en-US" sz="1800" b="1" dirty="0">
-                <a:solidFill>
-                  <a:srgbClr val="1B2733"/>
-                </a:solidFill>
-                <a:latin typeface="Malgun Gothic" pitchFamily="34" charset="0"/>
-                <a:ea typeface="Malgun Gothic" pitchFamily="34" charset="-122"/>
-                <a:cs typeface="Malgun Gothic" pitchFamily="34" charset="-120"/>
-              </a:rPr>
-              <a:t>추천 리스트</a:t>
-            </a:r>
-            <a:endParaRPr lang="en-US" sz="1800" dirty="0"/>
-          </a:p>
-        </p:txBody>
-      </p:sp>
-      <p:sp>
-        <p:nvSpPr>
-          <p:cNvPr id="21" name="Text 19"/>
-          <p:cNvSpPr/>
-          <p:nvPr/>
-        </p:nvSpPr>
-        <p:spPr>
-          <a:xfrm>
-            <a:off x="8418576" y="3611880"/>
-            <a:ext cx="2974848" cy="822960"/>
-          </a:xfrm>
-          <a:prstGeom prst="rect">
-            <a:avLst/>
-          </a:prstGeom>
-          <a:noFill/>
-          <a:ln/>
-        </p:spPr>
-        <p:txBody>
-          <a:bodyPr wrap="square" lIns="0" tIns="0" rIns="0" bIns="0" rtlCol="0" anchor="ctr"/>
-          <a:lstStyle/>
-          <a:p>
-            <a:pPr indent="0" marL="0">
-              <a:buNone/>
-            </a:pPr>
-            <a:r>
-              <a:rPr lang="en-US" sz="1250" dirty="0">
-                <a:solidFill>
-                  <a:srgbClr val="3C4A54"/>
-                </a:solidFill>
-                <a:latin typeface="Malgun Gothic" pitchFamily="34" charset="0"/>
-                <a:ea typeface="Malgun Gothic" pitchFamily="34" charset="-122"/>
-                <a:cs typeface="Malgun Gothic" pitchFamily="34" charset="-120"/>
-              </a:rPr>
-              <a:t>충남 어디가 제일 좋아?</a:t>
-            </a:r>
-            <a:endParaRPr lang="en-US" sz="1250" dirty="0"/>
-          </a:p>
-        </p:txBody>
-      </p:sp>
-      <p:sp>
-        <p:nvSpPr>
-          <p:cNvPr id="22" name="Text 20"/>
-          <p:cNvSpPr/>
-          <p:nvPr/>
-        </p:nvSpPr>
-        <p:spPr>
-          <a:xfrm>
-            <a:off x="566928" y="5120640"/>
-            <a:ext cx="11027664" cy="457200"/>
-          </a:xfrm>
-          <a:prstGeom prst="rect">
-            <a:avLst/>
-          </a:prstGeom>
-          <a:noFill/>
-          <a:ln/>
-        </p:spPr>
-        <p:txBody>
-          <a:bodyPr wrap="square" lIns="0" tIns="0" rIns="0" bIns="0" rtlCol="0" anchor="ctr"/>
-          <a:lstStyle/>
-          <a:p>
-            <a:pPr algn="ctr" indent="0" marL="0">
-              <a:buNone/>
-            </a:pPr>
-            <a:r>
-              <a:rPr lang="en-US" sz="1400" b="1" dirty="0">
-                <a:solidFill>
-                  <a:srgbClr val="1B2733"/>
-                </a:solidFill>
-                <a:latin typeface="Malgun Gothic" pitchFamily="34" charset="0"/>
-                <a:ea typeface="Malgun Gothic" pitchFamily="34" charset="-122"/>
-                <a:cs typeface="Malgun Gothic" pitchFamily="34" charset="-120"/>
-              </a:rPr>
-              <a:t>흩어진 공공데이터를 한 부지 기준으로 모아 자동 종합합니다.</a:t>
-            </a:r>
-            <a:endParaRPr lang="en-US" sz="1400" dirty="0"/>
-          </a:p>
-        </p:txBody>
-      </p:sp>
-      <p:sp>
-        <p:nvSpPr>
-          <p:cNvPr id="24" name="Shape 21"/>
-          <p:cNvSpPr/>
-          <p:nvPr/>
-        </p:nvSpPr>
-        <p:spPr>
-          <a:xfrm>
-            <a:off x="566928" y="6455664"/>
-            <a:ext cx="11027664" cy="0"/>
-          </a:xfrm>
-          <a:prstGeom prst="line">
-            <a:avLst/>
-          </a:prstGeom>
-          <a:noFill/>
-          <a:ln w="12700">
-            <a:solidFill>
-              <a:srgbClr val="E4E9ED"/>
-            </a:solidFill>
-            <a:prstDash val="solid"/>
-          </a:ln>
-        </p:spPr>
-      </p:sp>
-      <p:sp>
-        <p:nvSpPr>
-          <p:cNvPr id="25" name="Text 22"/>
-          <p:cNvSpPr/>
-          <p:nvPr/>
-        </p:nvSpPr>
-        <p:spPr>
-          <a:xfrm>
-            <a:off x="566928" y="6492240"/>
-            <a:ext cx="5486400" cy="274320"/>
-          </a:xfrm>
-          <a:prstGeom prst="rect">
-            <a:avLst/>
-          </a:prstGeom>
-          <a:noFill/>
-          <a:ln/>
-        </p:spPr>
-        <p:txBody>
-          <a:bodyPr wrap="square" lIns="0" tIns="0" rIns="0" bIns="0" rtlCol="0" anchor="ctr"/>
-          <a:lstStyle/>
-          <a:p>
-            <a:pPr algn="l" indent="0" marL="0">
-              <a:buNone/>
-            </a:pPr>
-            <a:r>
-              <a:rPr lang="en-US" sz="900" dirty="0">
-                <a:solidFill>
-                  <a:srgbClr val="8B98A3"/>
-                </a:solidFill>
-                <a:latin typeface="Malgun Gothic" pitchFamily="34" charset="0"/>
-                <a:ea typeface="Malgun Gothic" pitchFamily="34" charset="-122"/>
-                <a:cs typeface="Malgun Gothic" pitchFamily="34" charset="-120"/>
-              </a:rPr>
-              <a:t>SolarFit · 화면 데이터 설명서</a:t>
-            </a:r>
-            <a:endParaRPr lang="en-US" sz="900" dirty="0"/>
-          </a:p>
-        </p:txBody>
-      </p:sp>
-      <p:sp>
-        <p:nvSpPr>
-          <p:cNvPr id="26" name="Text 23"/>
-          <p:cNvSpPr/>
-          <p:nvPr/>
-        </p:nvSpPr>
-        <p:spPr>
-          <a:xfrm>
-            <a:off x="11045952" y="6492240"/>
-            <a:ext cx="548640" cy="274320"/>
-          </a:xfrm>
-          <a:prstGeom prst="rect">
-            <a:avLst/>
-          </a:prstGeom>
-          <a:noFill/>
-          <a:ln/>
-        </p:spPr>
-        <p:txBody>
-          <a:bodyPr wrap="square" lIns="0" tIns="0" rIns="0" bIns="0" rtlCol="0" anchor="ctr"/>
-          <a:lstStyle/>
-          <a:p>
-            <a:pPr algn="r" indent="0" marL="0">
-              <a:buNone/>
-            </a:pPr>
-            <a:r>
-              <a:rPr lang="en-US" sz="900" dirty="0">
-                <a:solidFill>
-                  <a:srgbClr val="8B98A3"/>
-                </a:solidFill>
-                <a:latin typeface="Malgun Gothic" pitchFamily="34" charset="0"/>
-                <a:ea typeface="Malgun Gothic" pitchFamily="34" charset="-122"/>
-                <a:cs typeface="Malgun Gothic" pitchFamily="34" charset="-120"/>
-              </a:rPr>
-              <a:t>2</a:t>
-            </a:r>
-            <a:endParaRPr lang="en-US" sz="900" dirty="0"/>
-          </a:p>
-        </p:txBody>
-      </p:sp>
-    </p:spTree>
-  </p:cSld>
-  <p:clrMapOvr>
-    <a:masterClrMapping/>
-  </p:clrMapOvr>
-</p:sld>
-</file>
-
-<file path=ppt/slides/slide3.xml><?xml version="1.0" encoding="utf-8"?>
-<p:sld xmlns:a="http://schemas.openxmlformats.org/drawingml/2006/main" xmlns:r="http://schemas.openxmlformats.org/officeDocument/2006/relationships" xmlns:p="http://schemas.openxmlformats.org/presentationml/2006/main">
-  <p:cSld name="Slide 3">
-    <p:bg>
-      <p:bgPr>
-        <a:solidFill>
-          <a:srgbClr val="FFFFFF"/>
-        </a:solidFill>
-      </p:bgPr>
-    </p:bg>
-    <p:spTree>
-      <p:nvGrpSpPr>
-        <p:cNvPr id="1" name=""/>
-        <p:cNvGrpSpPr/>
-        <p:nvPr/>
-      </p:nvGrpSpPr>
-      <p:grpSpPr>
-        <a:xfrm>
-          <a:off x="0" y="0"/>
-          <a:ext cx="0" cy="0"/>
-          <a:chOff x="0" y="0"/>
-          <a:chExt cx="0" cy="0"/>
-        </a:xfrm>
-      </p:grpSpPr>
-      <p:sp>
-        <p:nvSpPr>
-          <p:cNvPr id="2" name="Text 0"/>
-          <p:cNvSpPr/>
-          <p:nvPr/>
-        </p:nvSpPr>
-        <p:spPr>
-          <a:xfrm>
-            <a:off x="566928" y="384048"/>
-            <a:ext cx="11027664" cy="274320"/>
-          </a:xfrm>
-          <a:prstGeom prst="rect">
-            <a:avLst/>
-          </a:prstGeom>
-          <a:noFill/>
-          <a:ln/>
-        </p:spPr>
-        <p:txBody>
-          <a:bodyPr wrap="square" lIns="0" tIns="0" rIns="0" bIns="0" rtlCol="0" anchor="ctr"/>
-          <a:lstStyle/>
-          <a:p>
-            <a:pPr indent="0" marL="0">
-              <a:buNone/>
-            </a:pPr>
-            <a:r>
-              <a:rPr lang="en-US" sz="1200" b="1" spc="200" kern="0" dirty="0">
-                <a:solidFill>
-                  <a:srgbClr val="0E7C86"/>
-                </a:solidFill>
-                <a:latin typeface="Malgun Gothic" pitchFamily="34" charset="0"/>
-                <a:ea typeface="Malgun Gothic" pitchFamily="34" charset="-122"/>
-                <a:cs typeface="Malgun Gothic" pitchFamily="34" charset="-120"/>
-              </a:rPr>
-              <a:t>데이터 출처</a:t>
-            </a:r>
-            <a:endParaRPr lang="en-US" sz="1200" dirty="0"/>
-          </a:p>
-        </p:txBody>
-      </p:sp>
-      <p:sp>
-        <p:nvSpPr>
-          <p:cNvPr id="3" name="Text 1"/>
-          <p:cNvSpPr/>
-          <p:nvPr/>
-        </p:nvSpPr>
-        <p:spPr>
-          <a:xfrm>
-            <a:off x="566928" y="658368"/>
-            <a:ext cx="11027664" cy="640080"/>
-          </a:xfrm>
-          <a:prstGeom prst="rect">
-            <a:avLst/>
-          </a:prstGeom>
-          <a:noFill/>
-          <a:ln/>
-        </p:spPr>
-        <p:txBody>
-          <a:bodyPr wrap="square" lIns="0" tIns="0" rIns="0" bIns="0" rtlCol="0" anchor="ctr"/>
-          <a:lstStyle/>
-          <a:p>
-            <a:pPr indent="0" marL="0">
+            <a:pPr marL="0" indent="0">
               <a:buNone/>
             </a:pPr>
             <a:r>
@@ -6801,16 +6353,34 @@
         </p:nvGraphicFramePr>
         <p:xfrm>
           <a:off x="566928" y="1554480"/>
-          <a:ext cx="11027664" cy="914400"/>
+          <a:ext cx="11027664" cy="3364992"/>
         </p:xfrm>
         <a:graphic>
           <a:graphicData uri="http://schemas.openxmlformats.org/drawingml/2006/table">
             <a:tbl>
               <a:tblPr/>
               <a:tblGrid>
-                <a:gridCol w="3931920"/>
-                <a:gridCol w="3657600"/>
-                <a:gridCol w="3438144"/>
+                <a:gridCol w="3931920">
+                  <a:extLst>
+                    <a:ext uri="{9D8B030D-6E8A-4147-A177-3AD203B41FA5}">
+                      <a16:colId xmlns:a16="http://schemas.microsoft.com/office/drawing/2014/main" val="20000"/>
+                    </a:ext>
+                  </a:extLst>
+                </a:gridCol>
+                <a:gridCol w="3657600">
+                  <a:extLst>
+                    <a:ext uri="{9D8B030D-6E8A-4147-A177-3AD203B41FA5}">
+                      <a16:colId xmlns:a16="http://schemas.microsoft.com/office/drawing/2014/main" val="20001"/>
+                    </a:ext>
+                  </a:extLst>
+                </a:gridCol>
+                <a:gridCol w="3438144">
+                  <a:extLst>
+                    <a:ext uri="{9D8B030D-6E8A-4147-A177-3AD203B41FA5}">
+                      <a16:colId xmlns:a16="http://schemas.microsoft.com/office/drawing/2014/main" val="20002"/>
+                    </a:ext>
+                  </a:extLst>
+                </a:gridCol>
               </a:tblGrid>
               <a:tr h="420624">
                 <a:tc>
@@ -6818,7 +6388,7 @@
                     <a:bodyPr/>
                     <a:lstStyle/>
                     <a:p>
-                      <a:pPr algn="l" indent="0" marL="0">
+                      <a:pPr marL="0" indent="0" algn="l">
                         <a:buNone/>
                       </a:pPr>
                       <a:r>
@@ -6886,7 +6456,7 @@
                     <a:bodyPr/>
                     <a:lstStyle/>
                     <a:p>
-                      <a:pPr algn="l" indent="0" marL="0">
+                      <a:pPr marL="0" indent="0" algn="l">
                         <a:buNone/>
                       </a:pPr>
                       <a:r>
@@ -6954,7 +6524,7 @@
                     <a:bodyPr/>
                     <a:lstStyle/>
                     <a:p>
-                      <a:pPr algn="l" indent="0" marL="0">
+                      <a:pPr marL="0" indent="0" algn="l">
                         <a:buNone/>
                       </a:pPr>
                       <a:r>
@@ -7017,6 +6587,11 @@
                     </a:solidFill>
                   </a:tcPr>
                 </a:tc>
+                <a:extLst>
+                  <a:ext uri="{0D108BD9-81ED-4DB2-BD59-A6C34878D82A}">
+                    <a16:rowId xmlns:a16="http://schemas.microsoft.com/office/drawing/2014/main" val="10000"/>
+                  </a:ext>
+                </a:extLst>
               </a:tr>
               <a:tr h="420624">
                 <a:tc>
@@ -7024,7 +6599,7 @@
                     <a:bodyPr/>
                     <a:lstStyle/>
                     <a:p>
-                      <a:pPr algn="l" indent="0" marL="0">
+                      <a:pPr marL="0" indent="0" algn="l">
                         <a:buNone/>
                       </a:pPr>
                       <a:r>
@@ -7092,7 +6667,7 @@
                     <a:bodyPr/>
                     <a:lstStyle/>
                     <a:p>
-                      <a:pPr algn="l" indent="0" marL="0">
+                      <a:pPr marL="0" indent="0" algn="l">
                         <a:buNone/>
                       </a:pPr>
                       <a:r>
@@ -7160,7 +6735,7 @@
                     <a:bodyPr/>
                     <a:lstStyle/>
                     <a:p>
-                      <a:pPr algn="l" indent="0" marL="0">
+                      <a:pPr marL="0" indent="0" algn="l">
                         <a:buNone/>
                       </a:pPr>
                       <a:r>
@@ -7223,6 +6798,11 @@
                     </a:solidFill>
                   </a:tcPr>
                 </a:tc>
+                <a:extLst>
+                  <a:ext uri="{0D108BD9-81ED-4DB2-BD59-A6C34878D82A}">
+                    <a16:rowId xmlns:a16="http://schemas.microsoft.com/office/drawing/2014/main" val="10001"/>
+                  </a:ext>
+                </a:extLst>
               </a:tr>
               <a:tr h="420624">
                 <a:tc>
@@ -7230,7 +6810,7 @@
                     <a:bodyPr/>
                     <a:lstStyle/>
                     <a:p>
-                      <a:pPr algn="l" indent="0" marL="0">
+                      <a:pPr marL="0" indent="0" algn="l">
                         <a:buNone/>
                       </a:pPr>
                       <a:r>
@@ -7298,7 +6878,7 @@
                     <a:bodyPr/>
                     <a:lstStyle/>
                     <a:p>
-                      <a:pPr algn="l" indent="0" marL="0">
+                      <a:pPr marL="0" indent="0" algn="l">
                         <a:buNone/>
                       </a:pPr>
                       <a:r>
@@ -7366,7 +6946,7 @@
                     <a:bodyPr/>
                     <a:lstStyle/>
                     <a:p>
-                      <a:pPr algn="l" indent="0" marL="0">
+                      <a:pPr marL="0" indent="0" algn="l">
                         <a:buNone/>
                       </a:pPr>
                       <a:r>
@@ -7429,6 +7009,11 @@
                     </a:solidFill>
                   </a:tcPr>
                 </a:tc>
+                <a:extLst>
+                  <a:ext uri="{0D108BD9-81ED-4DB2-BD59-A6C34878D82A}">
+                    <a16:rowId xmlns:a16="http://schemas.microsoft.com/office/drawing/2014/main" val="10002"/>
+                  </a:ext>
+                </a:extLst>
               </a:tr>
               <a:tr h="420624">
                 <a:tc>
@@ -7436,7 +7021,7 @@
                     <a:bodyPr/>
                     <a:lstStyle/>
                     <a:p>
-                      <a:pPr algn="l" indent="0" marL="0">
+                      <a:pPr marL="0" indent="0" algn="l">
                         <a:buNone/>
                       </a:pPr>
                       <a:r>
@@ -7504,7 +7089,7 @@
                     <a:bodyPr/>
                     <a:lstStyle/>
                     <a:p>
-                      <a:pPr algn="l" indent="0" marL="0">
+                      <a:pPr marL="0" indent="0" algn="l">
                         <a:buNone/>
                       </a:pPr>
                       <a:r>
@@ -7572,7 +7157,7 @@
                     <a:bodyPr/>
                     <a:lstStyle/>
                     <a:p>
-                      <a:pPr algn="l" indent="0" marL="0">
+                      <a:pPr marL="0" indent="0" algn="l">
                         <a:buNone/>
                       </a:pPr>
                       <a:r>
@@ -7635,6 +7220,11 @@
                     </a:solidFill>
                   </a:tcPr>
                 </a:tc>
+                <a:extLst>
+                  <a:ext uri="{0D108BD9-81ED-4DB2-BD59-A6C34878D82A}">
+                    <a16:rowId xmlns:a16="http://schemas.microsoft.com/office/drawing/2014/main" val="10003"/>
+                  </a:ext>
+                </a:extLst>
               </a:tr>
               <a:tr h="420624">
                 <a:tc>
@@ -7642,7 +7232,7 @@
                     <a:bodyPr/>
                     <a:lstStyle/>
                     <a:p>
-                      <a:pPr algn="l" indent="0" marL="0">
+                      <a:pPr marL="0" indent="0" algn="l">
                         <a:buNone/>
                       </a:pPr>
                       <a:r>
@@ -7710,7 +7300,7 @@
                     <a:bodyPr/>
                     <a:lstStyle/>
                     <a:p>
-                      <a:pPr algn="l" indent="0" marL="0">
+                      <a:pPr marL="0" indent="0" algn="l">
                         <a:buNone/>
                       </a:pPr>
                       <a:r>
@@ -7778,7 +7368,7 @@
                     <a:bodyPr/>
                     <a:lstStyle/>
                     <a:p>
-                      <a:pPr algn="l" indent="0" marL="0">
+                      <a:pPr marL="0" indent="0" algn="l">
                         <a:buNone/>
                       </a:pPr>
                       <a:r>
@@ -7841,6 +7431,11 @@
                     </a:solidFill>
                   </a:tcPr>
                 </a:tc>
+                <a:extLst>
+                  <a:ext uri="{0D108BD9-81ED-4DB2-BD59-A6C34878D82A}">
+                    <a16:rowId xmlns:a16="http://schemas.microsoft.com/office/drawing/2014/main" val="10004"/>
+                  </a:ext>
+                </a:extLst>
               </a:tr>
               <a:tr h="420624">
                 <a:tc>
@@ -7848,7 +7443,7 @@
                     <a:bodyPr/>
                     <a:lstStyle/>
                     <a:p>
-                      <a:pPr algn="l" indent="0" marL="0">
+                      <a:pPr marL="0" indent="0" algn="l">
                         <a:buNone/>
                       </a:pPr>
                       <a:r>
@@ -7916,7 +7511,7 @@
                     <a:bodyPr/>
                     <a:lstStyle/>
                     <a:p>
-                      <a:pPr algn="l" indent="0" marL="0">
+                      <a:pPr marL="0" indent="0" algn="l">
                         <a:buNone/>
                       </a:pPr>
                       <a:r>
@@ -7984,7 +7579,7 @@
                     <a:bodyPr/>
                     <a:lstStyle/>
                     <a:p>
-                      <a:pPr algn="l" indent="0" marL="0">
+                      <a:pPr marL="0" indent="0" algn="l">
                         <a:buNone/>
                       </a:pPr>
                       <a:r>
@@ -8047,6 +7642,11 @@
                     </a:solidFill>
                   </a:tcPr>
                 </a:tc>
+                <a:extLst>
+                  <a:ext uri="{0D108BD9-81ED-4DB2-BD59-A6C34878D82A}">
+                    <a16:rowId xmlns:a16="http://schemas.microsoft.com/office/drawing/2014/main" val="10005"/>
+                  </a:ext>
+                </a:extLst>
               </a:tr>
               <a:tr h="420624">
                 <a:tc>
@@ -8054,7 +7654,7 @@
                     <a:bodyPr/>
                     <a:lstStyle/>
                     <a:p>
-                      <a:pPr algn="l" indent="0" marL="0">
+                      <a:pPr marL="0" indent="0" algn="l">
                         <a:buNone/>
                       </a:pPr>
                       <a:r>
@@ -8122,7 +7722,7 @@
                     <a:bodyPr/>
                     <a:lstStyle/>
                     <a:p>
-                      <a:pPr algn="l" indent="0" marL="0">
+                      <a:pPr marL="0" indent="0" algn="l">
                         <a:buNone/>
                       </a:pPr>
                       <a:r>
@@ -8190,7 +7790,7 @@
                     <a:bodyPr/>
                     <a:lstStyle/>
                     <a:p>
-                      <a:pPr algn="l" indent="0" marL="0">
+                      <a:pPr marL="0" indent="0" algn="l">
                         <a:buNone/>
                       </a:pPr>
                       <a:r>
@@ -8253,6 +7853,11 @@
                     </a:solidFill>
                   </a:tcPr>
                 </a:tc>
+                <a:extLst>
+                  <a:ext uri="{0D108BD9-81ED-4DB2-BD59-A6C34878D82A}">
+                    <a16:rowId xmlns:a16="http://schemas.microsoft.com/office/drawing/2014/main" val="10006"/>
+                  </a:ext>
+                </a:extLst>
               </a:tr>
               <a:tr h="420624">
                 <a:tc>
@@ -8260,7 +7865,7 @@
                     <a:bodyPr/>
                     <a:lstStyle/>
                     <a:p>
-                      <a:pPr algn="l" indent="0" marL="0">
+                      <a:pPr marL="0" indent="0" algn="l">
                         <a:buNone/>
                       </a:pPr>
                       <a:r>
@@ -8328,7 +7933,7 @@
                     <a:bodyPr/>
                     <a:lstStyle/>
                     <a:p>
-                      <a:pPr algn="l" indent="0" marL="0">
+                      <a:pPr marL="0" indent="0" algn="l">
                         <a:buNone/>
                       </a:pPr>
                       <a:r>
@@ -8396,7 +8001,7 @@
                     <a:bodyPr/>
                     <a:lstStyle/>
                     <a:p>
-                      <a:pPr algn="l" indent="0" marL="0">
+                      <a:pPr marL="0" indent="0" algn="l">
                         <a:buNone/>
                       </a:pPr>
                       <a:r>
@@ -8459,6 +8064,11 @@
                     </a:solidFill>
                   </a:tcPr>
                 </a:tc>
+                <a:extLst>
+                  <a:ext uri="{0D108BD9-81ED-4DB2-BD59-A6C34878D82A}">
+                    <a16:rowId xmlns:a16="http://schemas.microsoft.com/office/drawing/2014/main" val="10007"/>
+                  </a:ext>
+                </a:extLst>
               </a:tr>
             </a:tbl>
           </a:graphicData>
@@ -8490,6 +8100,13 @@
             <a:prstDash val="solid"/>
           </a:ln>
         </p:spPr>
+        <p:txBody>
+          <a:bodyPr/>
+          <a:lstStyle/>
+          <a:p>
+            <a:endParaRPr lang="ko-KR" altLang="en-US"/>
+          </a:p>
+        </p:txBody>
       </p:sp>
       <p:sp>
         <p:nvSpPr>
@@ -8512,7 +8129,7 @@
           <a:bodyPr wrap="square" lIns="0" tIns="0" rIns="0" bIns="0" rtlCol="0" anchor="ctr"/>
           <a:lstStyle/>
           <a:p>
-            <a:pPr indent="0" marL="0">
+            <a:pPr marL="0" indent="0">
               <a:buNone/>
             </a:pPr>
             <a:r>
@@ -8526,9 +8143,6 @@
               </a:rPr>
               <a:t>AI 모델  </a:t>
             </a:r>
-            <a:pPr indent="0" marL="0">
-              <a:buNone/>
-            </a:pPr>
             <a:r>
               <a:rPr lang="en-US" sz="1250" dirty="0">
                 <a:solidFill>
@@ -8540,9 +8154,6 @@
               </a:rPr>
               <a:t>text-embedding-3-small (의미검색) · gpt-4o-mini (답변·종합판정)</a:t>
             </a:r>
-            <a:pPr indent="0" marL="0">
-              <a:buNone/>
-            </a:pPr>
             <a:r>
               <a:rPr lang="en-US" sz="1250" b="1" dirty="0">
                 <a:solidFill>
@@ -8552,7 +8163,29 @@
                 <a:ea typeface="Malgun Gothic" pitchFamily="34" charset="-122"/>
                 <a:cs typeface="Malgun Gothic" pitchFamily="34" charset="-120"/>
               </a:rPr>
-              <a:t>      AI는 검색·요약·판정만, 숫자는 전부 공공데이터 계산.</a:t>
+              <a:t>      AI는 검색·요약·판정만, </a:t>
+            </a:r>
+            <a:r>
+              <a:rPr lang="en-US" sz="1250" b="1">
+                <a:solidFill>
+                  <a:srgbClr val="1B2733"/>
+                </a:solidFill>
+                <a:latin typeface="Malgun Gothic" pitchFamily="34" charset="0"/>
+                <a:ea typeface="Malgun Gothic" pitchFamily="34" charset="-122"/>
+                <a:cs typeface="Malgun Gothic" pitchFamily="34" charset="-120"/>
+              </a:rPr>
+              <a:t>숫자는 공공데이터 </a:t>
+            </a:r>
+            <a:r>
+              <a:rPr lang="en-US" sz="1250" b="1" dirty="0">
+                <a:solidFill>
+                  <a:srgbClr val="1B2733"/>
+                </a:solidFill>
+                <a:latin typeface="Malgun Gothic" pitchFamily="34" charset="0"/>
+                <a:ea typeface="Malgun Gothic" pitchFamily="34" charset="-122"/>
+                <a:cs typeface="Malgun Gothic" pitchFamily="34" charset="-120"/>
+              </a:rPr>
+              <a:t>계산.</a:t>
             </a:r>
             <a:endParaRPr lang="en-US" sz="1250" dirty="0"/>
           </a:p>
@@ -8580,6 +8213,13 @@
             <a:prstDash val="solid"/>
           </a:ln>
         </p:spPr>
+        <p:txBody>
+          <a:bodyPr/>
+          <a:lstStyle/>
+          <a:p>
+            <a:endParaRPr lang="ko-KR" altLang="en-US"/>
+          </a:p>
+        </p:txBody>
       </p:sp>
       <p:sp>
         <p:nvSpPr>
@@ -8602,7 +8242,7 @@
           <a:bodyPr wrap="square" lIns="0" tIns="0" rIns="0" bIns="0" rtlCol="0" anchor="ctr"/>
           <a:lstStyle/>
           <a:p>
-            <a:pPr algn="l" indent="0" marL="0">
+            <a:pPr marL="0" indent="0" algn="l">
               <a:buNone/>
             </a:pPr>
             <a:r>
@@ -8641,7 +8281,7 @@
           <a:bodyPr wrap="square" lIns="0" tIns="0" rIns="0" bIns="0" rtlCol="0" anchor="ctr"/>
           <a:lstStyle/>
           <a:p>
-            <a:pPr algn="r" indent="0" marL="0">
+            <a:pPr marL="0" indent="0" algn="r">
               <a:buNone/>
             </a:pPr>
             <a:r>
@@ -8675,6 +8315,7 @@
         <a:solidFill>
           <a:srgbClr val="FFFFFF"/>
         </a:solidFill>
+        <a:effectLst/>
       </p:bgPr>
     </p:bg>
     <p:spTree>
@@ -8712,11 +8353,11 @@
           <a:bodyPr wrap="square" lIns="0" tIns="0" rIns="0" bIns="0" rtlCol="0" anchor="ctr"/>
           <a:lstStyle/>
           <a:p>
-            <a:pPr indent="0" marL="0">
-              <a:buNone/>
-            </a:pPr>
-            <a:r>
-              <a:rPr lang="en-US" sz="1200" b="1" spc="200" kern="0" dirty="0">
+            <a:pPr marL="0" indent="0">
+              <a:buNone/>
+            </a:pPr>
+            <a:r>
+              <a:rPr lang="en-US" sz="1200" b="1" kern="0" spc="200" dirty="0">
                 <a:solidFill>
                   <a:srgbClr val="0E7C86"/>
                 </a:solidFill>
@@ -8751,7 +8392,7 @@
           <a:bodyPr wrap="square" lIns="0" tIns="0" rIns="0" bIns="0" rtlCol="0" anchor="ctr"/>
           <a:lstStyle/>
           <a:p>
-            <a:pPr indent="0" marL="0">
+            <a:pPr marL="0" indent="0">
               <a:buNone/>
             </a:pPr>
             <a:r>
@@ -8771,14 +8412,14 @@
       </p:sp>
       <p:pic>
         <p:nvPicPr>
-          <p:cNvPr id="4" name="Image 0" descr="C:\Projects\SolarFit\docs\shots\01_site_good.png">    </p:cNvPr>
+          <p:cNvPr id="4" name="Image 0" descr="C:\Projects\SolarFit\docs\shots\01_site_good.png"/>
           <p:cNvPicPr>
             <a:picLocks noChangeAspect="1"/>
           </p:cNvPicPr>
           <p:nvPr/>
         </p:nvPicPr>
         <p:blipFill>
-          <a:blip r:embed="rId1"/>
+          <a:blip r:embed="rId3"/>
           <a:stretch>
             <a:fillRect/>
           </a:stretch>
@@ -8814,6 +8455,13 @@
             <a:prstDash val="solid"/>
           </a:ln>
         </p:spPr>
+        <p:txBody>
+          <a:bodyPr/>
+          <a:lstStyle/>
+          <a:p>
+            <a:endParaRPr lang="ko-KR" altLang="en-US"/>
+          </a:p>
+        </p:txBody>
       </p:sp>
       <p:sp>
         <p:nvSpPr>
@@ -8841,6 +8489,13 @@
             <a:prstDash val="solid"/>
           </a:ln>
         </p:spPr>
+        <p:txBody>
+          <a:bodyPr/>
+          <a:lstStyle/>
+          <a:p>
+            <a:endParaRPr lang="ko-KR" altLang="en-US"/>
+          </a:p>
+        </p:txBody>
       </p:sp>
       <p:sp>
         <p:nvSpPr>
@@ -8866,6 +8521,13 @@
             <a:prstDash val="solid"/>
           </a:ln>
         </p:spPr>
+        <p:txBody>
+          <a:bodyPr/>
+          <a:lstStyle/>
+          <a:p>
+            <a:endParaRPr lang="ko-KR" altLang="en-US"/>
+          </a:p>
+        </p:txBody>
       </p:sp>
       <p:sp>
         <p:nvSpPr>
@@ -8888,7 +8550,7 @@
           <a:bodyPr wrap="square" lIns="0" tIns="0" rIns="0" bIns="0" rtlCol="0" anchor="t"/>
           <a:lstStyle/>
           <a:p>
-            <a:pPr indent="0" marL="0">
+            <a:pPr marL="0" indent="0">
               <a:buNone/>
             </a:pPr>
             <a:r>
@@ -8927,7 +8589,7 @@
           <a:bodyPr wrap="square" lIns="0" tIns="0" rIns="0" bIns="0" rtlCol="0" anchor="t"/>
           <a:lstStyle/>
           <a:p>
-            <a:pPr indent="0" marL="0">
+            <a:pPr marL="0" indent="0">
               <a:lnSpc>
                 <a:spcPct val="103000"/>
               </a:lnSpc>
@@ -8950,7 +8612,7 @@
             <a:endParaRPr lang="en-US" sz="1100" dirty="0"/>
           </a:p>
           <a:p>
-            <a:pPr indent="0" marL="0">
+            <a:pPr marL="0" indent="0">
               <a:lnSpc>
                 <a:spcPct val="103000"/>
               </a:lnSpc>
@@ -9000,6 +8662,13 @@
             <a:prstDash val="solid"/>
           </a:ln>
         </p:spPr>
+        <p:txBody>
+          <a:bodyPr/>
+          <a:lstStyle/>
+          <a:p>
+            <a:endParaRPr lang="ko-KR" altLang="en-US"/>
+          </a:p>
+        </p:txBody>
       </p:sp>
       <p:sp>
         <p:nvSpPr>
@@ -9022,7 +8691,7 @@
           <a:bodyPr wrap="square" lIns="0" tIns="0" rIns="0" bIns="0" rtlCol="0" anchor="ctr"/>
           <a:lstStyle/>
           <a:p>
-            <a:pPr indent="0" marL="0">
+            <a:pPr marL="0" indent="0">
               <a:buNone/>
             </a:pPr>
             <a:r>
@@ -9036,9 +8705,6 @@
               </a:rPr>
               <a:t>출처  </a:t>
             </a:r>
-            <a:pPr indent="0" marL="0">
-              <a:buNone/>
-            </a:pPr>
             <a:r>
               <a:rPr lang="en-US" sz="950" dirty="0">
                 <a:solidFill>
@@ -9080,6 +8746,13 @@
             <a:prstDash val="solid"/>
           </a:ln>
         </p:spPr>
+        <p:txBody>
+          <a:bodyPr/>
+          <a:lstStyle/>
+          <a:p>
+            <a:endParaRPr lang="ko-KR" altLang="en-US"/>
+          </a:p>
+        </p:txBody>
       </p:sp>
       <p:sp>
         <p:nvSpPr>
@@ -9105,6 +8778,13 @@
             <a:prstDash val="solid"/>
           </a:ln>
         </p:spPr>
+        <p:txBody>
+          <a:bodyPr/>
+          <a:lstStyle/>
+          <a:p>
+            <a:endParaRPr lang="ko-KR" altLang="en-US"/>
+          </a:p>
+        </p:txBody>
       </p:sp>
       <p:sp>
         <p:nvSpPr>
@@ -9127,7 +8807,7 @@
           <a:bodyPr wrap="square" lIns="0" tIns="0" rIns="0" bIns="0" rtlCol="0" anchor="t"/>
           <a:lstStyle/>
           <a:p>
-            <a:pPr indent="0" marL="0">
+            <a:pPr marL="0" indent="0">
               <a:buNone/>
             </a:pPr>
             <a:r>
@@ -9166,7 +8846,7 @@
           <a:bodyPr wrap="square" lIns="0" tIns="0" rIns="0" bIns="0" rtlCol="0" anchor="t"/>
           <a:lstStyle/>
           <a:p>
-            <a:pPr indent="0" marL="0">
+            <a:pPr marL="0" indent="0">
               <a:lnSpc>
                 <a:spcPct val="103000"/>
               </a:lnSpc>
@@ -9189,7 +8869,7 @@
             <a:endParaRPr lang="en-US" sz="1100" dirty="0"/>
           </a:p>
           <a:p>
-            <a:pPr indent="0" marL="0">
+            <a:pPr marL="0" indent="0">
               <a:lnSpc>
                 <a:spcPct val="103000"/>
               </a:lnSpc>
@@ -9239,6 +8919,13 @@
             <a:prstDash val="solid"/>
           </a:ln>
         </p:spPr>
+        <p:txBody>
+          <a:bodyPr/>
+          <a:lstStyle/>
+          <a:p>
+            <a:endParaRPr lang="ko-KR" altLang="en-US"/>
+          </a:p>
+        </p:txBody>
       </p:sp>
       <p:sp>
         <p:nvSpPr>
@@ -9261,7 +8948,7 @@
           <a:bodyPr wrap="square" lIns="0" tIns="0" rIns="0" bIns="0" rtlCol="0" anchor="ctr"/>
           <a:lstStyle/>
           <a:p>
-            <a:pPr indent="0" marL="0">
+            <a:pPr marL="0" indent="0">
               <a:buNone/>
             </a:pPr>
             <a:r>
@@ -9275,9 +8962,6 @@
               </a:rPr>
               <a:t>출처  </a:t>
             </a:r>
-            <a:pPr indent="0" marL="0">
-              <a:buNone/>
-            </a:pPr>
             <a:r>
               <a:rPr lang="en-US" sz="950" dirty="0">
                 <a:solidFill>
@@ -9319,6 +9003,13 @@
             <a:prstDash val="solid"/>
           </a:ln>
         </p:spPr>
+        <p:txBody>
+          <a:bodyPr/>
+          <a:lstStyle/>
+          <a:p>
+            <a:endParaRPr lang="ko-KR" altLang="en-US"/>
+          </a:p>
+        </p:txBody>
       </p:sp>
       <p:sp>
         <p:nvSpPr>
@@ -9344,6 +9035,13 @@
             <a:prstDash val="solid"/>
           </a:ln>
         </p:spPr>
+        <p:txBody>
+          <a:bodyPr/>
+          <a:lstStyle/>
+          <a:p>
+            <a:endParaRPr lang="ko-KR" altLang="en-US"/>
+          </a:p>
+        </p:txBody>
       </p:sp>
       <p:sp>
         <p:nvSpPr>
@@ -9366,7 +9064,7 @@
           <a:bodyPr wrap="square" lIns="0" tIns="0" rIns="0" bIns="0" rtlCol="0" anchor="t"/>
           <a:lstStyle/>
           <a:p>
-            <a:pPr indent="0" marL="0">
+            <a:pPr marL="0" indent="0">
               <a:buNone/>
             </a:pPr>
             <a:r>
@@ -9405,7 +9103,7 @@
           <a:bodyPr wrap="square" lIns="0" tIns="0" rIns="0" bIns="0" rtlCol="0" anchor="t"/>
           <a:lstStyle/>
           <a:p>
-            <a:pPr indent="0" marL="0">
+            <a:pPr marL="0" indent="0">
               <a:lnSpc>
                 <a:spcPct val="103000"/>
               </a:lnSpc>
@@ -9428,7 +9126,7 @@
             <a:endParaRPr lang="en-US" sz="1100" dirty="0"/>
           </a:p>
           <a:p>
-            <a:pPr indent="0" marL="0">
+            <a:pPr marL="0" indent="0">
               <a:lnSpc>
                 <a:spcPct val="103000"/>
               </a:lnSpc>
@@ -9478,6 +9176,13 @@
             <a:prstDash val="solid"/>
           </a:ln>
         </p:spPr>
+        <p:txBody>
+          <a:bodyPr/>
+          <a:lstStyle/>
+          <a:p>
+            <a:endParaRPr lang="ko-KR" altLang="en-US"/>
+          </a:p>
+        </p:txBody>
       </p:sp>
       <p:sp>
         <p:nvSpPr>
@@ -9500,7 +9205,7 @@
           <a:bodyPr wrap="square" lIns="0" tIns="0" rIns="0" bIns="0" rtlCol="0" anchor="ctr"/>
           <a:lstStyle/>
           <a:p>
-            <a:pPr indent="0" marL="0">
+            <a:pPr marL="0" indent="0">
               <a:buNone/>
             </a:pPr>
             <a:r>
@@ -9514,9 +9219,6 @@
               </a:rPr>
               <a:t>출처  </a:t>
             </a:r>
-            <a:pPr indent="0" marL="0">
-              <a:buNone/>
-            </a:pPr>
             <a:r>
               <a:rPr lang="en-US" sz="950" dirty="0">
                 <a:solidFill>
@@ -9558,6 +9260,13 @@
             <a:prstDash val="solid"/>
           </a:ln>
         </p:spPr>
+        <p:txBody>
+          <a:bodyPr/>
+          <a:lstStyle/>
+          <a:p>
+            <a:endParaRPr lang="ko-KR" altLang="en-US"/>
+          </a:p>
+        </p:txBody>
       </p:sp>
       <p:sp>
         <p:nvSpPr>
@@ -9583,6 +9292,13 @@
             <a:prstDash val="solid"/>
           </a:ln>
         </p:spPr>
+        <p:txBody>
+          <a:bodyPr/>
+          <a:lstStyle/>
+          <a:p>
+            <a:endParaRPr lang="ko-KR" altLang="en-US"/>
+          </a:p>
+        </p:txBody>
       </p:sp>
       <p:sp>
         <p:nvSpPr>
@@ -9605,7 +9321,7 @@
           <a:bodyPr wrap="square" lIns="0" tIns="0" rIns="0" bIns="0" rtlCol="0" anchor="t"/>
           <a:lstStyle/>
           <a:p>
-            <a:pPr indent="0" marL="0">
+            <a:pPr marL="0" indent="0">
               <a:buNone/>
             </a:pPr>
             <a:r>
@@ -9644,7 +9360,7 @@
           <a:bodyPr wrap="square" lIns="0" tIns="0" rIns="0" bIns="0" rtlCol="0" anchor="t"/>
           <a:lstStyle/>
           <a:p>
-            <a:pPr indent="0" marL="0">
+            <a:pPr marL="0" indent="0">
               <a:lnSpc>
                 <a:spcPct val="103000"/>
               </a:lnSpc>
@@ -9667,7 +9383,7 @@
             <a:endParaRPr lang="en-US" sz="1100" dirty="0"/>
           </a:p>
           <a:p>
-            <a:pPr indent="0" marL="0">
+            <a:pPr marL="0" indent="0">
               <a:lnSpc>
                 <a:spcPct val="103000"/>
               </a:lnSpc>
@@ -9717,6 +9433,13 @@
             <a:prstDash val="solid"/>
           </a:ln>
         </p:spPr>
+        <p:txBody>
+          <a:bodyPr/>
+          <a:lstStyle/>
+          <a:p>
+            <a:endParaRPr lang="ko-KR" altLang="en-US"/>
+          </a:p>
+        </p:txBody>
       </p:sp>
       <p:sp>
         <p:nvSpPr>
@@ -9739,7 +9462,7 @@
           <a:bodyPr wrap="square" lIns="0" tIns="0" rIns="0" bIns="0" rtlCol="0" anchor="ctr"/>
           <a:lstStyle/>
           <a:p>
-            <a:pPr indent="0" marL="0">
+            <a:pPr marL="0" indent="0">
               <a:buNone/>
             </a:pPr>
             <a:r>
@@ -9753,9 +9476,6 @@
               </a:rPr>
               <a:t>출처  </a:t>
             </a:r>
-            <a:pPr indent="0" marL="0">
-              <a:buNone/>
-            </a:pPr>
             <a:r>
               <a:rPr lang="en-US" sz="950" dirty="0">
                 <a:solidFill>
@@ -9792,7 +9512,7 @@
           <a:bodyPr wrap="square" lIns="0" tIns="0" rIns="0" bIns="0" rtlCol="0" anchor="ctr"/>
           <a:lstStyle/>
           <a:p>
-            <a:pPr algn="ctr" indent="0" marL="0">
+            <a:pPr marL="0" indent="0" algn="ctr">
               <a:buNone/>
             </a:pPr>
             <a:r>
@@ -9832,6 +9552,13 @@
             <a:prstDash val="solid"/>
           </a:ln>
         </p:spPr>
+        <p:txBody>
+          <a:bodyPr/>
+          <a:lstStyle/>
+          <a:p>
+            <a:endParaRPr lang="ko-KR" altLang="en-US"/>
+          </a:p>
+        </p:txBody>
       </p:sp>
       <p:sp>
         <p:nvSpPr>
@@ -9854,7 +9581,7 @@
           <a:bodyPr wrap="square" lIns="0" tIns="0" rIns="0" bIns="0" rtlCol="0" anchor="ctr"/>
           <a:lstStyle/>
           <a:p>
-            <a:pPr algn="l" indent="0" marL="0">
+            <a:pPr marL="0" indent="0" algn="l">
               <a:buNone/>
             </a:pPr>
             <a:r>
@@ -9893,7 +9620,7 @@
           <a:bodyPr wrap="square" lIns="0" tIns="0" rIns="0" bIns="0" rtlCol="0" anchor="ctr"/>
           <a:lstStyle/>
           <a:p>
-            <a:pPr algn="r" indent="0" marL="0">
+            <a:pPr marL="0" indent="0" algn="r">
               <a:buNone/>
             </a:pPr>
             <a:r>
@@ -9927,6 +9654,7 @@
         <a:solidFill>
           <a:srgbClr val="FFFFFF"/>
         </a:solidFill>
+        <a:effectLst/>
       </p:bgPr>
     </p:bg>
     <p:spTree>
@@ -9964,11 +9692,11 @@
           <a:bodyPr wrap="square" lIns="0" tIns="0" rIns="0" bIns="0" rtlCol="0" anchor="ctr"/>
           <a:lstStyle/>
           <a:p>
-            <a:pPr indent="0" marL="0">
-              <a:buNone/>
-            </a:pPr>
-            <a:r>
-              <a:rPr lang="en-US" sz="1200" b="1" spc="200" kern="0" dirty="0">
+            <a:pPr marL="0" indent="0">
+              <a:buNone/>
+            </a:pPr>
+            <a:r>
+              <a:rPr lang="en-US" sz="1200" b="1" kern="0" spc="200" dirty="0">
                 <a:solidFill>
                   <a:srgbClr val="0E7C86"/>
                 </a:solidFill>
@@ -10003,7 +9731,7 @@
           <a:bodyPr wrap="square" lIns="0" tIns="0" rIns="0" bIns="0" rtlCol="0" anchor="ctr"/>
           <a:lstStyle/>
           <a:p>
-            <a:pPr indent="0" marL="0">
+            <a:pPr marL="0" indent="0">
               <a:buNone/>
             </a:pPr>
             <a:r>
@@ -10023,14 +9751,14 @@
       </p:sp>
       <p:pic>
         <p:nvPicPr>
-          <p:cNvPr id="4" name="Image 0" descr="C:\Projects\SolarFit\docs\shots\01_site_good.png">    </p:cNvPr>
+          <p:cNvPr id="4" name="Image 0" descr="C:\Projects\SolarFit\docs\shots\01_site_good.png"/>
           <p:cNvPicPr>
             <a:picLocks noChangeAspect="1"/>
           </p:cNvPicPr>
           <p:nvPr/>
         </p:nvPicPr>
         <p:blipFill>
-          <a:blip r:embed="rId1"/>
+          <a:blip r:embed="rId3"/>
           <a:stretch>
             <a:fillRect/>
           </a:stretch>
@@ -10066,6 +9794,13 @@
             <a:prstDash val="solid"/>
           </a:ln>
         </p:spPr>
+        <p:txBody>
+          <a:bodyPr/>
+          <a:lstStyle/>
+          <a:p>
+            <a:endParaRPr lang="ko-KR" altLang="en-US"/>
+          </a:p>
+        </p:txBody>
       </p:sp>
       <p:sp>
         <p:nvSpPr>
@@ -10093,6 +9828,13 @@
             <a:prstDash val="solid"/>
           </a:ln>
         </p:spPr>
+        <p:txBody>
+          <a:bodyPr/>
+          <a:lstStyle/>
+          <a:p>
+            <a:endParaRPr lang="ko-KR" altLang="en-US"/>
+          </a:p>
+        </p:txBody>
       </p:sp>
       <p:sp>
         <p:nvSpPr>
@@ -10118,6 +9860,13 @@
             <a:prstDash val="solid"/>
           </a:ln>
         </p:spPr>
+        <p:txBody>
+          <a:bodyPr/>
+          <a:lstStyle/>
+          <a:p>
+            <a:endParaRPr lang="ko-KR" altLang="en-US"/>
+          </a:p>
+        </p:txBody>
       </p:sp>
       <p:sp>
         <p:nvSpPr>
@@ -10140,7 +9889,7 @@
           <a:bodyPr wrap="square" lIns="0" tIns="0" rIns="0" bIns="0" rtlCol="0" anchor="t"/>
           <a:lstStyle/>
           <a:p>
-            <a:pPr indent="0" marL="0">
+            <a:pPr marL="0" indent="0">
               <a:buNone/>
             </a:pPr>
             <a:r>
@@ -10179,7 +9928,7 @@
           <a:bodyPr wrap="square" lIns="0" tIns="0" rIns="0" bIns="0" rtlCol="0" anchor="t"/>
           <a:lstStyle/>
           <a:p>
-            <a:pPr indent="0" marL="0">
+            <a:pPr marL="0" indent="0">
               <a:lnSpc>
                 <a:spcPct val="103000"/>
               </a:lnSpc>
@@ -10202,7 +9951,7 @@
             <a:endParaRPr lang="en-US" sz="1100" dirty="0"/>
           </a:p>
           <a:p>
-            <a:pPr indent="0" marL="0">
+            <a:pPr marL="0" indent="0">
               <a:lnSpc>
                 <a:spcPct val="103000"/>
               </a:lnSpc>
@@ -10252,6 +10001,13 @@
             <a:prstDash val="solid"/>
           </a:ln>
         </p:spPr>
+        <p:txBody>
+          <a:bodyPr/>
+          <a:lstStyle/>
+          <a:p>
+            <a:endParaRPr lang="ko-KR" altLang="en-US"/>
+          </a:p>
+        </p:txBody>
       </p:sp>
       <p:sp>
         <p:nvSpPr>
@@ -10274,7 +10030,7 @@
           <a:bodyPr wrap="square" lIns="0" tIns="0" rIns="0" bIns="0" rtlCol="0" anchor="ctr"/>
           <a:lstStyle/>
           <a:p>
-            <a:pPr indent="0" marL="0">
+            <a:pPr marL="0" indent="0">
               <a:buNone/>
             </a:pPr>
             <a:r>
@@ -10288,9 +10044,6 @@
               </a:rPr>
               <a:t>출처  </a:t>
             </a:r>
-            <a:pPr indent="0" marL="0">
-              <a:buNone/>
-            </a:pPr>
             <a:r>
               <a:rPr lang="en-US" sz="950" dirty="0">
                 <a:solidFill>
@@ -10332,6 +10085,13 @@
             <a:prstDash val="solid"/>
           </a:ln>
         </p:spPr>
+        <p:txBody>
+          <a:bodyPr/>
+          <a:lstStyle/>
+          <a:p>
+            <a:endParaRPr lang="ko-KR" altLang="en-US"/>
+          </a:p>
+        </p:txBody>
       </p:sp>
       <p:sp>
         <p:nvSpPr>
@@ -10357,6 +10117,13 @@
             <a:prstDash val="solid"/>
           </a:ln>
         </p:spPr>
+        <p:txBody>
+          <a:bodyPr/>
+          <a:lstStyle/>
+          <a:p>
+            <a:endParaRPr lang="ko-KR" altLang="en-US"/>
+          </a:p>
+        </p:txBody>
       </p:sp>
       <p:sp>
         <p:nvSpPr>
@@ -10379,7 +10146,7 @@
           <a:bodyPr wrap="square" lIns="0" tIns="0" rIns="0" bIns="0" rtlCol="0" anchor="t"/>
           <a:lstStyle/>
           <a:p>
-            <a:pPr indent="0" marL="0">
+            <a:pPr marL="0" indent="0">
               <a:buNone/>
             </a:pPr>
             <a:r>
@@ -10418,7 +10185,7 @@
           <a:bodyPr wrap="square" lIns="0" tIns="0" rIns="0" bIns="0" rtlCol="0" anchor="t"/>
           <a:lstStyle/>
           <a:p>
-            <a:pPr indent="0" marL="0">
+            <a:pPr marL="0" indent="0">
               <a:lnSpc>
                 <a:spcPct val="103000"/>
               </a:lnSpc>
@@ -10441,7 +10208,7 @@
             <a:endParaRPr lang="en-US" sz="1100" dirty="0"/>
           </a:p>
           <a:p>
-            <a:pPr indent="0" marL="0">
+            <a:pPr marL="0" indent="0">
               <a:lnSpc>
                 <a:spcPct val="103000"/>
               </a:lnSpc>
@@ -10491,6 +10258,13 @@
             <a:prstDash val="solid"/>
           </a:ln>
         </p:spPr>
+        <p:txBody>
+          <a:bodyPr/>
+          <a:lstStyle/>
+          <a:p>
+            <a:endParaRPr lang="ko-KR" altLang="en-US"/>
+          </a:p>
+        </p:txBody>
       </p:sp>
       <p:sp>
         <p:nvSpPr>
@@ -10513,7 +10287,7 @@
           <a:bodyPr wrap="square" lIns="0" tIns="0" rIns="0" bIns="0" rtlCol="0" anchor="ctr"/>
           <a:lstStyle/>
           <a:p>
-            <a:pPr indent="0" marL="0">
+            <a:pPr marL="0" indent="0">
               <a:buNone/>
             </a:pPr>
             <a:r>
@@ -10527,9 +10301,6 @@
               </a:rPr>
               <a:t>출처  </a:t>
             </a:r>
-            <a:pPr indent="0" marL="0">
-              <a:buNone/>
-            </a:pPr>
             <a:r>
               <a:rPr lang="en-US" sz="950" dirty="0">
                 <a:solidFill>
@@ -10571,6 +10342,13 @@
             <a:prstDash val="solid"/>
           </a:ln>
         </p:spPr>
+        <p:txBody>
+          <a:bodyPr/>
+          <a:lstStyle/>
+          <a:p>
+            <a:endParaRPr lang="ko-KR" altLang="en-US"/>
+          </a:p>
+        </p:txBody>
       </p:sp>
       <p:sp>
         <p:nvSpPr>
@@ -10596,6 +10374,13 @@
             <a:prstDash val="solid"/>
           </a:ln>
         </p:spPr>
+        <p:txBody>
+          <a:bodyPr/>
+          <a:lstStyle/>
+          <a:p>
+            <a:endParaRPr lang="ko-KR" altLang="en-US"/>
+          </a:p>
+        </p:txBody>
       </p:sp>
       <p:sp>
         <p:nvSpPr>
@@ -10618,7 +10403,7 @@
           <a:bodyPr wrap="square" lIns="0" tIns="0" rIns="0" bIns="0" rtlCol="0" anchor="t"/>
           <a:lstStyle/>
           <a:p>
-            <a:pPr indent="0" marL="0">
+            <a:pPr marL="0" indent="0">
               <a:buNone/>
             </a:pPr>
             <a:r>
@@ -10657,7 +10442,7 @@
           <a:bodyPr wrap="square" lIns="0" tIns="0" rIns="0" bIns="0" rtlCol="0" anchor="t"/>
           <a:lstStyle/>
           <a:p>
-            <a:pPr indent="0" marL="0">
+            <a:pPr marL="0" indent="0">
               <a:lnSpc>
                 <a:spcPct val="103000"/>
               </a:lnSpc>
@@ -10680,7 +10465,7 @@
             <a:endParaRPr lang="en-US" sz="1100" dirty="0"/>
           </a:p>
           <a:p>
-            <a:pPr indent="0" marL="0">
+            <a:pPr marL="0" indent="0">
               <a:lnSpc>
                 <a:spcPct val="103000"/>
               </a:lnSpc>
@@ -10730,6 +10515,13 @@
             <a:prstDash val="solid"/>
           </a:ln>
         </p:spPr>
+        <p:txBody>
+          <a:bodyPr/>
+          <a:lstStyle/>
+          <a:p>
+            <a:endParaRPr lang="ko-KR" altLang="en-US"/>
+          </a:p>
+        </p:txBody>
       </p:sp>
       <p:sp>
         <p:nvSpPr>
@@ -10755,6 +10547,13 @@
             <a:prstDash val="solid"/>
           </a:ln>
         </p:spPr>
+        <p:txBody>
+          <a:bodyPr/>
+          <a:lstStyle/>
+          <a:p>
+            <a:endParaRPr lang="ko-KR" altLang="en-US"/>
+          </a:p>
+        </p:txBody>
       </p:sp>
       <p:sp>
         <p:nvSpPr>
@@ -10777,7 +10576,7 @@
           <a:bodyPr wrap="square" lIns="0" tIns="0" rIns="0" bIns="0" rtlCol="0" anchor="t"/>
           <a:lstStyle/>
           <a:p>
-            <a:pPr indent="0" marL="0">
+            <a:pPr marL="0" indent="0">
               <a:buNone/>
             </a:pPr>
             <a:r>
@@ -10816,7 +10615,7 @@
           <a:bodyPr wrap="square" lIns="0" tIns="0" rIns="0" bIns="0" rtlCol="0" anchor="t"/>
           <a:lstStyle/>
           <a:p>
-            <a:pPr indent="0" marL="0">
+            <a:pPr marL="0" indent="0">
               <a:lnSpc>
                 <a:spcPct val="103000"/>
               </a:lnSpc>
@@ -10839,7 +10638,7 @@
             <a:endParaRPr lang="en-US" sz="1100" dirty="0"/>
           </a:p>
           <a:p>
-            <a:pPr indent="0" marL="0">
+            <a:pPr marL="0" indent="0">
               <a:lnSpc>
                 <a:spcPct val="103000"/>
               </a:lnSpc>
@@ -10885,6 +10684,13 @@
             <a:prstDash val="solid"/>
           </a:ln>
         </p:spPr>
+        <p:txBody>
+          <a:bodyPr/>
+          <a:lstStyle/>
+          <a:p>
+            <a:endParaRPr lang="ko-KR" altLang="en-US"/>
+          </a:p>
+        </p:txBody>
       </p:sp>
       <p:sp>
         <p:nvSpPr>
@@ -10907,7 +10713,7 @@
           <a:bodyPr wrap="square" lIns="0" tIns="0" rIns="0" bIns="0" rtlCol="0" anchor="ctr"/>
           <a:lstStyle/>
           <a:p>
-            <a:pPr algn="l" indent="0" marL="0">
+            <a:pPr marL="0" indent="0" algn="l">
               <a:buNone/>
             </a:pPr>
             <a:r>
@@ -10946,7 +10752,7 @@
           <a:bodyPr wrap="square" lIns="0" tIns="0" rIns="0" bIns="0" rtlCol="0" anchor="ctr"/>
           <a:lstStyle/>
           <a:p>
-            <a:pPr algn="r" indent="0" marL="0">
+            <a:pPr marL="0" indent="0" algn="r">
               <a:buNone/>
             </a:pPr>
             <a:r>
@@ -10980,6 +10786,7 @@
         <a:solidFill>
           <a:srgbClr val="FFFFFF"/>
         </a:solidFill>
+        <a:effectLst/>
       </p:bgPr>
     </p:bg>
     <p:spTree>
@@ -11017,11 +10824,11 @@
           <a:bodyPr wrap="square" lIns="0" tIns="0" rIns="0" bIns="0" rtlCol="0" anchor="ctr"/>
           <a:lstStyle/>
           <a:p>
-            <a:pPr indent="0" marL="0">
-              <a:buNone/>
-            </a:pPr>
-            <a:r>
-              <a:rPr lang="en-US" sz="1200" b="1" spc="200" kern="0" dirty="0">
+            <a:pPr marL="0" indent="0">
+              <a:buNone/>
+            </a:pPr>
+            <a:r>
+              <a:rPr lang="en-US" sz="1200" b="1" kern="0" spc="200" dirty="0">
                 <a:solidFill>
                   <a:srgbClr val="0E7C86"/>
                 </a:solidFill>
@@ -11056,7 +10863,7 @@
           <a:bodyPr wrap="square" lIns="0" tIns="0" rIns="0" bIns="0" rtlCol="0" anchor="ctr"/>
           <a:lstStyle/>
           <a:p>
-            <a:pPr indent="0" marL="0">
+            <a:pPr marL="0" indent="0">
               <a:buNone/>
             </a:pPr>
             <a:r>
@@ -11076,14 +10883,14 @@
       </p:sp>
       <p:pic>
         <p:nvPicPr>
-          <p:cNvPr id="4" name="Image 0" descr="C:\Projects\SolarFit\docs\shots\01_site_good.png">    </p:cNvPr>
+          <p:cNvPr id="4" name="Image 0" descr="C:\Projects\SolarFit\docs\shots\01_site_good.png"/>
           <p:cNvPicPr>
             <a:picLocks noChangeAspect="1"/>
           </p:cNvPicPr>
           <p:nvPr/>
         </p:nvPicPr>
         <p:blipFill>
-          <a:blip r:embed="rId1"/>
+          <a:blip r:embed="rId3"/>
           <a:stretch>
             <a:fillRect/>
           </a:stretch>
@@ -11119,17 +10926,24 @@
             <a:prstDash val="solid"/>
           </a:ln>
         </p:spPr>
+        <p:txBody>
+          <a:bodyPr/>
+          <a:lstStyle/>
+          <a:p>
+            <a:endParaRPr lang="ko-KR" altLang="en-US"/>
+          </a:p>
+        </p:txBody>
       </p:sp>
       <p:pic>
         <p:nvPicPr>
-          <p:cNvPr id="6" name="Image 1" descr="C:\Projects\SolarFit\docs\shots\03_site_limited.png">    </p:cNvPr>
+          <p:cNvPr id="6" name="Image 1" descr="C:\Projects\SolarFit\docs\shots\03_site_limited.png"/>
           <p:cNvPicPr>
             <a:picLocks noChangeAspect="1"/>
           </p:cNvPicPr>
           <p:nvPr/>
         </p:nvPicPr>
         <p:blipFill>
-          <a:blip r:embed="rId2"/>
+          <a:blip r:embed="rId4"/>
           <a:stretch>
             <a:fillRect/>
           </a:stretch>
@@ -11165,6 +10979,13 @@
             <a:prstDash val="solid"/>
           </a:ln>
         </p:spPr>
+        <p:txBody>
+          <a:bodyPr/>
+          <a:lstStyle/>
+          <a:p>
+            <a:endParaRPr lang="ko-KR" altLang="en-US"/>
+          </a:p>
+        </p:txBody>
       </p:sp>
       <p:sp>
         <p:nvSpPr>
@@ -11187,7 +11008,7 @@
           <a:bodyPr wrap="square" lIns="0" tIns="0" rIns="0" bIns="0" rtlCol="0" anchor="ctr"/>
           <a:lstStyle/>
           <a:p>
-            <a:pPr algn="ctr" indent="0" marL="0">
+            <a:pPr marL="0" indent="0" algn="ctr">
               <a:buNone/>
             </a:pPr>
             <a:r>
@@ -11226,7 +11047,7 @@
           <a:bodyPr wrap="square" lIns="0" tIns="0" rIns="0" bIns="0" rtlCol="0" anchor="ctr"/>
           <a:lstStyle/>
           <a:p>
-            <a:pPr algn="ctr" indent="0" marL="0">
+            <a:pPr marL="0" indent="0" algn="ctr">
               <a:buNone/>
             </a:pPr>
             <a:r>
@@ -11265,7 +11086,7 @@
           <a:bodyPr wrap="square" lIns="0" tIns="0" rIns="0" bIns="0" rtlCol="0" anchor="ctr"/>
           <a:lstStyle/>
           <a:p>
-            <a:pPr algn="ctr" indent="0" marL="0">
+            <a:pPr marL="0" indent="0" algn="ctr">
               <a:buNone/>
             </a:pPr>
             <a:r>
@@ -11304,7 +11125,7 @@
           <a:bodyPr wrap="square" lIns="0" tIns="0" rIns="0" bIns="0" rtlCol="0" anchor="ctr"/>
           <a:lstStyle/>
           <a:p>
-            <a:pPr algn="ctr" indent="0" marL="0">
+            <a:pPr marL="0" indent="0" algn="ctr">
               <a:buNone/>
             </a:pPr>
             <a:r>
@@ -11344,6 +11165,13 @@
             <a:prstDash val="solid"/>
           </a:ln>
         </p:spPr>
+        <p:txBody>
+          <a:bodyPr/>
+          <a:lstStyle/>
+          <a:p>
+            <a:endParaRPr lang="ko-KR" altLang="en-US"/>
+          </a:p>
+        </p:txBody>
       </p:sp>
       <p:sp>
         <p:nvSpPr>
@@ -11366,7 +11194,7 @@
           <a:bodyPr wrap="square" lIns="0" tIns="0" rIns="0" bIns="0" rtlCol="0" anchor="ctr"/>
           <a:lstStyle/>
           <a:p>
-            <a:pPr algn="l" indent="0" marL="0">
+            <a:pPr marL="0" indent="0" algn="l">
               <a:buNone/>
             </a:pPr>
             <a:r>
@@ -11405,7 +11233,7 @@
           <a:bodyPr wrap="square" lIns="0" tIns="0" rIns="0" bIns="0" rtlCol="0" anchor="ctr"/>
           <a:lstStyle/>
           <a:p>
-            <a:pPr algn="r" indent="0" marL="0">
+            <a:pPr marL="0" indent="0" algn="r">
               <a:buNone/>
             </a:pPr>
             <a:r>
@@ -11439,6 +11267,7 @@
         <a:solidFill>
           <a:srgbClr val="FFFFFF"/>
         </a:solidFill>
+        <a:effectLst/>
       </p:bgPr>
     </p:bg>
     <p:spTree>
@@ -11476,11 +11305,11 @@
           <a:bodyPr wrap="square" lIns="0" tIns="0" rIns="0" bIns="0" rtlCol="0" anchor="ctr"/>
           <a:lstStyle/>
           <a:p>
-            <a:pPr indent="0" marL="0">
-              <a:buNone/>
-            </a:pPr>
-            <a:r>
-              <a:rPr lang="en-US" sz="1200" b="1" spc="200" kern="0" dirty="0">
+            <a:pPr marL="0" indent="0">
+              <a:buNone/>
+            </a:pPr>
+            <a:r>
+              <a:rPr lang="en-US" sz="1200" b="1" kern="0" spc="200" dirty="0">
                 <a:solidFill>
                   <a:srgbClr val="0E7C86"/>
                 </a:solidFill>
@@ -11515,7 +11344,7 @@
           <a:bodyPr wrap="square" lIns="0" tIns="0" rIns="0" bIns="0" rtlCol="0" anchor="ctr"/>
           <a:lstStyle/>
           <a:p>
-            <a:pPr indent="0" marL="0">
+            <a:pPr marL="0" indent="0">
               <a:buNone/>
             </a:pPr>
             <a:r>
@@ -11554,7 +11383,7 @@
           <a:bodyPr wrap="square" lIns="0" tIns="0" rIns="0" bIns="0" rtlCol="0" anchor="ctr"/>
           <a:lstStyle/>
           <a:p>
-            <a:pPr indent="0" marL="0">
+            <a:pPr marL="0" indent="0">
               <a:buNone/>
             </a:pPr>
             <a:r>
@@ -11598,6 +11427,13 @@
             <a:prstDash val="solid"/>
           </a:ln>
         </p:spPr>
+        <p:txBody>
+          <a:bodyPr/>
+          <a:lstStyle/>
+          <a:p>
+            <a:endParaRPr lang="ko-KR" altLang="en-US"/>
+          </a:p>
+        </p:txBody>
       </p:sp>
       <p:sp>
         <p:nvSpPr>
@@ -11620,7 +11456,7 @@
           <a:bodyPr wrap="square" lIns="0" tIns="0" rIns="0" bIns="0" rtlCol="0" anchor="ctr"/>
           <a:lstStyle/>
           <a:p>
-            <a:pPr indent="0" marL="0">
+            <a:pPr marL="0" indent="0">
               <a:buNone/>
             </a:pPr>
             <a:r>
@@ -11659,7 +11495,7 @@
           <a:bodyPr wrap="square" lIns="0" tIns="0" rIns="0" bIns="0" rtlCol="0" anchor="ctr"/>
           <a:lstStyle/>
           <a:p>
-            <a:pPr algn="ctr" indent="0" marL="0">
+            <a:pPr marL="0" indent="0" algn="ctr">
               <a:buNone/>
             </a:pPr>
             <a:r>
@@ -11703,6 +11539,13 @@
             <a:prstDash val="solid"/>
           </a:ln>
         </p:spPr>
+        <p:txBody>
+          <a:bodyPr/>
+          <a:lstStyle/>
+          <a:p>
+            <a:endParaRPr lang="ko-KR" altLang="en-US"/>
+          </a:p>
+        </p:txBody>
       </p:sp>
       <p:sp>
         <p:nvSpPr>
@@ -11725,7 +11568,7 @@
           <a:bodyPr wrap="square" lIns="0" tIns="0" rIns="0" bIns="0" rtlCol="0" anchor="ctr"/>
           <a:lstStyle/>
           <a:p>
-            <a:pPr indent="0" marL="0">
+            <a:pPr marL="0" indent="0">
               <a:buNone/>
             </a:pPr>
             <a:r>
@@ -11764,7 +11607,7 @@
           <a:bodyPr wrap="square" lIns="0" tIns="0" rIns="0" bIns="0" rtlCol="0" anchor="ctr"/>
           <a:lstStyle/>
           <a:p>
-            <a:pPr algn="ctr" indent="0" marL="0">
+            <a:pPr marL="0" indent="0" algn="ctr">
               <a:buNone/>
             </a:pPr>
             <a:r>
@@ -11808,6 +11651,13 @@
             <a:prstDash val="solid"/>
           </a:ln>
         </p:spPr>
+        <p:txBody>
+          <a:bodyPr/>
+          <a:lstStyle/>
+          <a:p>
+            <a:endParaRPr lang="ko-KR" altLang="en-US"/>
+          </a:p>
+        </p:txBody>
       </p:sp>
       <p:sp>
         <p:nvSpPr>
@@ -11830,7 +11680,7 @@
           <a:bodyPr wrap="square" lIns="0" tIns="0" rIns="0" bIns="0" rtlCol="0" anchor="ctr"/>
           <a:lstStyle/>
           <a:p>
-            <a:pPr indent="0" marL="0">
+            <a:pPr marL="0" indent="0">
               <a:buNone/>
             </a:pPr>
             <a:r>
@@ -11869,7 +11719,7 @@
           <a:bodyPr wrap="square" lIns="0" tIns="0" rIns="0" bIns="0" rtlCol="0" anchor="ctr"/>
           <a:lstStyle/>
           <a:p>
-            <a:pPr algn="ctr" indent="0" marL="0">
+            <a:pPr marL="0" indent="0" algn="ctr">
               <a:buNone/>
             </a:pPr>
             <a:r>
@@ -11913,6 +11763,13 @@
             <a:prstDash val="solid"/>
           </a:ln>
         </p:spPr>
+        <p:txBody>
+          <a:bodyPr/>
+          <a:lstStyle/>
+          <a:p>
+            <a:endParaRPr lang="ko-KR" altLang="en-US"/>
+          </a:p>
+        </p:txBody>
       </p:sp>
       <p:sp>
         <p:nvSpPr>
@@ -11935,7 +11792,7 @@
           <a:bodyPr wrap="square" lIns="0" tIns="0" rIns="0" bIns="0" rtlCol="0" anchor="ctr"/>
           <a:lstStyle/>
           <a:p>
-            <a:pPr indent="0" marL="0">
+            <a:pPr marL="0" indent="0">
               <a:buNone/>
             </a:pPr>
             <a:r>
@@ -11974,7 +11831,7 @@
           <a:bodyPr wrap="square" lIns="0" tIns="0" rIns="0" bIns="0" rtlCol="0" anchor="ctr"/>
           <a:lstStyle/>
           <a:p>
-            <a:pPr indent="0" marL="0">
+            <a:pPr marL="0" indent="0">
               <a:buNone/>
             </a:pPr>
             <a:r>
@@ -12013,7 +11870,7 @@
           <a:bodyPr wrap="square" lIns="0" tIns="0" rIns="0" bIns="0" rtlCol="0" anchor="ctr"/>
           <a:lstStyle/>
           <a:p>
-            <a:pPr indent="0" marL="0">
+            <a:pPr marL="0" indent="0">
               <a:buNone/>
             </a:pPr>
             <a:r>
@@ -12057,6 +11914,13 @@
             <a:prstDash val="solid"/>
           </a:ln>
         </p:spPr>
+        <p:txBody>
+          <a:bodyPr/>
+          <a:lstStyle/>
+          <a:p>
+            <a:endParaRPr lang="ko-KR" altLang="en-US"/>
+          </a:p>
+        </p:txBody>
       </p:sp>
       <p:sp>
         <p:nvSpPr>
@@ -12079,7 +11943,7 @@
           <a:bodyPr wrap="square" lIns="0" tIns="0" rIns="0" bIns="0" rtlCol="0" anchor="ctr"/>
           <a:lstStyle/>
           <a:p>
-            <a:pPr indent="0" marL="0">
+            <a:pPr marL="0" indent="0">
               <a:buNone/>
             </a:pPr>
             <a:r>
@@ -12093,9 +11957,6 @@
               </a:rPr>
               <a:t>한 지점 연계가능 용량 = </a:t>
             </a:r>
-            <a:pPr indent="0" marL="0">
-              <a:buNone/>
-            </a:pPr>
             <a:r>
               <a:rPr lang="en-US" sz="1300" b="1" dirty="0">
                 <a:solidFill>
@@ -12132,7 +11993,7 @@
           <a:bodyPr wrap="square" lIns="0" tIns="0" rIns="0" bIns="0" rtlCol="0" anchor="ctr"/>
           <a:lstStyle/>
           <a:p>
-            <a:pPr indent="0" marL="0">
+            <a:pPr marL="0" indent="0">
               <a:buNone/>
             </a:pPr>
             <a:r>
@@ -12176,6 +12037,13 @@
             <a:prstDash val="solid"/>
           </a:ln>
         </p:spPr>
+        <p:txBody>
+          <a:bodyPr/>
+          <a:lstStyle/>
+          <a:p>
+            <a:endParaRPr lang="ko-KR" altLang="en-US"/>
+          </a:p>
+        </p:txBody>
       </p:sp>
       <p:sp>
         <p:nvSpPr>
@@ -12198,7 +12066,7 @@
           <a:bodyPr wrap="square" lIns="0" tIns="0" rIns="0" bIns="0" rtlCol="0" anchor="ctr"/>
           <a:lstStyle/>
           <a:p>
-            <a:pPr indent="0" marL="0">
+            <a:pPr marL="0" indent="0">
               <a:buNone/>
             </a:pPr>
             <a:r>
@@ -12237,7 +12105,7 @@
           <a:bodyPr wrap="square" lIns="0" tIns="0" rIns="0" bIns="0" rtlCol="0" anchor="ctr"/>
           <a:lstStyle/>
           <a:p>
-            <a:pPr indent="0" marL="0">
+            <a:pPr marL="0" indent="0">
               <a:buNone/>
             </a:pPr>
             <a:r>
@@ -12251,9 +12119,6 @@
               </a:rPr>
               <a:t>충분</a:t>
             </a:r>
-            <a:pPr indent="0" marL="0">
-              <a:buNone/>
-            </a:pPr>
             <a:r>
               <a:rPr lang="en-US" sz="1300" dirty="0">
                 <a:solidFill>
@@ -12265,9 +12130,6 @@
               </a:rPr>
               <a:t> (≥9,000kW)   </a:t>
             </a:r>
-            <a:pPr indent="0" marL="0">
-              <a:buNone/>
-            </a:pPr>
             <a:r>
               <a:rPr lang="en-US" sz="1300" b="1" dirty="0">
                 <a:solidFill>
@@ -12279,9 +12141,6 @@
               </a:rPr>
               <a:t>보통</a:t>
             </a:r>
-            <a:pPr indent="0" marL="0">
-              <a:buNone/>
-            </a:pPr>
             <a:r>
               <a:rPr lang="en-US" sz="1300" dirty="0">
                 <a:solidFill>
@@ -12293,9 +12152,6 @@
               </a:rPr>
               <a:t>   </a:t>
             </a:r>
-            <a:pPr indent="0" marL="0">
-              <a:buNone/>
-            </a:pPr>
             <a:r>
               <a:rPr lang="en-US" sz="1300" b="1" dirty="0">
                 <a:solidFill>
@@ -12332,7 +12188,7 @@
           <a:bodyPr wrap="square" lIns="0" tIns="0" rIns="0" bIns="0" rtlCol="0" anchor="ctr"/>
           <a:lstStyle/>
           <a:p>
-            <a:pPr indent="0" marL="0">
+            <a:pPr marL="0" indent="0">
               <a:buNone/>
             </a:pPr>
             <a:r>
@@ -12372,6 +12228,13 @@
             <a:prstDash val="solid"/>
           </a:ln>
         </p:spPr>
+        <p:txBody>
+          <a:bodyPr/>
+          <a:lstStyle/>
+          <a:p>
+            <a:endParaRPr lang="ko-KR" altLang="en-US"/>
+          </a:p>
+        </p:txBody>
       </p:sp>
       <p:sp>
         <p:nvSpPr>
@@ -12394,7 +12257,7 @@
           <a:bodyPr wrap="square" lIns="0" tIns="0" rIns="0" bIns="0" rtlCol="0" anchor="ctr"/>
           <a:lstStyle/>
           <a:p>
-            <a:pPr algn="l" indent="0" marL="0">
+            <a:pPr marL="0" indent="0" algn="l">
               <a:buNone/>
             </a:pPr>
             <a:r>
@@ -12433,7 +12296,7 @@
           <a:bodyPr wrap="square" lIns="0" tIns="0" rIns="0" bIns="0" rtlCol="0" anchor="ctr"/>
           <a:lstStyle/>
           <a:p>
-            <a:pPr algn="r" indent="0" marL="0">
+            <a:pPr marL="0" indent="0" algn="r">
               <a:buNone/>
             </a:pPr>
             <a:r>
@@ -12467,6 +12330,7 @@
         <a:solidFill>
           <a:srgbClr val="FFFFFF"/>
         </a:solidFill>
+        <a:effectLst/>
       </p:bgPr>
     </p:bg>
     <p:spTree>
@@ -12504,11 +12368,11 @@
           <a:bodyPr wrap="square" lIns="0" tIns="0" rIns="0" bIns="0" rtlCol="0" anchor="ctr"/>
           <a:lstStyle/>
           <a:p>
-            <a:pPr indent="0" marL="0">
-              <a:buNone/>
-            </a:pPr>
-            <a:r>
-              <a:rPr lang="en-US" sz="1200" b="1" spc="200" kern="0" dirty="0">
+            <a:pPr marL="0" indent="0">
+              <a:buNone/>
+            </a:pPr>
+            <a:r>
+              <a:rPr lang="en-US" sz="1200" b="1" kern="0" spc="200" dirty="0">
                 <a:solidFill>
                   <a:srgbClr val="0E7C86"/>
                 </a:solidFill>
@@ -12543,7 +12407,7 @@
           <a:bodyPr wrap="square" lIns="0" tIns="0" rIns="0" bIns="0" rtlCol="0" anchor="ctr"/>
           <a:lstStyle/>
           <a:p>
-            <a:pPr indent="0" marL="0">
+            <a:pPr marL="0" indent="0">
               <a:buNone/>
             </a:pPr>
             <a:r>
@@ -12563,14 +12427,14 @@
       </p:sp>
       <p:pic>
         <p:nvPicPr>
-          <p:cNvPr id="4" name="Image 0" descr="C:\Projects\SolarFit\docs\shots\02_revenue_good.png">    </p:cNvPr>
+          <p:cNvPr id="4" name="Image 0" descr="C:\Projects\SolarFit\docs\shots\02_revenue_good.png"/>
           <p:cNvPicPr>
             <a:picLocks noChangeAspect="1"/>
           </p:cNvPicPr>
           <p:nvPr/>
         </p:nvPicPr>
         <p:blipFill>
-          <a:blip r:embed="rId1"/>
+          <a:blip r:embed="rId3"/>
           <a:stretch>
             <a:fillRect/>
           </a:stretch>
@@ -12606,6 +12470,13 @@
             <a:prstDash val="solid"/>
           </a:ln>
         </p:spPr>
+        <p:txBody>
+          <a:bodyPr/>
+          <a:lstStyle/>
+          <a:p>
+            <a:endParaRPr lang="ko-KR" altLang="en-US"/>
+          </a:p>
+        </p:txBody>
       </p:sp>
       <p:sp>
         <p:nvSpPr>
@@ -12633,6 +12504,13 @@
             <a:prstDash val="solid"/>
           </a:ln>
         </p:spPr>
+        <p:txBody>
+          <a:bodyPr/>
+          <a:lstStyle/>
+          <a:p>
+            <a:endParaRPr lang="ko-KR" altLang="en-US"/>
+          </a:p>
+        </p:txBody>
       </p:sp>
       <p:sp>
         <p:nvSpPr>
@@ -12658,6 +12536,13 @@
             <a:prstDash val="solid"/>
           </a:ln>
         </p:spPr>
+        <p:txBody>
+          <a:bodyPr/>
+          <a:lstStyle/>
+          <a:p>
+            <a:endParaRPr lang="ko-KR" altLang="en-US"/>
+          </a:p>
+        </p:txBody>
       </p:sp>
       <p:sp>
         <p:nvSpPr>
@@ -12680,7 +12565,7 @@
           <a:bodyPr wrap="square" lIns="0" tIns="0" rIns="0" bIns="0" rtlCol="0" anchor="t"/>
           <a:lstStyle/>
           <a:p>
-            <a:pPr indent="0" marL="0">
+            <a:pPr marL="0" indent="0">
               <a:buNone/>
             </a:pPr>
             <a:r>
@@ -12719,7 +12604,7 @@
           <a:bodyPr wrap="square" lIns="0" tIns="0" rIns="0" bIns="0" rtlCol="0" anchor="t"/>
           <a:lstStyle/>
           <a:p>
-            <a:pPr indent="0" marL="0">
+            <a:pPr marL="0" indent="0">
               <a:lnSpc>
                 <a:spcPct val="103000"/>
               </a:lnSpc>
@@ -12769,6 +12654,13 @@
             <a:prstDash val="solid"/>
           </a:ln>
         </p:spPr>
+        <p:txBody>
+          <a:bodyPr/>
+          <a:lstStyle/>
+          <a:p>
+            <a:endParaRPr lang="ko-KR" altLang="en-US"/>
+          </a:p>
+        </p:txBody>
       </p:sp>
       <p:sp>
         <p:nvSpPr>
@@ -12791,7 +12683,7 @@
           <a:bodyPr wrap="square" lIns="0" tIns="0" rIns="0" bIns="0" rtlCol="0" anchor="ctr"/>
           <a:lstStyle/>
           <a:p>
-            <a:pPr indent="0" marL="0">
+            <a:pPr marL="0" indent="0">
               <a:buNone/>
             </a:pPr>
             <a:r>
@@ -12805,9 +12697,6 @@
               </a:rPr>
               <a:t>출처  </a:t>
             </a:r>
-            <a:pPr indent="0" marL="0">
-              <a:buNone/>
-            </a:pPr>
             <a:r>
               <a:rPr lang="en-US" sz="950" dirty="0">
                 <a:solidFill>
@@ -12849,6 +12738,13 @@
             <a:prstDash val="solid"/>
           </a:ln>
         </p:spPr>
+        <p:txBody>
+          <a:bodyPr/>
+          <a:lstStyle/>
+          <a:p>
+            <a:endParaRPr lang="ko-KR" altLang="en-US"/>
+          </a:p>
+        </p:txBody>
       </p:sp>
       <p:sp>
         <p:nvSpPr>
@@ -12874,6 +12770,13 @@
             <a:prstDash val="solid"/>
           </a:ln>
         </p:spPr>
+        <p:txBody>
+          <a:bodyPr/>
+          <a:lstStyle/>
+          <a:p>
+            <a:endParaRPr lang="ko-KR" altLang="en-US"/>
+          </a:p>
+        </p:txBody>
       </p:sp>
       <p:sp>
         <p:nvSpPr>
@@ -12896,7 +12799,7 @@
           <a:bodyPr wrap="square" lIns="0" tIns="0" rIns="0" bIns="0" rtlCol="0" anchor="t"/>
           <a:lstStyle/>
           <a:p>
-            <a:pPr indent="0" marL="0">
+            <a:pPr marL="0" indent="0">
               <a:buNone/>
             </a:pPr>
             <a:r>
@@ -12935,7 +12838,7 @@
           <a:bodyPr wrap="square" lIns="0" tIns="0" rIns="0" bIns="0" rtlCol="0" anchor="t"/>
           <a:lstStyle/>
           <a:p>
-            <a:pPr indent="0" marL="0">
+            <a:pPr marL="0" indent="0">
               <a:lnSpc>
                 <a:spcPct val="103000"/>
               </a:lnSpc>
@@ -12985,6 +12888,13 @@
             <a:prstDash val="solid"/>
           </a:ln>
         </p:spPr>
+        <p:txBody>
+          <a:bodyPr/>
+          <a:lstStyle/>
+          <a:p>
+            <a:endParaRPr lang="ko-KR" altLang="en-US"/>
+          </a:p>
+        </p:txBody>
       </p:sp>
       <p:sp>
         <p:nvSpPr>
@@ -13010,6 +12920,13 @@
             <a:prstDash val="solid"/>
           </a:ln>
         </p:spPr>
+        <p:txBody>
+          <a:bodyPr/>
+          <a:lstStyle/>
+          <a:p>
+            <a:endParaRPr lang="ko-KR" altLang="en-US"/>
+          </a:p>
+        </p:txBody>
       </p:sp>
       <p:sp>
         <p:nvSpPr>
@@ -13032,7 +12949,7 @@
           <a:bodyPr wrap="square" lIns="0" tIns="0" rIns="0" bIns="0" rtlCol="0" anchor="t"/>
           <a:lstStyle/>
           <a:p>
-            <a:pPr indent="0" marL="0">
+            <a:pPr marL="0" indent="0">
               <a:buNone/>
             </a:pPr>
             <a:r>
@@ -13071,7 +12988,7 @@
           <a:bodyPr wrap="square" lIns="0" tIns="0" rIns="0" bIns="0" rtlCol="0" anchor="t"/>
           <a:lstStyle/>
           <a:p>
-            <a:pPr indent="0" marL="0">
+            <a:pPr marL="0" indent="0">
               <a:lnSpc>
                 <a:spcPct val="103000"/>
               </a:lnSpc>
@@ -13121,6 +13038,13 @@
             <a:prstDash val="solid"/>
           </a:ln>
         </p:spPr>
+        <p:txBody>
+          <a:bodyPr/>
+          <a:lstStyle/>
+          <a:p>
+            <a:endParaRPr lang="ko-KR" altLang="en-US"/>
+          </a:p>
+        </p:txBody>
       </p:sp>
       <p:sp>
         <p:nvSpPr>
@@ -13146,6 +13070,13 @@
             <a:prstDash val="solid"/>
           </a:ln>
         </p:spPr>
+        <p:txBody>
+          <a:bodyPr/>
+          <a:lstStyle/>
+          <a:p>
+            <a:endParaRPr lang="ko-KR" altLang="en-US"/>
+          </a:p>
+        </p:txBody>
       </p:sp>
       <p:sp>
         <p:nvSpPr>
@@ -13168,7 +13099,7 @@
           <a:bodyPr wrap="square" lIns="0" tIns="0" rIns="0" bIns="0" rtlCol="0" anchor="t"/>
           <a:lstStyle/>
           <a:p>
-            <a:pPr indent="0" marL="0">
+            <a:pPr marL="0" indent="0">
               <a:buNone/>
             </a:pPr>
             <a:r>
@@ -13207,7 +13138,7 @@
           <a:bodyPr wrap="square" lIns="0" tIns="0" rIns="0" bIns="0" rtlCol="0" anchor="t"/>
           <a:lstStyle/>
           <a:p>
-            <a:pPr indent="0" marL="0">
+            <a:pPr marL="0" indent="0">
               <a:lnSpc>
                 <a:spcPct val="103000"/>
               </a:lnSpc>
@@ -13253,6 +13184,13 @@
             <a:prstDash val="solid"/>
           </a:ln>
         </p:spPr>
+        <p:txBody>
+          <a:bodyPr/>
+          <a:lstStyle/>
+          <a:p>
+            <a:endParaRPr lang="ko-KR" altLang="en-US"/>
+          </a:p>
+        </p:txBody>
       </p:sp>
       <p:sp>
         <p:nvSpPr>
@@ -13275,7 +13213,7 @@
           <a:bodyPr wrap="square" lIns="0" tIns="0" rIns="0" bIns="0" rtlCol="0" anchor="ctr"/>
           <a:lstStyle/>
           <a:p>
-            <a:pPr algn="l" indent="0" marL="0">
+            <a:pPr marL="0" indent="0" algn="l">
               <a:buNone/>
             </a:pPr>
             <a:r>
@@ -13314,7 +13252,7 @@
           <a:bodyPr wrap="square" lIns="0" tIns="0" rIns="0" bIns="0" rtlCol="0" anchor="ctr"/>
           <a:lstStyle/>
           <a:p>
-            <a:pPr algn="r" indent="0" marL="0">
+            <a:pPr marL="0" indent="0" algn="r">
               <a:buNone/>
             </a:pPr>
             <a:r>
@@ -13348,6 +13286,7 @@
         <a:solidFill>
           <a:srgbClr val="FFFFFF"/>
         </a:solidFill>
+        <a:effectLst/>
       </p:bgPr>
     </p:bg>
     <p:spTree>
@@ -13385,11 +13324,11 @@
           <a:bodyPr wrap="square" lIns="0" tIns="0" rIns="0" bIns="0" rtlCol="0" anchor="ctr"/>
           <a:lstStyle/>
           <a:p>
-            <a:pPr indent="0" marL="0">
-              <a:buNone/>
-            </a:pPr>
-            <a:r>
-              <a:rPr lang="en-US" sz="1200" b="1" spc="200" kern="0" dirty="0">
+            <a:pPr marL="0" indent="0">
+              <a:buNone/>
+            </a:pPr>
+            <a:r>
+              <a:rPr lang="en-US" sz="1200" b="1" kern="0" spc="200" dirty="0">
                 <a:solidFill>
                   <a:srgbClr val="0E7C86"/>
                 </a:solidFill>
@@ -13424,7 +13363,7 @@
           <a:bodyPr wrap="square" lIns="0" tIns="0" rIns="0" bIns="0" rtlCol="0" anchor="ctr"/>
           <a:lstStyle/>
           <a:p>
-            <a:pPr indent="0" marL="0">
+            <a:pPr marL="0" indent="0">
               <a:buNone/>
             </a:pPr>
             <a:r>
@@ -13444,14 +13383,14 @@
       </p:sp>
       <p:pic>
         <p:nvPicPr>
-          <p:cNvPr id="4" name="Image 0" descr="C:\Projects\SolarFit\docs\shots\04_revenue_limited.png">    </p:cNvPr>
+          <p:cNvPr id="4" name="Image 0" descr="C:\Projects\SolarFit\docs\shots\04_revenue_limited.png"/>
           <p:cNvPicPr>
             <a:picLocks noChangeAspect="1"/>
           </p:cNvPicPr>
           <p:nvPr/>
         </p:nvPicPr>
         <p:blipFill>
-          <a:blip r:embed="rId1"/>
+          <a:blip r:embed="rId3"/>
           <a:stretch>
             <a:fillRect/>
           </a:stretch>
@@ -13487,6 +13426,13 @@
             <a:prstDash val="solid"/>
           </a:ln>
         </p:spPr>
+        <p:txBody>
+          <a:bodyPr/>
+          <a:lstStyle/>
+          <a:p>
+            <a:endParaRPr lang="ko-KR" altLang="en-US"/>
+          </a:p>
+        </p:txBody>
       </p:sp>
       <p:sp>
         <p:nvSpPr>
@@ -13514,6 +13460,13 @@
             <a:prstDash val="solid"/>
           </a:ln>
         </p:spPr>
+        <p:txBody>
+          <a:bodyPr/>
+          <a:lstStyle/>
+          <a:p>
+            <a:endParaRPr lang="ko-KR" altLang="en-US"/>
+          </a:p>
+        </p:txBody>
       </p:sp>
       <p:sp>
         <p:nvSpPr>
@@ -13539,6 +13492,13 @@
             <a:prstDash val="solid"/>
           </a:ln>
         </p:spPr>
+        <p:txBody>
+          <a:bodyPr/>
+          <a:lstStyle/>
+          <a:p>
+            <a:endParaRPr lang="ko-KR" altLang="en-US"/>
+          </a:p>
+        </p:txBody>
       </p:sp>
       <p:sp>
         <p:nvSpPr>
@@ -13561,7 +13521,7 @@
           <a:bodyPr wrap="square" lIns="0" tIns="0" rIns="0" bIns="0" rtlCol="0" anchor="t"/>
           <a:lstStyle/>
           <a:p>
-            <a:pPr indent="0" marL="0">
+            <a:pPr marL="0" indent="0">
               <a:buNone/>
             </a:pPr>
             <a:r>
@@ -13600,7 +13560,7 @@
           <a:bodyPr wrap="square" lIns="0" tIns="0" rIns="0" bIns="0" rtlCol="0" anchor="t"/>
           <a:lstStyle/>
           <a:p>
-            <a:pPr indent="0" marL="0">
+            <a:pPr marL="0" indent="0">
               <a:lnSpc>
                 <a:spcPct val="103000"/>
               </a:lnSpc>
@@ -13650,6 +13610,13 @@
             <a:prstDash val="solid"/>
           </a:ln>
         </p:spPr>
+        <p:txBody>
+          <a:bodyPr/>
+          <a:lstStyle/>
+          <a:p>
+            <a:endParaRPr lang="ko-KR" altLang="en-US"/>
+          </a:p>
+        </p:txBody>
       </p:sp>
       <p:sp>
         <p:nvSpPr>
@@ -13672,7 +13639,7 @@
           <a:bodyPr wrap="square" lIns="0" tIns="0" rIns="0" bIns="0" rtlCol="0" anchor="ctr"/>
           <a:lstStyle/>
           <a:p>
-            <a:pPr indent="0" marL="0">
+            <a:pPr marL="0" indent="0">
               <a:buNone/>
             </a:pPr>
             <a:r>
@@ -13686,9 +13653,6 @@
               </a:rPr>
               <a:t>출처  </a:t>
             </a:r>
-            <a:pPr indent="0" marL="0">
-              <a:buNone/>
-            </a:pPr>
             <a:r>
               <a:rPr lang="en-US" sz="950" dirty="0">
                 <a:solidFill>
@@ -13730,6 +13694,13 @@
             <a:prstDash val="solid"/>
           </a:ln>
         </p:spPr>
+        <p:txBody>
+          <a:bodyPr/>
+          <a:lstStyle/>
+          <a:p>
+            <a:endParaRPr lang="ko-KR" altLang="en-US"/>
+          </a:p>
+        </p:txBody>
       </p:sp>
       <p:sp>
         <p:nvSpPr>
@@ -13755,6 +13726,13 @@
             <a:prstDash val="solid"/>
           </a:ln>
         </p:spPr>
+        <p:txBody>
+          <a:bodyPr/>
+          <a:lstStyle/>
+          <a:p>
+            <a:endParaRPr lang="ko-KR" altLang="en-US"/>
+          </a:p>
+        </p:txBody>
       </p:sp>
       <p:sp>
         <p:nvSpPr>
@@ -13777,7 +13755,7 @@
           <a:bodyPr wrap="square" lIns="0" tIns="0" rIns="0" bIns="0" rtlCol="0" anchor="t"/>
           <a:lstStyle/>
           <a:p>
-            <a:pPr indent="0" marL="0">
+            <a:pPr marL="0" indent="0">
               <a:buNone/>
             </a:pPr>
             <a:r>
@@ -13816,7 +13794,7 @@
           <a:bodyPr wrap="square" lIns="0" tIns="0" rIns="0" bIns="0" rtlCol="0" anchor="t"/>
           <a:lstStyle/>
           <a:p>
-            <a:pPr indent="0" marL="0">
+            <a:pPr marL="0" indent="0">
               <a:lnSpc>
                 <a:spcPct val="103000"/>
               </a:lnSpc>
@@ -13866,6 +13844,13 @@
             <a:prstDash val="solid"/>
           </a:ln>
         </p:spPr>
+        <p:txBody>
+          <a:bodyPr/>
+          <a:lstStyle/>
+          <a:p>
+            <a:endParaRPr lang="ko-KR" altLang="en-US"/>
+          </a:p>
+        </p:txBody>
       </p:sp>
       <p:sp>
         <p:nvSpPr>
@@ -13888,7 +13873,7 @@
           <a:bodyPr wrap="square" lIns="0" tIns="0" rIns="0" bIns="0" rtlCol="0" anchor="ctr"/>
           <a:lstStyle/>
           <a:p>
-            <a:pPr indent="0" marL="0">
+            <a:pPr marL="0" indent="0">
               <a:buNone/>
             </a:pPr>
             <a:r>
@@ -13902,9 +13887,6 @@
               </a:rPr>
               <a:t>출처  </a:t>
             </a:r>
-            <a:pPr indent="0" marL="0">
-              <a:buNone/>
-            </a:pPr>
             <a:r>
               <a:rPr lang="en-US" sz="950" dirty="0">
                 <a:solidFill>
@@ -13946,6 +13928,13 @@
             <a:prstDash val="solid"/>
           </a:ln>
         </p:spPr>
+        <p:txBody>
+          <a:bodyPr/>
+          <a:lstStyle/>
+          <a:p>
+            <a:endParaRPr lang="ko-KR" altLang="en-US"/>
+          </a:p>
+        </p:txBody>
       </p:sp>
       <p:sp>
         <p:nvSpPr>
@@ -13971,6 +13960,13 @@
             <a:prstDash val="solid"/>
           </a:ln>
         </p:spPr>
+        <p:txBody>
+          <a:bodyPr/>
+          <a:lstStyle/>
+          <a:p>
+            <a:endParaRPr lang="ko-KR" altLang="en-US"/>
+          </a:p>
+        </p:txBody>
       </p:sp>
       <p:sp>
         <p:nvSpPr>
@@ -13993,7 +13989,7 @@
           <a:bodyPr wrap="square" lIns="0" tIns="0" rIns="0" bIns="0" rtlCol="0" anchor="t"/>
           <a:lstStyle/>
           <a:p>
-            <a:pPr indent="0" marL="0">
+            <a:pPr marL="0" indent="0">
               <a:buNone/>
             </a:pPr>
             <a:r>
@@ -14032,7 +14028,7 @@
           <a:bodyPr wrap="square" lIns="0" tIns="0" rIns="0" bIns="0" rtlCol="0" anchor="t"/>
           <a:lstStyle/>
           <a:p>
-            <a:pPr indent="0" marL="0">
+            <a:pPr marL="0" indent="0">
               <a:lnSpc>
                 <a:spcPct val="103000"/>
               </a:lnSpc>
@@ -14082,6 +14078,13 @@
             <a:prstDash val="solid"/>
           </a:ln>
         </p:spPr>
+        <p:txBody>
+          <a:bodyPr/>
+          <a:lstStyle/>
+          <a:p>
+            <a:endParaRPr lang="ko-KR" altLang="en-US"/>
+          </a:p>
+        </p:txBody>
       </p:sp>
       <p:sp>
         <p:nvSpPr>
@@ -14107,6 +14110,13 @@
             <a:prstDash val="solid"/>
           </a:ln>
         </p:spPr>
+        <p:txBody>
+          <a:bodyPr/>
+          <a:lstStyle/>
+          <a:p>
+            <a:endParaRPr lang="ko-KR" altLang="en-US"/>
+          </a:p>
+        </p:txBody>
       </p:sp>
       <p:sp>
         <p:nvSpPr>
@@ -14129,7 +14139,7 @@
           <a:bodyPr wrap="square" lIns="0" tIns="0" rIns="0" bIns="0" rtlCol="0" anchor="t"/>
           <a:lstStyle/>
           <a:p>
-            <a:pPr indent="0" marL="0">
+            <a:pPr marL="0" indent="0">
               <a:buNone/>
             </a:pPr>
             <a:r>
@@ -14168,17 +14178,16 @@
           <a:bodyPr wrap="square" lIns="0" tIns="0" rIns="0" bIns="0" rtlCol="0" anchor="t"/>
           <a:lstStyle/>
           <a:p>
-            <a:pPr indent="0" marL="0">
+            <a:pPr>
               <a:lnSpc>
                 <a:spcPct val="103000"/>
               </a:lnSpc>
               <a:spcAft>
                 <a:spcPts val="300"/>
               </a:spcAft>
-              <a:buNone/>
-            </a:pPr>
-            <a:r>
-              <a:rPr lang="en-US" sz="1100" dirty="0">
+            </a:pPr>
+            <a:r>
+              <a:rPr lang="en-US" altLang="ko-KR" sz="1100">
                 <a:solidFill>
                   <a:srgbClr val="3C4A54"/>
                 </a:solidFill>
@@ -14186,22 +14195,42 @@
                 <a:ea typeface="Malgun Gothic" pitchFamily="34" charset="-122"/>
                 <a:cs typeface="Malgun Gothic" pitchFamily="34" charset="-120"/>
               </a:rPr>
-              <a:t>투자비 2.2억 · PR 0.85</a:t>
-            </a:r>
-            <a:endParaRPr lang="en-US" sz="1100" dirty="0"/>
-          </a:p>
-          <a:p>
-            <a:pPr indent="0" marL="0">
+              <a:t>• 99kW · </a:t>
+            </a:r>
+            <a:r>
+              <a:rPr lang="ko-KR" altLang="en-US" sz="1100">
+                <a:solidFill>
+                  <a:srgbClr val="3C4A54"/>
+                </a:solidFill>
+                <a:latin typeface="Malgun Gothic" pitchFamily="34" charset="0"/>
+                <a:ea typeface="Malgun Gothic" pitchFamily="34" charset="-122"/>
+                <a:cs typeface="Malgun Gothic" pitchFamily="34" charset="-120"/>
+              </a:rPr>
+              <a:t>이용률 </a:t>
+            </a:r>
+            <a:r>
+              <a:rPr lang="en-US" altLang="ko-KR" sz="1100">
+                <a:solidFill>
+                  <a:srgbClr val="3C4A54"/>
+                </a:solidFill>
+                <a:latin typeface="Malgun Gothic" pitchFamily="34" charset="0"/>
+                <a:ea typeface="Malgun Gothic" pitchFamily="34" charset="-122"/>
+                <a:cs typeface="Malgun Gothic" pitchFamily="34" charset="-120"/>
+              </a:rPr>
+              <a:t>16% · PR 0.85</a:t>
+            </a:r>
+          </a:p>
+          <a:p>
+            <a:pPr>
               <a:lnSpc>
                 <a:spcPct val="103000"/>
               </a:lnSpc>
               <a:spcAft>
                 <a:spcPts val="300"/>
               </a:spcAft>
-              <a:buNone/>
-            </a:pPr>
-            <a:r>
-              <a:rPr lang="en-US" sz="1100" dirty="0">
+            </a:pPr>
+            <a:r>
+              <a:rPr lang="en-US" altLang="ko-KR" sz="1100">
                 <a:solidFill>
                   <a:srgbClr val="3C4A54"/>
                 </a:solidFill>
@@ -14209,7 +14238,247 @@
                 <a:ea typeface="Malgun Gothic" pitchFamily="34" charset="-122"/>
                 <a:cs typeface="Malgun Gothic" pitchFamily="34" charset="-120"/>
               </a:rPr>
-              <a:t>일사량 보정(+1,014만)은 이중계산 소지로 제거</a:t>
+              <a:t>• </a:t>
+            </a:r>
+            <a:r>
+              <a:rPr lang="ko-KR" altLang="en-US" sz="1100">
+                <a:solidFill>
+                  <a:srgbClr val="3C4A54"/>
+                </a:solidFill>
+                <a:latin typeface="Malgun Gothic" pitchFamily="34" charset="0"/>
+                <a:ea typeface="Malgun Gothic" pitchFamily="34" charset="-122"/>
+                <a:cs typeface="Malgun Gothic" pitchFamily="34" charset="-120"/>
+              </a:rPr>
+              <a:t>투자비 </a:t>
+            </a:r>
+            <a:r>
+              <a:rPr lang="en-US" altLang="ko-KR" sz="1100">
+                <a:solidFill>
+                  <a:srgbClr val="3C4A54"/>
+                </a:solidFill>
+                <a:latin typeface="Malgun Gothic" pitchFamily="34" charset="0"/>
+                <a:ea typeface="Malgun Gothic" pitchFamily="34" charset="-122"/>
+                <a:cs typeface="Malgun Gothic" pitchFamily="34" charset="-120"/>
+              </a:rPr>
+              <a:t>2.2</a:t>
+            </a:r>
+            <a:r>
+              <a:rPr lang="ko-KR" altLang="en-US" sz="1100">
+                <a:solidFill>
+                  <a:srgbClr val="3C4A54"/>
+                </a:solidFill>
+                <a:latin typeface="Malgun Gothic" pitchFamily="34" charset="0"/>
+                <a:ea typeface="Malgun Gothic" pitchFamily="34" charset="-122"/>
+                <a:cs typeface="Malgun Gothic" pitchFamily="34" charset="-120"/>
+              </a:rPr>
+              <a:t>억 </a:t>
+            </a:r>
+            <a:r>
+              <a:rPr lang="en-US" altLang="ko-KR" sz="1100">
+                <a:solidFill>
+                  <a:srgbClr val="3C4A54"/>
+                </a:solidFill>
+                <a:latin typeface="Malgun Gothic" pitchFamily="34" charset="0"/>
+                <a:ea typeface="Malgun Gothic" pitchFamily="34" charset="-122"/>
+                <a:cs typeface="Malgun Gothic" pitchFamily="34" charset="-120"/>
+              </a:rPr>
+              <a:t>(kW</a:t>
+            </a:r>
+            <a:r>
+              <a:rPr lang="ko-KR" altLang="en-US" sz="1100">
+                <a:solidFill>
+                  <a:srgbClr val="3C4A54"/>
+                </a:solidFill>
+                <a:latin typeface="Malgun Gothic" pitchFamily="34" charset="0"/>
+                <a:ea typeface="Malgun Gothic" pitchFamily="34" charset="-122"/>
+                <a:cs typeface="Malgun Gothic" pitchFamily="34" charset="-120"/>
+              </a:rPr>
+              <a:t>당 </a:t>
+            </a:r>
+            <a:r>
+              <a:rPr lang="en-US" altLang="ko-KR" sz="1100">
+                <a:solidFill>
+                  <a:srgbClr val="3C4A54"/>
+                </a:solidFill>
+                <a:latin typeface="Malgun Gothic" pitchFamily="34" charset="0"/>
+                <a:ea typeface="Malgun Gothic" pitchFamily="34" charset="-122"/>
+                <a:cs typeface="Malgun Gothic" pitchFamily="34" charset="-120"/>
+              </a:rPr>
+              <a:t>220</a:t>
+            </a:r>
+            <a:r>
+              <a:rPr lang="ko-KR" altLang="en-US" sz="1100">
+                <a:solidFill>
+                  <a:srgbClr val="3C4A54"/>
+                </a:solidFill>
+                <a:latin typeface="Malgun Gothic" pitchFamily="34" charset="0"/>
+                <a:ea typeface="Malgun Gothic" pitchFamily="34" charset="-122"/>
+                <a:cs typeface="Malgun Gothic" pitchFamily="34" charset="-120"/>
+              </a:rPr>
+              <a:t>만원</a:t>
+            </a:r>
+            <a:r>
+              <a:rPr lang="en-US" altLang="ko-KR" sz="1100">
+                <a:solidFill>
+                  <a:srgbClr val="3C4A54"/>
+                </a:solidFill>
+                <a:latin typeface="Malgun Gothic" pitchFamily="34" charset="0"/>
+                <a:ea typeface="Malgun Gothic" pitchFamily="34" charset="-122"/>
+                <a:cs typeface="Malgun Gothic" pitchFamily="34" charset="-120"/>
+              </a:rPr>
+              <a:t>)</a:t>
+            </a:r>
+          </a:p>
+          <a:p>
+            <a:pPr>
+              <a:lnSpc>
+                <a:spcPct val="103000"/>
+              </a:lnSpc>
+              <a:spcAft>
+                <a:spcPts val="300"/>
+              </a:spcAft>
+            </a:pPr>
+            <a:r>
+              <a:rPr lang="en-US" altLang="ko-KR" sz="1100">
+                <a:solidFill>
+                  <a:srgbClr val="3C4A54"/>
+                </a:solidFill>
+                <a:latin typeface="Malgun Gothic" pitchFamily="34" charset="0"/>
+                <a:ea typeface="Malgun Gothic" pitchFamily="34" charset="-122"/>
+                <a:cs typeface="Malgun Gothic" pitchFamily="34" charset="-120"/>
+              </a:rPr>
+              <a:t>• SMP 112.68</a:t>
+            </a:r>
+            <a:r>
+              <a:rPr lang="ko-KR" altLang="en-US" sz="1100">
+                <a:solidFill>
+                  <a:srgbClr val="3C4A54"/>
+                </a:solidFill>
+                <a:latin typeface="Malgun Gothic" pitchFamily="34" charset="0"/>
+                <a:ea typeface="Malgun Gothic" pitchFamily="34" charset="-122"/>
+                <a:cs typeface="Malgun Gothic" pitchFamily="34" charset="-120"/>
+              </a:rPr>
+              <a:t>원 </a:t>
+            </a:r>
+            <a:r>
+              <a:rPr lang="en-US" altLang="ko-KR" sz="1100">
+                <a:solidFill>
+                  <a:srgbClr val="3C4A54"/>
+                </a:solidFill>
+                <a:latin typeface="Malgun Gothic" pitchFamily="34" charset="0"/>
+                <a:ea typeface="Malgun Gothic" pitchFamily="34" charset="-122"/>
+                <a:cs typeface="Malgun Gothic" pitchFamily="34" charset="-120"/>
+              </a:rPr>
+              <a:t>· REC </a:t>
+            </a:r>
+            <a:r>
+              <a:rPr lang="ko-KR" altLang="en-US" sz="1100">
+                <a:solidFill>
+                  <a:srgbClr val="3C4A54"/>
+                </a:solidFill>
+                <a:latin typeface="Malgun Gothic" pitchFamily="34" charset="0"/>
+                <a:ea typeface="Malgun Gothic" pitchFamily="34" charset="-122"/>
+                <a:cs typeface="Malgun Gothic" pitchFamily="34" charset="-120"/>
+              </a:rPr>
+              <a:t>가중치 </a:t>
+            </a:r>
+            <a:r>
+              <a:rPr lang="en-US" altLang="ko-KR" sz="1100">
+                <a:solidFill>
+                  <a:srgbClr val="3C4A54"/>
+                </a:solidFill>
+                <a:latin typeface="Malgun Gothic" pitchFamily="34" charset="0"/>
+                <a:ea typeface="Malgun Gothic" pitchFamily="34" charset="-122"/>
+                <a:cs typeface="Malgun Gothic" pitchFamily="34" charset="-120"/>
+              </a:rPr>
+              <a:t>1.2</a:t>
+            </a:r>
+          </a:p>
+          <a:p>
+            <a:pPr>
+              <a:lnSpc>
+                <a:spcPct val="103000"/>
+              </a:lnSpc>
+              <a:spcAft>
+                <a:spcPts val="300"/>
+              </a:spcAft>
+            </a:pPr>
+            <a:r>
+              <a:rPr lang="en-US" altLang="ko-KR" sz="1100">
+                <a:solidFill>
+                  <a:srgbClr val="3C4A54"/>
+                </a:solidFill>
+                <a:latin typeface="Malgun Gothic" pitchFamily="34" charset="0"/>
+                <a:ea typeface="Malgun Gothic" pitchFamily="34" charset="-122"/>
+                <a:cs typeface="Malgun Gothic" pitchFamily="34" charset="-120"/>
+              </a:rPr>
+              <a:t>• </a:t>
+            </a:r>
+            <a:r>
+              <a:rPr lang="ko-KR" altLang="en-US" sz="1100">
+                <a:solidFill>
+                  <a:srgbClr val="3C4A54"/>
+                </a:solidFill>
+                <a:latin typeface="Malgun Gothic" pitchFamily="34" charset="0"/>
+                <a:ea typeface="Malgun Gothic" pitchFamily="34" charset="-122"/>
+                <a:cs typeface="Malgun Gothic" pitchFamily="34" charset="-120"/>
+              </a:rPr>
+              <a:t>운영비</a:t>
+            </a:r>
+            <a:r>
+              <a:rPr lang="en-US" altLang="ko-KR" sz="1100">
+                <a:solidFill>
+                  <a:srgbClr val="3C4A54"/>
+                </a:solidFill>
+                <a:latin typeface="Malgun Gothic" pitchFamily="34" charset="0"/>
+                <a:ea typeface="Malgun Gothic" pitchFamily="34" charset="-122"/>
+                <a:cs typeface="Malgun Gothic" pitchFamily="34" charset="-120"/>
+              </a:rPr>
+              <a:t>·</a:t>
+            </a:r>
+            <a:r>
+              <a:rPr lang="ko-KR" altLang="en-US" sz="1100">
+                <a:solidFill>
+                  <a:srgbClr val="3C4A54"/>
+                </a:solidFill>
+                <a:latin typeface="Malgun Gothic" pitchFamily="34" charset="0"/>
+                <a:ea typeface="Malgun Gothic" pitchFamily="34" charset="-122"/>
+                <a:cs typeface="Malgun Gothic" pitchFamily="34" charset="-120"/>
+              </a:rPr>
+              <a:t>감가 미반영 </a:t>
+            </a:r>
+            <a:r>
+              <a:rPr lang="en-US" altLang="ko-KR" sz="1100">
+                <a:solidFill>
+                  <a:srgbClr val="3C4A54"/>
+                </a:solidFill>
+                <a:latin typeface="Malgun Gothic" pitchFamily="34" charset="0"/>
+                <a:ea typeface="Malgun Gothic" pitchFamily="34" charset="-122"/>
+                <a:cs typeface="Malgun Gothic" pitchFamily="34" charset="-120"/>
+              </a:rPr>
+              <a:t>(</a:t>
+            </a:r>
+            <a:r>
+              <a:rPr lang="ko-KR" altLang="en-US" sz="1100">
+                <a:solidFill>
+                  <a:srgbClr val="3C4A54"/>
+                </a:solidFill>
+                <a:latin typeface="Malgun Gothic" pitchFamily="34" charset="0"/>
+                <a:ea typeface="Malgun Gothic" pitchFamily="34" charset="-122"/>
+                <a:cs typeface="Malgun Gothic" pitchFamily="34" charset="-120"/>
+              </a:rPr>
+              <a:t>단순 매출</a:t>
+            </a:r>
+            <a:r>
+              <a:rPr lang="en-US" altLang="ko-KR" sz="1100">
+                <a:solidFill>
+                  <a:srgbClr val="3C4A54"/>
+                </a:solidFill>
+                <a:latin typeface="Malgun Gothic" pitchFamily="34" charset="0"/>
+                <a:ea typeface="Malgun Gothic" pitchFamily="34" charset="-122"/>
+                <a:cs typeface="Malgun Gothic" pitchFamily="34" charset="-120"/>
+              </a:rPr>
+              <a:t>)</a:t>
             </a:r>
             <a:endParaRPr lang="en-US" sz="1100" dirty="0"/>
           </a:p>
@@ -14237,6 +14506,13 @@
             <a:prstDash val="solid"/>
           </a:ln>
         </p:spPr>
+        <p:txBody>
+          <a:bodyPr/>
+          <a:lstStyle/>
+          <a:p>
+            <a:endParaRPr lang="ko-KR" altLang="en-US"/>
+          </a:p>
+        </p:txBody>
       </p:sp>
       <p:sp>
         <p:nvSpPr>
@@ -14259,7 +14535,7 @@
           <a:bodyPr wrap="square" lIns="0" tIns="0" rIns="0" bIns="0" rtlCol="0" anchor="ctr"/>
           <a:lstStyle/>
           <a:p>
-            <a:pPr algn="l" indent="0" marL="0">
+            <a:pPr marL="0" indent="0" algn="l">
               <a:buNone/>
             </a:pPr>
             <a:r>
@@ -14298,7 +14574,7 @@
           <a:bodyPr wrap="square" lIns="0" tIns="0" rIns="0" bIns="0" rtlCol="0" anchor="ctr"/>
           <a:lstStyle/>
           <a:p>
-            <a:pPr algn="r" indent="0" marL="0">
+            <a:pPr marL="0" indent="0" algn="r">
               <a:buNone/>
             </a:pPr>
             <a:r>
@@ -14313,6 +14589,79 @@
               <a:t>9</a:t>
             </a:r>
             <a:endParaRPr lang="en-US" sz="900" dirty="0"/>
+          </a:p>
+        </p:txBody>
+      </p:sp>
+      <p:sp>
+        <p:nvSpPr>
+          <p:cNvPr id="26" name="Shape 13">
+            <a:extLst>
+              <a:ext uri="{FF2B5EF4-FFF2-40B4-BE49-F238E27FC236}">
+                <a16:creationId xmlns:a16="http://schemas.microsoft.com/office/drawing/2014/main" id="{FBFDA0F9-A1DF-19F9-88C2-9457F5899032}"/>
+              </a:ext>
+            </a:extLst>
+          </p:cNvPr>
+          <p:cNvSpPr/>
+          <p:nvPr/>
+        </p:nvSpPr>
+        <p:spPr>
+          <a:xfrm>
+            <a:off x="8394324" y="5614416"/>
+            <a:ext cx="1412748" cy="292608"/>
+          </a:xfrm>
+          <a:prstGeom prst="roundRect">
+            <a:avLst>
+              <a:gd name="adj" fmla="val 18750"/>
+            </a:avLst>
+          </a:prstGeom>
+          <a:solidFill>
+            <a:srgbClr val="E2F0F1"/>
+          </a:solidFill>
+          <a:ln w="12700">
+            <a:solidFill>
+              <a:srgbClr val="E2F0F1"/>
+            </a:solidFill>
+            <a:prstDash val="solid"/>
+          </a:ln>
+        </p:spPr>
+        <p:txBody>
+          <a:bodyPr/>
+          <a:lstStyle/>
+          <a:p>
+            <a:r>
+              <a:rPr lang="en-US" altLang="ko-KR" sz="950" b="1">
+                <a:solidFill>
+                  <a:srgbClr val="0E7C86"/>
+                </a:solidFill>
+                <a:latin typeface="Malgun Gothic" pitchFamily="34" charset="0"/>
+                <a:ea typeface="Malgun Gothic" pitchFamily="34" charset="-122"/>
+                <a:cs typeface="Malgun Gothic" pitchFamily="34" charset="-120"/>
+              </a:rPr>
+              <a:t>출처 </a:t>
+            </a:r>
+            <a:r>
+              <a:rPr lang="en-US" altLang="ko-KR" sz="900">
+                <a:solidFill>
+                  <a:srgbClr val="0B5D64"/>
+                </a:solidFill>
+                <a:latin typeface="Malgun Gothic" pitchFamily="34" charset="0"/>
+                <a:ea typeface="Malgun Gothic" pitchFamily="34" charset="-122"/>
+                <a:cs typeface="Malgun Gothic" pitchFamily="34" charset="-120"/>
+              </a:rPr>
+              <a:t>KPX.</a:t>
+            </a:r>
+            <a:r>
+              <a:rPr lang="ko-KR" altLang="en-US" sz="900">
+                <a:solidFill>
+                  <a:srgbClr val="0B5D64"/>
+                </a:solidFill>
+                <a:latin typeface="Malgun Gothic" pitchFamily="34" charset="0"/>
+                <a:ea typeface="Malgun Gothic" pitchFamily="34" charset="-122"/>
+                <a:cs typeface="Malgun Gothic" pitchFamily="34" charset="-120"/>
+              </a:rPr>
+              <a:t>업계표준가정</a:t>
+            </a:r>
+            <a:endParaRPr lang="en-US" altLang="ko-KR" sz="900"/>
           </a:p>
         </p:txBody>
       </p:sp>
@@ -14617,4 +14966,319 @@
     </a:ext>
   </a:extLst>
 </a:theme>
+</file>
+
+<file path=ppt/theme/theme2.xml><?xml version="1.0" encoding="utf-8"?>
+<a:theme xmlns:a="http://schemas.openxmlformats.org/drawingml/2006/main" name="Office 테마">
+  <a:themeElements>
+    <a:clrScheme name="Office">
+      <a:dk1>
+        <a:sysClr val="windowText" lastClr="000000"/>
+      </a:dk1>
+      <a:lt1>
+        <a:sysClr val="window" lastClr="FFFFFF"/>
+      </a:lt1>
+      <a:dk2>
+        <a:srgbClr val="0E2841"/>
+      </a:dk2>
+      <a:lt2>
+        <a:srgbClr val="E8E8E8"/>
+      </a:lt2>
+      <a:accent1>
+        <a:srgbClr val="156082"/>
+      </a:accent1>
+      <a:accent2>
+        <a:srgbClr val="E97132"/>
+      </a:accent2>
+      <a:accent3>
+        <a:srgbClr val="196B24"/>
+      </a:accent3>
+      <a:accent4>
+        <a:srgbClr val="0F9ED5"/>
+      </a:accent4>
+      <a:accent5>
+        <a:srgbClr val="A02B93"/>
+      </a:accent5>
+      <a:accent6>
+        <a:srgbClr val="4EA72E"/>
+      </a:accent6>
+      <a:hlink>
+        <a:srgbClr val="467886"/>
+      </a:hlink>
+      <a:folHlink>
+        <a:srgbClr val="96607D"/>
+      </a:folHlink>
+    </a:clrScheme>
+    <a:fontScheme name="Office">
+      <a:majorFont>
+        <a:latin typeface="맑은 고딕" panose="02110004020202020204"/>
+        <a:ea typeface=""/>
+        <a:cs typeface=""/>
+        <a:font script="Jpan" typeface="游ゴシック Light"/>
+        <a:font script="Hang" typeface="맑은 고딕"/>
+        <a:font script="Hans" typeface="等线 Light"/>
+        <a:font script="Hant" typeface="新細明體"/>
+        <a:font script="Arab" typeface="Times New Roman"/>
+        <a:font script="Hebr" typeface="Times New Roman"/>
+        <a:font script="Thai" typeface="Angsana New"/>
+        <a:font script="Ethi" typeface="Nyala"/>
+        <a:font script="Beng" typeface="Vrinda"/>
+        <a:font script="Gujr" typeface="Shruti"/>
+        <a:font script="Khmr" typeface="MoolBoran"/>
+        <a:font script="Knda" typeface="Tunga"/>
+        <a:font script="Guru" typeface="Raavi"/>
+        <a:font script="Cans" typeface="Euphemia"/>
+        <a:font script="Cher" typeface="Plantagenet Cherokee"/>
+        <a:font script="Yiii" typeface="Microsoft Yi Baiti"/>
+        <a:font script="Tibt" typeface="Microsoft Himalaya"/>
+        <a:font script="Thaa" typeface="MV Boli"/>
+        <a:font script="Deva" typeface="Mangal"/>
+        <a:font script="Telu" typeface="Gautami"/>
+        <a:font script="Taml" typeface="Latha"/>
+        <a:font script="Syrc" typeface="Estrangelo Edessa"/>
+        <a:font script="Orya" typeface="Kalinga"/>
+        <a:font script="Mlym" typeface="Kartika"/>
+        <a:font script="Laoo" typeface="DokChampa"/>
+        <a:font script="Sinh" typeface="Iskoola Pota"/>
+        <a:font script="Mong" typeface="Mongolian Baiti"/>
+        <a:font script="Viet" typeface="Times New Roman"/>
+        <a:font script="Uigh" typeface="Microsoft Uighur"/>
+        <a:font script="Geor" typeface="Sylfaen"/>
+        <a:font script="Armn" typeface="Arial"/>
+        <a:font script="Bugi" typeface="Leelawadee UI"/>
+        <a:font script="Bopo" typeface="Microsoft JhengHei"/>
+        <a:font script="Java" typeface="Javanese Text"/>
+        <a:font script="Lisu" typeface="Segoe UI"/>
+        <a:font script="Mymr" typeface="Myanmar Text"/>
+        <a:font script="Nkoo" typeface="Ebrima"/>
+        <a:font script="Olck" typeface="Nirmala UI"/>
+        <a:font script="Osma" typeface="Ebrima"/>
+        <a:font script="Phag" typeface="Phagspa"/>
+        <a:font script="Syrn" typeface="Estrangelo Edessa"/>
+        <a:font script="Syrj" typeface="Estrangelo Edessa"/>
+        <a:font script="Syre" typeface="Estrangelo Edessa"/>
+        <a:font script="Sora" typeface="Nirmala UI"/>
+        <a:font script="Tale" typeface="Microsoft Tai Le"/>
+        <a:font script="Talu" typeface="Microsoft New Tai Lue"/>
+        <a:font script="Tfng" typeface="Ebrima"/>
+      </a:majorFont>
+      <a:minorFont>
+        <a:latin typeface="맑은 고딕" panose="02110004020202020204"/>
+        <a:ea typeface=""/>
+        <a:cs typeface=""/>
+        <a:font script="Jpan" typeface="游ゴシック"/>
+        <a:font script="Hang" typeface="맑은 고딕"/>
+        <a:font script="Hans" typeface="等线"/>
+        <a:font script="Hant" typeface="新細明體"/>
+        <a:font script="Arab" typeface="Arial"/>
+        <a:font script="Hebr" typeface="Arial"/>
+        <a:font script="Thai" typeface="Cordia New"/>
+        <a:font script="Ethi" typeface="Nyala"/>
+        <a:font script="Beng" typeface="Vrinda"/>
+        <a:font script="Gujr" typeface="Shruti"/>
+        <a:font script="Khmr" typeface="DaunPenh"/>
+        <a:font script="Knda" typeface="Tunga"/>
+        <a:font script="Guru" typeface="Raavi"/>
+        <a:font script="Cans" typeface="Euphemia"/>
+        <a:font script="Cher" typeface="Plantagenet Cherokee"/>
+        <a:font script="Yiii" typeface="Microsoft Yi Baiti"/>
+        <a:font script="Tibt" typeface="Microsoft Himalaya"/>
+        <a:font script="Thaa" typeface="MV Boli"/>
+        <a:font script="Deva" typeface="Mangal"/>
+        <a:font script="Telu" typeface="Gautami"/>
+        <a:font script="Taml" typeface="Latha"/>
+        <a:font script="Syrc" typeface="Estrangelo Edessa"/>
+        <a:font script="Orya" typeface="Kalinga"/>
+        <a:font script="Mlym" typeface="Kartika"/>
+        <a:font script="Laoo" typeface="DokChampa"/>
+        <a:font script="Sinh" typeface="Iskoola Pota"/>
+        <a:font script="Mong" typeface="Mongolian Baiti"/>
+        <a:font script="Viet" typeface="Arial"/>
+        <a:font script="Uigh" typeface="Microsoft Uighur"/>
+        <a:font script="Geor" typeface="Sylfaen"/>
+        <a:font script="Armn" typeface="Arial"/>
+        <a:font script="Bugi" typeface="Leelawadee UI"/>
+        <a:font script="Bopo" typeface="Microsoft JhengHei"/>
+        <a:font script="Java" typeface="Javanese Text"/>
+        <a:font script="Lisu" typeface="Segoe UI"/>
+        <a:font script="Mymr" typeface="Myanmar Text"/>
+        <a:font script="Nkoo" typeface="Ebrima"/>
+        <a:font script="Olck" typeface="Nirmala UI"/>
+        <a:font script="Osma" typeface="Ebrima"/>
+        <a:font script="Phag" typeface="Phagspa"/>
+        <a:font script="Syrn" typeface="Estrangelo Edessa"/>
+        <a:font script="Syrj" typeface="Estrangelo Edessa"/>
+        <a:font script="Syre" typeface="Estrangelo Edessa"/>
+        <a:font script="Sora" typeface="Nirmala UI"/>
+        <a:font script="Tale" typeface="Microsoft Tai Le"/>
+        <a:font script="Talu" typeface="Microsoft New Tai Lue"/>
+        <a:font script="Tfng" typeface="Ebrima"/>
+      </a:minorFont>
+    </a:fontScheme>
+    <a:fmtScheme name="Office">
+      <a:fillStyleLst>
+        <a:solidFill>
+          <a:schemeClr val="phClr"/>
+        </a:solidFill>
+        <a:gradFill rotWithShape="1">
+          <a:gsLst>
+            <a:gs pos="0">
+              <a:schemeClr val="phClr">
+                <a:lumMod val="110000"/>
+                <a:satMod val="105000"/>
+                <a:tint val="67000"/>
+              </a:schemeClr>
+            </a:gs>
+            <a:gs pos="50000">
+              <a:schemeClr val="phClr">
+                <a:lumMod val="105000"/>
+                <a:satMod val="103000"/>
+                <a:tint val="73000"/>
+              </a:schemeClr>
+            </a:gs>
+            <a:gs pos="100000">
+              <a:schemeClr val="phClr">
+                <a:lumMod val="105000"/>
+                <a:satMod val="109000"/>
+                <a:tint val="81000"/>
+              </a:schemeClr>
+            </a:gs>
+          </a:gsLst>
+          <a:lin ang="5400000" scaled="0"/>
+        </a:gradFill>
+        <a:gradFill rotWithShape="1">
+          <a:gsLst>
+            <a:gs pos="0">
+              <a:schemeClr val="phClr">
+                <a:satMod val="103000"/>
+                <a:lumMod val="102000"/>
+                <a:tint val="94000"/>
+              </a:schemeClr>
+            </a:gs>
+            <a:gs pos="50000">
+              <a:schemeClr val="phClr">
+                <a:satMod val="110000"/>
+                <a:lumMod val="100000"/>
+                <a:shade val="100000"/>
+              </a:schemeClr>
+            </a:gs>
+            <a:gs pos="100000">
+              <a:schemeClr val="phClr">
+                <a:lumMod val="99000"/>
+                <a:satMod val="120000"/>
+                <a:shade val="78000"/>
+              </a:schemeClr>
+            </a:gs>
+          </a:gsLst>
+          <a:lin ang="5400000" scaled="0"/>
+        </a:gradFill>
+      </a:fillStyleLst>
+      <a:lnStyleLst>
+        <a:ln w="12700" cap="flat" cmpd="sng" algn="ctr">
+          <a:solidFill>
+            <a:schemeClr val="phClr"/>
+          </a:solidFill>
+          <a:prstDash val="solid"/>
+          <a:miter lim="800000"/>
+        </a:ln>
+        <a:ln w="19050" cap="flat" cmpd="sng" algn="ctr">
+          <a:solidFill>
+            <a:schemeClr val="phClr"/>
+          </a:solidFill>
+          <a:prstDash val="solid"/>
+          <a:miter lim="800000"/>
+        </a:ln>
+        <a:ln w="25400" cap="flat" cmpd="sng" algn="ctr">
+          <a:solidFill>
+            <a:schemeClr val="phClr"/>
+          </a:solidFill>
+          <a:prstDash val="solid"/>
+          <a:miter lim="800000"/>
+        </a:ln>
+      </a:lnStyleLst>
+      <a:effectStyleLst>
+        <a:effectStyle>
+          <a:effectLst/>
+        </a:effectStyle>
+        <a:effectStyle>
+          <a:effectLst/>
+        </a:effectStyle>
+        <a:effectStyle>
+          <a:effectLst>
+            <a:outerShdw blurRad="57150" dist="19050" dir="5400000" algn="ctr" rotWithShape="0">
+              <a:srgbClr val="000000">
+                <a:alpha val="63000"/>
+              </a:srgbClr>
+            </a:outerShdw>
+          </a:effectLst>
+        </a:effectStyle>
+      </a:effectStyleLst>
+      <a:bgFillStyleLst>
+        <a:solidFill>
+          <a:schemeClr val="phClr"/>
+        </a:solidFill>
+        <a:solidFill>
+          <a:schemeClr val="phClr">
+            <a:tint val="95000"/>
+            <a:satMod val="170000"/>
+          </a:schemeClr>
+        </a:solidFill>
+        <a:gradFill rotWithShape="1">
+          <a:gsLst>
+            <a:gs pos="0">
+              <a:schemeClr val="phClr">
+                <a:tint val="93000"/>
+                <a:satMod val="150000"/>
+                <a:shade val="98000"/>
+                <a:lumMod val="102000"/>
+              </a:schemeClr>
+            </a:gs>
+            <a:gs pos="50000">
+              <a:schemeClr val="phClr">
+                <a:tint val="98000"/>
+                <a:satMod val="130000"/>
+                <a:shade val="90000"/>
+                <a:lumMod val="103000"/>
+              </a:schemeClr>
+            </a:gs>
+            <a:gs pos="100000">
+              <a:schemeClr val="phClr">
+                <a:shade val="63000"/>
+                <a:satMod val="120000"/>
+              </a:schemeClr>
+            </a:gs>
+          </a:gsLst>
+          <a:lin ang="5400000" scaled="0"/>
+        </a:gradFill>
+      </a:bgFillStyleLst>
+    </a:fmtScheme>
+  </a:themeElements>
+  <a:objectDefaults>
+    <a:lnDef>
+      <a:spPr/>
+      <a:bodyPr/>
+      <a:lstStyle/>
+      <a:style>
+        <a:lnRef idx="2">
+          <a:schemeClr val="accent1"/>
+        </a:lnRef>
+        <a:fillRef idx="0">
+          <a:schemeClr val="accent1"/>
+        </a:fillRef>
+        <a:effectRef idx="1">
+          <a:schemeClr val="accent1"/>
+        </a:effectRef>
+        <a:fontRef idx="minor">
+          <a:schemeClr val="tx1"/>
+        </a:fontRef>
+      </a:style>
+    </a:lnDef>
+  </a:objectDefaults>
+  <a:extraClrSchemeLst/>
+  <a:extLst>
+    <a:ext uri="{05A4C25C-085E-4340-85A3-A5531E510DB2}">
+      <thm15:themeFamily xmlns:thm15="http://schemas.microsoft.com/office/thememl/2012/main" name="Office Theme" id="{2E142A2C-CD16-42D6-873A-C26D2A0506FA}" vid="{1BDDFF52-6CD6-40A5-AB3C-68EB2F1E4D0A}"/>
+    </a:ext>
+  </a:extLst>
+</a:theme>
 </file>